--- a/Protein_Design.pptx
+++ b/Protein_Design.pptx
@@ -14,6 +14,14 @@
     <p:sldId id="262" r:id="rId13"/>
     <p:sldId id="263" r:id="rId14"/>
     <p:sldId id="264" r:id="rId15"/>
+    <p:sldId id="265" r:id="rId16"/>
+    <p:sldId id="266" r:id="rId17"/>
+    <p:sldId id="267" r:id="rId18"/>
+    <p:sldId id="268" r:id="rId19"/>
+    <p:sldId id="269" r:id="rId20"/>
+    <p:sldId id="270" r:id="rId21"/>
+    <p:sldId id="271" r:id="rId22"/>
+    <p:sldId id="272" r:id="rId23"/>
   </p:sldIdLst>
   <p:sldSz cx="12188952" cy="6858000" type="screen4x3"/>
   <p:notesSz cx="6858000" cy="9144000"/>
@@ -3111,7 +3119,7 @@
             <a:avLst/>
           </a:prstGeom>
           <a:solidFill>
-            <a:srgbClr val="1A375E"/>
+            <a:srgbClr val="041E42"/>
           </a:solidFill>
           <a:ln>
             <a:noFill/>
@@ -3147,14 +3155,14 @@
         </p:nvSpPr>
         <p:spPr>
           <a:xfrm>
-            <a:off x="0" y="5943600"/>
-            <a:ext cx="12188952" cy="914400"/>
+            <a:off x="0" y="5303520"/>
+            <a:ext cx="12188952" cy="73152"/>
           </a:xfrm>
           <a:prstGeom prst="rect">
             <a:avLst/>
           </a:prstGeom>
           <a:solidFill>
-            <a:srgbClr val="00B0A0"/>
+            <a:srgbClr val="C8A951"/>
           </a:solidFill>
           <a:ln>
             <a:noFill/>
@@ -3190,14 +3198,14 @@
         </p:nvSpPr>
         <p:spPr>
           <a:xfrm>
-            <a:off x="0" y="0"/>
-            <a:ext cx="365760" cy="6858000"/>
+            <a:off x="0" y="6629400"/>
+            <a:ext cx="12188952" cy="228600"/>
           </a:xfrm>
           <a:prstGeom prst="rect">
             <a:avLst/>
           </a:prstGeom>
           <a:solidFill>
-            <a:srgbClr val="275D9C"/>
+            <a:srgbClr val="C8A951"/>
           </a:solidFill>
           <a:ln>
             <a:noFill/>
@@ -3233,8 +3241,8 @@
         </p:nvSpPr>
         <p:spPr>
           <a:xfrm>
-            <a:off x="640080" y="1371600"/>
-            <a:ext cx="10515600" cy="1645920"/>
+            <a:off x="548640" y="365760"/>
+            <a:ext cx="10515600" cy="457200"/>
           </a:xfrm>
           <a:prstGeom prst="rect">
             <a:avLst/>
@@ -3247,15 +3255,15 @@
           </a:bodyPr>
           <a:lstStyle/>
           <a:p>
-            <a:pPr algn="ctr"/>
-            <a:r>
-              <a:rPr sz="6000" b="1">
-                <a:solidFill>
-                  <a:srgbClr val="FFFFFF"/>
-                </a:solidFill>
-                <a:latin typeface="Calibri"/>
-              </a:rPr>
-              <a:t>Protein Design</a:t>
+            <a:pPr algn="l"/>
+            <a:r>
+              <a:rPr sz="1400" b="0">
+                <a:solidFill>
+                  <a:srgbClr val="C8A951"/>
+                </a:solidFill>
+                <a:latin typeface="Calibri"/>
+              </a:rPr>
+              <a:t>GEORGETOWN UNIVERSITY</a:t>
             </a:r>
           </a:p>
         </p:txBody>
@@ -3268,8 +3276,8 @@
         </p:nvSpPr>
         <p:spPr>
           <a:xfrm>
-            <a:off x="640080" y="3108960"/>
-            <a:ext cx="10515600" cy="822960"/>
+            <a:off x="548640" y="1280160"/>
+            <a:ext cx="10515600" cy="1828800"/>
           </a:xfrm>
           <a:prstGeom prst="rect">
             <a:avLst/>
@@ -3282,15 +3290,15 @@
           </a:bodyPr>
           <a:lstStyle/>
           <a:p>
-            <a:pPr algn="ctr"/>
-            <a:r>
-              <a:rPr sz="2800" b="0">
-                <a:solidFill>
-                  <a:srgbClr val="00B0A0"/>
-                </a:solidFill>
-                <a:latin typeface="Calibri"/>
-              </a:rPr>
-              <a:t>From Sequence to Structure to Function</a:t>
+            <a:pPr algn="l"/>
+            <a:r>
+              <a:rPr sz="6200" b="1">
+                <a:solidFill>
+                  <a:srgbClr val="FFFFFF"/>
+                </a:solidFill>
+                <a:latin typeface="Georgia"/>
+              </a:rPr>
+              <a:t>Protein Design</a:t>
             </a:r>
           </a:p>
         </p:txBody>
@@ -3303,8 +3311,8 @@
         </p:nvSpPr>
         <p:spPr>
           <a:xfrm>
-            <a:off x="640080" y="6035040"/>
-            <a:ext cx="10515600" cy="548640"/>
+            <a:off x="548640" y="3291840"/>
+            <a:ext cx="10515600" cy="731520"/>
           </a:xfrm>
           <a:prstGeom prst="rect">
             <a:avLst/>
@@ -3317,15 +3325,3217 @@
           </a:bodyPr>
           <a:lstStyle/>
           <a:p>
+            <a:pPr algn="l"/>
+            <a:r>
+              <a:rPr sz="2600" b="0">
+                <a:solidFill>
+                  <a:srgbClr val="C8A951"/>
+                </a:solidFill>
+                <a:latin typeface="Calibri"/>
+              </a:rPr>
+              <a:t>From Sequence to Structure to Function</a:t>
+            </a:r>
+          </a:p>
+        </p:txBody>
+      </p:sp>
+      <p:sp>
+        <p:nvSpPr>
+          <p:cNvPr id="8" name="TextBox 7"/>
+          <p:cNvSpPr txBox="1"/>
+          <p:nvPr/>
+        </p:nvSpPr>
+        <p:spPr>
+          <a:xfrm>
+            <a:off x="548640" y="6263640"/>
+            <a:ext cx="10515600" cy="411480"/>
+          </a:xfrm>
+          <a:prstGeom prst="rect">
+            <a:avLst/>
+          </a:prstGeom>
+          <a:noFill/>
+        </p:spPr>
+        <p:txBody>
+          <a:bodyPr wrap="square">
+            <a:spAutoFit/>
+          </a:bodyPr>
+          <a:lstStyle/>
+          <a:p>
+            <a:pPr algn="l"/>
+            <a:r>
+              <a:rPr sz="1300" b="0">
+                <a:solidFill>
+                  <a:srgbClr val="FFFFFF"/>
+                </a:solidFill>
+                <a:latin typeface="Calibri"/>
+              </a:rPr>
+              <a:t>Department of Biochemistry &amp; Molecular Biology  |  2026</a:t>
+            </a:r>
+          </a:p>
+        </p:txBody>
+      </p:sp>
+    </p:spTree>
+  </p:cSld>
+  <p:clrMapOvr>
+    <a:masterClrMapping/>
+  </p:clrMapOvr>
+</p:sld>
+</file>
+
+<file path=ppt/slides/slide10.xml><?xml version="1.0" encoding="utf-8"?>
+<p:sld xmlns:a="http://schemas.openxmlformats.org/drawingml/2006/main" xmlns:p="http://schemas.openxmlformats.org/presentationml/2006/main" xmlns:r="http://schemas.openxmlformats.org/officeDocument/2006/relationships">
+  <p:cSld>
+    <p:spTree>
+      <p:nvGrpSpPr>
+        <p:cNvPr id="1" name=""/>
+        <p:cNvGrpSpPr/>
+        <p:nvPr/>
+      </p:nvGrpSpPr>
+      <p:grpSpPr/>
+      <p:sp>
+        <p:nvSpPr>
+          <p:cNvPr id="2" name="Rectangle 1"/>
+          <p:cNvSpPr/>
+          <p:nvPr/>
+        </p:nvSpPr>
+        <p:spPr>
+          <a:xfrm>
+            <a:off x="0" y="0"/>
+            <a:ext cx="12188952" cy="6858000"/>
+          </a:xfrm>
+          <a:prstGeom prst="rect">
+            <a:avLst/>
+          </a:prstGeom>
+          <a:solidFill>
+            <a:srgbClr val="F2F2F2"/>
+          </a:solidFill>
+          <a:ln>
+            <a:noFill/>
+          </a:ln>
+        </p:spPr>
+        <p:style>
+          <a:lnRef idx="1">
+            <a:schemeClr val="accent1"/>
+          </a:lnRef>
+          <a:fillRef idx="3">
+            <a:schemeClr val="accent1"/>
+          </a:fillRef>
+          <a:effectRef idx="2">
+            <a:schemeClr val="accent1"/>
+          </a:effectRef>
+          <a:fontRef idx="minor">
+            <a:schemeClr val="lt1"/>
+          </a:fontRef>
+        </p:style>
+        <p:txBody>
+          <a:bodyPr rtlCol="0" anchor="ctr"/>
+          <a:lstStyle/>
+          <a:p>
             <a:pPr algn="ctr"/>
+          </a:p>
+        </p:txBody>
+      </p:sp>
+      <p:sp>
+        <p:nvSpPr>
+          <p:cNvPr id="3" name="Rectangle 2"/>
+          <p:cNvSpPr/>
+          <p:nvPr/>
+        </p:nvSpPr>
+        <p:spPr>
+          <a:xfrm>
+            <a:off x="0" y="0"/>
+            <a:ext cx="12188952" cy="1143000"/>
+          </a:xfrm>
+          <a:prstGeom prst="rect">
+            <a:avLst/>
+          </a:prstGeom>
+          <a:solidFill>
+            <a:srgbClr val="041E42"/>
+          </a:solidFill>
+          <a:ln>
+            <a:noFill/>
+          </a:ln>
+        </p:spPr>
+        <p:style>
+          <a:lnRef idx="1">
+            <a:schemeClr val="accent1"/>
+          </a:lnRef>
+          <a:fillRef idx="3">
+            <a:schemeClr val="accent1"/>
+          </a:fillRef>
+          <a:effectRef idx="2">
+            <a:schemeClr val="accent1"/>
+          </a:effectRef>
+          <a:fontRef idx="minor">
+            <a:schemeClr val="lt1"/>
+          </a:fontRef>
+        </p:style>
+        <p:txBody>
+          <a:bodyPr rtlCol="0" anchor="ctr"/>
+          <a:lstStyle/>
+          <a:p>
+            <a:pPr algn="ctr"/>
+          </a:p>
+        </p:txBody>
+      </p:sp>
+      <p:sp>
+        <p:nvSpPr>
+          <p:cNvPr id="4" name="Rectangle 3"/>
+          <p:cNvSpPr/>
+          <p:nvPr/>
+        </p:nvSpPr>
+        <p:spPr>
+          <a:xfrm>
+            <a:off x="0" y="6629400"/>
+            <a:ext cx="12188952" cy="228600"/>
+          </a:xfrm>
+          <a:prstGeom prst="rect">
+            <a:avLst/>
+          </a:prstGeom>
+          <a:solidFill>
+            <a:srgbClr val="C8A951"/>
+          </a:solidFill>
+          <a:ln>
+            <a:noFill/>
+          </a:ln>
+        </p:spPr>
+        <p:style>
+          <a:lnRef idx="1">
+            <a:schemeClr val="accent1"/>
+          </a:lnRef>
+          <a:fillRef idx="3">
+            <a:schemeClr val="accent1"/>
+          </a:fillRef>
+          <a:effectRef idx="2">
+            <a:schemeClr val="accent1"/>
+          </a:effectRef>
+          <a:fontRef idx="minor">
+            <a:schemeClr val="lt1"/>
+          </a:fontRef>
+        </p:style>
+        <p:txBody>
+          <a:bodyPr rtlCol="0" anchor="ctr"/>
+          <a:lstStyle/>
+          <a:p>
+            <a:pPr algn="ctr"/>
+          </a:p>
+        </p:txBody>
+      </p:sp>
+      <p:sp>
+        <p:nvSpPr>
+          <p:cNvPr id="5" name="TextBox 4"/>
+          <p:cNvSpPr txBox="1"/>
+          <p:nvPr/>
+        </p:nvSpPr>
+        <p:spPr>
+          <a:xfrm>
+            <a:off x="320040" y="137160"/>
+            <a:ext cx="11430000" cy="914400"/>
+          </a:xfrm>
+          <a:prstGeom prst="rect">
+            <a:avLst/>
+          </a:prstGeom>
+          <a:noFill/>
+        </p:spPr>
+        <p:txBody>
+          <a:bodyPr wrap="square">
+            <a:spAutoFit/>
+          </a:bodyPr>
+          <a:lstStyle/>
+          <a:p>
+            <a:pPr algn="l"/>
+            <a:r>
+              <a:rPr sz="3000" b="1">
+                <a:solidFill>
+                  <a:srgbClr val="FFFFFF"/>
+                </a:solidFill>
+                <a:latin typeface="Georgia"/>
+              </a:rPr>
+              <a:t>ProteinMPNN &amp; RFdiffusion</a:t>
+            </a:r>
+          </a:p>
+        </p:txBody>
+      </p:sp>
+      <p:sp>
+        <p:nvSpPr>
+          <p:cNvPr id="6" name="TextBox 5"/>
+          <p:cNvSpPr txBox="1"/>
+          <p:nvPr/>
+        </p:nvSpPr>
+        <p:spPr>
+          <a:xfrm>
+            <a:off x="11704320" y="6492240"/>
+            <a:ext cx="365760" cy="274320"/>
+          </a:xfrm>
+          <a:prstGeom prst="rect">
+            <a:avLst/>
+          </a:prstGeom>
+          <a:noFill/>
+        </p:spPr>
+        <p:txBody>
+          <a:bodyPr wrap="square">
+            <a:spAutoFit/>
+          </a:bodyPr>
+          <a:lstStyle/>
+          <a:p>
+            <a:pPr algn="r"/>
+            <a:r>
+              <a:rPr sz="1100" b="0">
+                <a:solidFill>
+                  <a:srgbClr val="53565A"/>
+                </a:solidFill>
+                <a:latin typeface="Calibri"/>
+              </a:rPr>
+              <a:t>10</a:t>
+            </a:r>
+          </a:p>
+        </p:txBody>
+      </p:sp>
+      <p:sp>
+        <p:nvSpPr>
+          <p:cNvPr id="7" name="TextBox 6"/>
+          <p:cNvSpPr txBox="1"/>
+          <p:nvPr/>
+        </p:nvSpPr>
+        <p:spPr>
+          <a:xfrm>
+            <a:off x="411480" y="1325880"/>
+            <a:ext cx="11338560" cy="5166360"/>
+          </a:xfrm>
+          <a:prstGeom prst="rect">
+            <a:avLst/>
+          </a:prstGeom>
+          <a:noFill/>
+        </p:spPr>
+        <p:txBody>
+          <a:bodyPr wrap="square">
+            <a:spAutoFit/>
+          </a:bodyPr>
+          <a:lstStyle/>
+          <a:p>
+            <a:pPr>
+              <a:spcBef>
+                <a:spcPts val="500"/>
+              </a:spcBef>
+            </a:pPr>
+            <a:r>
+              <a:rPr sz="1900" b="1">
+                <a:solidFill>
+                  <a:srgbClr val="1A1A1A"/>
+                </a:solidFill>
+                <a:latin typeface="Georgia"/>
+              </a:rPr>
+              <a:t>▸  ProteinMPNN  (Dauparas et al., Science 2022)</a:t>
+            </a:r>
+          </a:p>
+          <a:p>
+            <a:pPr lvl="1">
+              <a:spcBef>
+                <a:spcPts val="300"/>
+              </a:spcBef>
+            </a:pPr>
             <a:r>
               <a:rPr sz="1600" b="0">
                 <a:solidFill>
+                  <a:srgbClr val="1A1A1A"/>
+                </a:solidFill>
+                <a:latin typeface="Calibri"/>
+              </a:rPr>
+              <a:t>       ◦  Message-passing graph neural network over protein backbone atoms</a:t>
+            </a:r>
+          </a:p>
+          <a:p>
+            <a:pPr lvl="1">
+              <a:spcBef>
+                <a:spcPts val="300"/>
+              </a:spcBef>
+            </a:pPr>
+            <a:r>
+              <a:rPr sz="1600" b="0">
+                <a:solidFill>
+                  <a:srgbClr val="1A1A1A"/>
+                </a:solidFill>
+                <a:latin typeface="Calibri"/>
+              </a:rPr>
+              <a:t>       ◦  Given fixed backbone coordinates → outputs sequence probabilities</a:t>
+            </a:r>
+          </a:p>
+          <a:p>
+            <a:pPr lvl="1">
+              <a:spcBef>
+                <a:spcPts val="300"/>
+              </a:spcBef>
+            </a:pPr>
+            <a:r>
+              <a:rPr sz="1600" b="0">
+                <a:solidFill>
+                  <a:srgbClr val="1A1A1A"/>
+                </a:solidFill>
+                <a:latin typeface="Calibri"/>
+              </a:rPr>
+              <a:t>       ◦  Outperforms Rosetta in experimental success rates</a:t>
+            </a:r>
+          </a:p>
+          <a:p>
+            <a:pPr lvl="1">
+              <a:spcBef>
+                <a:spcPts val="300"/>
+              </a:spcBef>
+            </a:pPr>
+            <a:r>
+              <a:rPr sz="1600" b="0">
+                <a:solidFill>
+                  <a:srgbClr val="1A1A1A"/>
+                </a:solidFill>
+                <a:latin typeface="Calibri"/>
+              </a:rPr>
+              <a:t>       ◦  Variants: soluble-MPNN, LigandMPNN, ProteinMPNN-SSM</a:t>
+            </a:r>
+          </a:p>
+          <a:p>
+            <a:pPr>
+              <a:spcBef>
+                <a:spcPts val="500"/>
+              </a:spcBef>
+            </a:pPr>
+            <a:r>
+              <a:rPr sz="1900" b="1">
+                <a:solidFill>
+                  <a:srgbClr val="1A1A1A"/>
+                </a:solidFill>
+                <a:latin typeface="Georgia"/>
+              </a:rPr>
+              <a:t>▸  RFdiffusion  (Watson et al., Nature 2023)</a:t>
+            </a:r>
+          </a:p>
+          <a:p>
+            <a:pPr lvl="1">
+              <a:spcBef>
+                <a:spcPts val="300"/>
+              </a:spcBef>
+            </a:pPr>
+            <a:r>
+              <a:rPr sz="1600" b="0">
+                <a:solidFill>
+                  <a:srgbClr val="1A1A1A"/>
+                </a:solidFill>
+                <a:latin typeface="Calibri"/>
+              </a:rPr>
+              <a:t>       ◦  Diffusion model built on RoseTTAFold architecture</a:t>
+            </a:r>
+          </a:p>
+          <a:p>
+            <a:pPr lvl="1">
+              <a:spcBef>
+                <a:spcPts val="300"/>
+              </a:spcBef>
+            </a:pPr>
+            <a:r>
+              <a:rPr sz="1600" b="0">
+                <a:solidFill>
+                  <a:srgbClr val="1A1A1A"/>
+                </a:solidFill>
+                <a:latin typeface="Calibri"/>
+              </a:rPr>
+              <a:t>       ◦  Generates de novo backbone conditioned on user-specified motifs</a:t>
+            </a:r>
+          </a:p>
+          <a:p>
+            <a:pPr lvl="1">
+              <a:spcBef>
+                <a:spcPts val="300"/>
+              </a:spcBef>
+            </a:pPr>
+            <a:r>
+              <a:rPr sz="1600" b="0">
+                <a:solidFill>
+                  <a:srgbClr val="1A1A1A"/>
+                </a:solidFill>
+                <a:latin typeface="Calibri"/>
+              </a:rPr>
+              <a:t>       ◦  Applications: binders, symmetric assemblies, enzyme active sites</a:t>
+            </a:r>
+          </a:p>
+          <a:p>
+            <a:pPr lvl="1">
+              <a:spcBef>
+                <a:spcPts val="300"/>
+              </a:spcBef>
+            </a:pPr>
+            <a:r>
+              <a:rPr sz="1600" b="0">
+                <a:solidFill>
+                  <a:srgbClr val="1A1A1A"/>
+                </a:solidFill>
+                <a:latin typeface="Calibri"/>
+              </a:rPr>
+              <a:t>       ◦  Combined with ProteinMPNN for end-to-end design pipelines</a:t>
+            </a:r>
+          </a:p>
+        </p:txBody>
+      </p:sp>
+    </p:spTree>
+  </p:cSld>
+  <p:clrMapOvr>
+    <a:masterClrMapping/>
+  </p:clrMapOvr>
+</p:sld>
+</file>
+
+<file path=ppt/slides/slide11.xml><?xml version="1.0" encoding="utf-8"?>
+<p:sld xmlns:a="http://schemas.openxmlformats.org/drawingml/2006/main" xmlns:p="http://schemas.openxmlformats.org/presentationml/2006/main" xmlns:r="http://schemas.openxmlformats.org/officeDocument/2006/relationships">
+  <p:cSld>
+    <p:spTree>
+      <p:nvGrpSpPr>
+        <p:cNvPr id="1" name=""/>
+        <p:cNvGrpSpPr/>
+        <p:nvPr/>
+      </p:nvGrpSpPr>
+      <p:grpSpPr/>
+      <p:sp>
+        <p:nvSpPr>
+          <p:cNvPr id="2" name="Rectangle 1"/>
+          <p:cNvSpPr/>
+          <p:nvPr/>
+        </p:nvSpPr>
+        <p:spPr>
+          <a:xfrm>
+            <a:off x="0" y="0"/>
+            <a:ext cx="12188952" cy="6858000"/>
+          </a:xfrm>
+          <a:prstGeom prst="rect">
+            <a:avLst/>
+          </a:prstGeom>
+          <a:solidFill>
+            <a:srgbClr val="041E42"/>
+          </a:solidFill>
+          <a:ln>
+            <a:noFill/>
+          </a:ln>
+        </p:spPr>
+        <p:style>
+          <a:lnRef idx="1">
+            <a:schemeClr val="accent1"/>
+          </a:lnRef>
+          <a:fillRef idx="3">
+            <a:schemeClr val="accent1"/>
+          </a:fillRef>
+          <a:effectRef idx="2">
+            <a:schemeClr val="accent1"/>
+          </a:effectRef>
+          <a:fontRef idx="minor">
+            <a:schemeClr val="lt1"/>
+          </a:fontRef>
+        </p:style>
+        <p:txBody>
+          <a:bodyPr rtlCol="0" anchor="ctr"/>
+          <a:lstStyle/>
+          <a:p>
+            <a:pPr algn="ctr"/>
+          </a:p>
+        </p:txBody>
+      </p:sp>
+      <p:sp>
+        <p:nvSpPr>
+          <p:cNvPr id="3" name="Rectangle 2"/>
+          <p:cNvSpPr/>
+          <p:nvPr/>
+        </p:nvSpPr>
+        <p:spPr>
+          <a:xfrm>
+            <a:off x="0" y="6629400"/>
+            <a:ext cx="12188952" cy="228600"/>
+          </a:xfrm>
+          <a:prstGeom prst="rect">
+            <a:avLst/>
+          </a:prstGeom>
+          <a:solidFill>
+            <a:srgbClr val="C8A951"/>
+          </a:solidFill>
+          <a:ln>
+            <a:noFill/>
+          </a:ln>
+        </p:spPr>
+        <p:style>
+          <a:lnRef idx="1">
+            <a:schemeClr val="accent1"/>
+          </a:lnRef>
+          <a:fillRef idx="3">
+            <a:schemeClr val="accent1"/>
+          </a:fillRef>
+          <a:effectRef idx="2">
+            <a:schemeClr val="accent1"/>
+          </a:effectRef>
+          <a:fontRef idx="minor">
+            <a:schemeClr val="lt1"/>
+          </a:fontRef>
+        </p:style>
+        <p:txBody>
+          <a:bodyPr rtlCol="0" anchor="ctr"/>
+          <a:lstStyle/>
+          <a:p>
+            <a:pPr algn="ctr"/>
+          </a:p>
+        </p:txBody>
+      </p:sp>
+      <p:sp>
+        <p:nvSpPr>
+          <p:cNvPr id="4" name="TextBox 3"/>
+          <p:cNvSpPr txBox="1"/>
+          <p:nvPr/>
+        </p:nvSpPr>
+        <p:spPr>
+          <a:xfrm>
+            <a:off x="320040" y="137160"/>
+            <a:ext cx="11430000" cy="914400"/>
+          </a:xfrm>
+          <a:prstGeom prst="rect">
+            <a:avLst/>
+          </a:prstGeom>
+          <a:noFill/>
+        </p:spPr>
+        <p:txBody>
+          <a:bodyPr wrap="square">
+            <a:spAutoFit/>
+          </a:bodyPr>
+          <a:lstStyle/>
+          <a:p>
+            <a:pPr algn="l"/>
+            <a:r>
+              <a:rPr sz="3000" b="1">
+                <a:solidFill>
                   <a:srgbClr val="FFFFFF"/>
                 </a:solidFill>
-                <a:latin typeface="Calibri"/>
-              </a:rPr>
-              <a:t>AlejandroCaloca / Protein-Design  •  2026</a:t>
+                <a:latin typeface="Georgia"/>
+              </a:rPr>
+              <a:t>AlphaFold2, ESMFold &amp; LigandMPNN</a:t>
+            </a:r>
+          </a:p>
+        </p:txBody>
+      </p:sp>
+      <p:sp>
+        <p:nvSpPr>
+          <p:cNvPr id="5" name="TextBox 4"/>
+          <p:cNvSpPr txBox="1"/>
+          <p:nvPr/>
+        </p:nvSpPr>
+        <p:spPr>
+          <a:xfrm>
+            <a:off x="11704320" y="6492240"/>
+            <a:ext cx="365760" cy="274320"/>
+          </a:xfrm>
+          <a:prstGeom prst="rect">
+            <a:avLst/>
+          </a:prstGeom>
+          <a:noFill/>
+        </p:spPr>
+        <p:txBody>
+          <a:bodyPr wrap="square">
+            <a:spAutoFit/>
+          </a:bodyPr>
+          <a:lstStyle/>
+          <a:p>
+            <a:pPr algn="r"/>
+            <a:r>
+              <a:rPr sz="1100" b="0">
+                <a:solidFill>
+                  <a:srgbClr val="53565A"/>
+                </a:solidFill>
+                <a:latin typeface="Calibri"/>
+              </a:rPr>
+              <a:t>11</a:t>
+            </a:r>
+          </a:p>
+        </p:txBody>
+      </p:sp>
+      <p:sp>
+        <p:nvSpPr>
+          <p:cNvPr id="6" name="TextBox 5"/>
+          <p:cNvSpPr txBox="1"/>
+          <p:nvPr/>
+        </p:nvSpPr>
+        <p:spPr>
+          <a:xfrm>
+            <a:off x="411480" y="1325880"/>
+            <a:ext cx="11338560" cy="5166360"/>
+          </a:xfrm>
+          <a:prstGeom prst="rect">
+            <a:avLst/>
+          </a:prstGeom>
+          <a:noFill/>
+        </p:spPr>
+        <p:txBody>
+          <a:bodyPr wrap="square">
+            <a:spAutoFit/>
+          </a:bodyPr>
+          <a:lstStyle/>
+          <a:p>
+            <a:pPr>
+              <a:spcBef>
+                <a:spcPts val="500"/>
+              </a:spcBef>
+            </a:pPr>
+            <a:r>
+              <a:rPr sz="1900" b="1">
+                <a:solidFill>
+                  <a:srgbClr val="FFFFFF"/>
+                </a:solidFill>
+                <a:latin typeface="Calibri"/>
+              </a:rPr>
+              <a:t>▸  AlphaFold2  (Jumper et al., Nature 2021)</a:t>
+            </a:r>
+          </a:p>
+          <a:p>
+            <a:pPr lvl="1">
+              <a:spcBef>
+                <a:spcPts val="300"/>
+              </a:spcBef>
+            </a:pPr>
+            <a:r>
+              <a:rPr sz="1600" b="0">
+                <a:solidFill>
+                  <a:srgbClr val="FFFFFF"/>
+                </a:solidFill>
+                <a:latin typeface="Calibri"/>
+              </a:rPr>
+              <a:t>       ◦  Transformer + Evoformer; predicts structure with near-experimental accuracy</a:t>
+            </a:r>
+          </a:p>
+          <a:p>
+            <a:pPr lvl="1">
+              <a:spcBef>
+                <a:spcPts val="300"/>
+              </a:spcBef>
+            </a:pPr>
+            <a:r>
+              <a:rPr sz="1600" b="0">
+                <a:solidFill>
+                  <a:srgbClr val="FFFFFF"/>
+                </a:solidFill>
+                <a:latin typeface="Calibri"/>
+              </a:rPr>
+              <a:t>       ◦  Used as oracle to validate designed sequences in silico</a:t>
+            </a:r>
+          </a:p>
+          <a:p>
+            <a:pPr lvl="1">
+              <a:spcBef>
+                <a:spcPts val="300"/>
+              </a:spcBef>
+            </a:pPr>
+            <a:r>
+              <a:rPr sz="1600" b="0">
+                <a:solidFill>
+                  <a:srgbClr val="FFFFFF"/>
+                </a:solidFill>
+                <a:latin typeface="Calibri"/>
+              </a:rPr>
+              <a:t>       ◦  AlphaFold3 extends to protein–DNA/RNA–ligand complexes (2024)</a:t>
+            </a:r>
+          </a:p>
+          <a:p>
+            <a:pPr>
+              <a:spcBef>
+                <a:spcPts val="500"/>
+              </a:spcBef>
+            </a:pPr>
+            <a:r>
+              <a:rPr sz="1900" b="1">
+                <a:solidFill>
+                  <a:srgbClr val="FFFFFF"/>
+                </a:solidFill>
+                <a:latin typeface="Calibri"/>
+              </a:rPr>
+              <a:t>▸  ESMFold  (Lin et al., Science 2023)</a:t>
+            </a:r>
+          </a:p>
+          <a:p>
+            <a:pPr lvl="1">
+              <a:spcBef>
+                <a:spcPts val="300"/>
+              </a:spcBef>
+            </a:pPr>
+            <a:r>
+              <a:rPr sz="1600" b="0">
+                <a:solidFill>
+                  <a:srgbClr val="FFFFFF"/>
+                </a:solidFill>
+                <a:latin typeface="Calibri"/>
+              </a:rPr>
+              <a:t>       ◦  Single-sequence folding from ESM-2 language model</a:t>
+            </a:r>
+          </a:p>
+          <a:p>
+            <a:pPr lvl="1">
+              <a:spcBef>
+                <a:spcPts val="300"/>
+              </a:spcBef>
+            </a:pPr>
+            <a:r>
+              <a:rPr sz="1600" b="0">
+                <a:solidFill>
+                  <a:srgbClr val="FFFFFF"/>
+                </a:solidFill>
+                <a:latin typeface="Calibri"/>
+              </a:rPr>
+              <a:t>       ◦  Enables rapid screening of millions of designed sequences</a:t>
+            </a:r>
+          </a:p>
+          <a:p>
+            <a:pPr>
+              <a:spcBef>
+                <a:spcPts val="500"/>
+              </a:spcBef>
+            </a:pPr>
+            <a:r>
+              <a:rPr sz="1900" b="1">
+                <a:solidFill>
+                  <a:srgbClr val="FFFFFF"/>
+                </a:solidFill>
+                <a:latin typeface="Calibri"/>
+              </a:rPr>
+              <a:t>▸  LigandMPNN  (Dauparas et al., Nature Methods 2024)</a:t>
+            </a:r>
+          </a:p>
+          <a:p>
+            <a:pPr lvl="1">
+              <a:spcBef>
+                <a:spcPts val="300"/>
+              </a:spcBef>
+            </a:pPr>
+            <a:r>
+              <a:rPr sz="1600" b="0">
+                <a:solidFill>
+                  <a:srgbClr val="FFFFFF"/>
+                </a:solidFill>
+                <a:latin typeface="Calibri"/>
+              </a:rPr>
+              <a:t>       ◦  Extends ProteinMPNN to include small-molecule and nucleic-acid context</a:t>
+            </a:r>
+          </a:p>
+          <a:p>
+            <a:pPr lvl="1">
+              <a:spcBef>
+                <a:spcPts val="300"/>
+              </a:spcBef>
+            </a:pPr>
+            <a:r>
+              <a:rPr sz="1600" b="0">
+                <a:solidFill>
+                  <a:srgbClr val="FFFFFF"/>
+                </a:solidFill>
+                <a:latin typeface="Calibri"/>
+              </a:rPr>
+              <a:t>       ◦  Enables enzyme and drug-binding site design</a:t>
+            </a:r>
+          </a:p>
+        </p:txBody>
+      </p:sp>
+    </p:spTree>
+  </p:cSld>
+  <p:clrMapOvr>
+    <a:masterClrMapping/>
+  </p:clrMapOvr>
+</p:sld>
+</file>
+
+<file path=ppt/slides/slide12.xml><?xml version="1.0" encoding="utf-8"?>
+<p:sld xmlns:a="http://schemas.openxmlformats.org/drawingml/2006/main" xmlns:p="http://schemas.openxmlformats.org/presentationml/2006/main" xmlns:r="http://schemas.openxmlformats.org/officeDocument/2006/relationships">
+  <p:cSld>
+    <p:spTree>
+      <p:nvGrpSpPr>
+        <p:cNvPr id="1" name=""/>
+        <p:cNvGrpSpPr/>
+        <p:nvPr/>
+      </p:nvGrpSpPr>
+      <p:grpSpPr/>
+      <p:sp>
+        <p:nvSpPr>
+          <p:cNvPr id="2" name="Rectangle 1"/>
+          <p:cNvSpPr/>
+          <p:nvPr/>
+        </p:nvSpPr>
+        <p:spPr>
+          <a:xfrm>
+            <a:off x="0" y="0"/>
+            <a:ext cx="12188952" cy="6858000"/>
+          </a:xfrm>
+          <a:prstGeom prst="rect">
+            <a:avLst/>
+          </a:prstGeom>
+          <a:solidFill>
+            <a:srgbClr val="F2F2F2"/>
+          </a:solidFill>
+          <a:ln>
+            <a:noFill/>
+          </a:ln>
+        </p:spPr>
+        <p:style>
+          <a:lnRef idx="1">
+            <a:schemeClr val="accent1"/>
+          </a:lnRef>
+          <a:fillRef idx="3">
+            <a:schemeClr val="accent1"/>
+          </a:fillRef>
+          <a:effectRef idx="2">
+            <a:schemeClr val="accent1"/>
+          </a:effectRef>
+          <a:fontRef idx="minor">
+            <a:schemeClr val="lt1"/>
+          </a:fontRef>
+        </p:style>
+        <p:txBody>
+          <a:bodyPr rtlCol="0" anchor="ctr"/>
+          <a:lstStyle/>
+          <a:p>
+            <a:pPr algn="ctr"/>
+          </a:p>
+        </p:txBody>
+      </p:sp>
+      <p:sp>
+        <p:nvSpPr>
+          <p:cNvPr id="3" name="Rectangle 2"/>
+          <p:cNvSpPr/>
+          <p:nvPr/>
+        </p:nvSpPr>
+        <p:spPr>
+          <a:xfrm>
+            <a:off x="0" y="0"/>
+            <a:ext cx="12188952" cy="1143000"/>
+          </a:xfrm>
+          <a:prstGeom prst="rect">
+            <a:avLst/>
+          </a:prstGeom>
+          <a:solidFill>
+            <a:srgbClr val="041E42"/>
+          </a:solidFill>
+          <a:ln>
+            <a:noFill/>
+          </a:ln>
+        </p:spPr>
+        <p:style>
+          <a:lnRef idx="1">
+            <a:schemeClr val="accent1"/>
+          </a:lnRef>
+          <a:fillRef idx="3">
+            <a:schemeClr val="accent1"/>
+          </a:fillRef>
+          <a:effectRef idx="2">
+            <a:schemeClr val="accent1"/>
+          </a:effectRef>
+          <a:fontRef idx="minor">
+            <a:schemeClr val="lt1"/>
+          </a:fontRef>
+        </p:style>
+        <p:txBody>
+          <a:bodyPr rtlCol="0" anchor="ctr"/>
+          <a:lstStyle/>
+          <a:p>
+            <a:pPr algn="ctr"/>
+          </a:p>
+        </p:txBody>
+      </p:sp>
+      <p:sp>
+        <p:nvSpPr>
+          <p:cNvPr id="4" name="Rectangle 3"/>
+          <p:cNvSpPr/>
+          <p:nvPr/>
+        </p:nvSpPr>
+        <p:spPr>
+          <a:xfrm>
+            <a:off x="0" y="6629400"/>
+            <a:ext cx="12188952" cy="228600"/>
+          </a:xfrm>
+          <a:prstGeom prst="rect">
+            <a:avLst/>
+          </a:prstGeom>
+          <a:solidFill>
+            <a:srgbClr val="C8A951"/>
+          </a:solidFill>
+          <a:ln>
+            <a:noFill/>
+          </a:ln>
+        </p:spPr>
+        <p:style>
+          <a:lnRef idx="1">
+            <a:schemeClr val="accent1"/>
+          </a:lnRef>
+          <a:fillRef idx="3">
+            <a:schemeClr val="accent1"/>
+          </a:fillRef>
+          <a:effectRef idx="2">
+            <a:schemeClr val="accent1"/>
+          </a:effectRef>
+          <a:fontRef idx="minor">
+            <a:schemeClr val="lt1"/>
+          </a:fontRef>
+        </p:style>
+        <p:txBody>
+          <a:bodyPr rtlCol="0" anchor="ctr"/>
+          <a:lstStyle/>
+          <a:p>
+            <a:pPr algn="ctr"/>
+          </a:p>
+        </p:txBody>
+      </p:sp>
+      <p:sp>
+        <p:nvSpPr>
+          <p:cNvPr id="5" name="TextBox 4"/>
+          <p:cNvSpPr txBox="1"/>
+          <p:nvPr/>
+        </p:nvSpPr>
+        <p:spPr>
+          <a:xfrm>
+            <a:off x="320040" y="137160"/>
+            <a:ext cx="11430000" cy="914400"/>
+          </a:xfrm>
+          <a:prstGeom prst="rect">
+            <a:avLst/>
+          </a:prstGeom>
+          <a:noFill/>
+        </p:spPr>
+        <p:txBody>
+          <a:bodyPr wrap="square">
+            <a:spAutoFit/>
+          </a:bodyPr>
+          <a:lstStyle/>
+          <a:p>
+            <a:pPr algn="l"/>
+            <a:r>
+              <a:rPr sz="3000" b="1">
+                <a:solidFill>
+                  <a:srgbClr val="FFFFFF"/>
+                </a:solidFill>
+                <a:latin typeface="Georgia"/>
+              </a:rPr>
+              <a:t>Applications — Therapeutics</a:t>
+            </a:r>
+          </a:p>
+        </p:txBody>
+      </p:sp>
+      <p:sp>
+        <p:nvSpPr>
+          <p:cNvPr id="6" name="TextBox 5"/>
+          <p:cNvSpPr txBox="1"/>
+          <p:nvPr/>
+        </p:nvSpPr>
+        <p:spPr>
+          <a:xfrm>
+            <a:off x="11704320" y="6492240"/>
+            <a:ext cx="365760" cy="274320"/>
+          </a:xfrm>
+          <a:prstGeom prst="rect">
+            <a:avLst/>
+          </a:prstGeom>
+          <a:noFill/>
+        </p:spPr>
+        <p:txBody>
+          <a:bodyPr wrap="square">
+            <a:spAutoFit/>
+          </a:bodyPr>
+          <a:lstStyle/>
+          <a:p>
+            <a:pPr algn="r"/>
+            <a:r>
+              <a:rPr sz="1100" b="0">
+                <a:solidFill>
+                  <a:srgbClr val="53565A"/>
+                </a:solidFill>
+                <a:latin typeface="Calibri"/>
+              </a:rPr>
+              <a:t>12</a:t>
+            </a:r>
+          </a:p>
+        </p:txBody>
+      </p:sp>
+      <p:sp>
+        <p:nvSpPr>
+          <p:cNvPr id="7" name="TextBox 6"/>
+          <p:cNvSpPr txBox="1"/>
+          <p:nvPr/>
+        </p:nvSpPr>
+        <p:spPr>
+          <a:xfrm>
+            <a:off x="411480" y="1325880"/>
+            <a:ext cx="11338560" cy="5166360"/>
+          </a:xfrm>
+          <a:prstGeom prst="rect">
+            <a:avLst/>
+          </a:prstGeom>
+          <a:noFill/>
+        </p:spPr>
+        <p:txBody>
+          <a:bodyPr wrap="square">
+            <a:spAutoFit/>
+          </a:bodyPr>
+          <a:lstStyle/>
+          <a:p>
+            <a:pPr>
+              <a:spcBef>
+                <a:spcPts val="500"/>
+              </a:spcBef>
+            </a:pPr>
+            <a:r>
+              <a:rPr sz="1900" b="1">
+                <a:solidFill>
+                  <a:srgbClr val="1A1A1A"/>
+                </a:solidFill>
+                <a:latin typeface="Georgia"/>
+              </a:rPr>
+              <a:t>▸  Designed miniprotein binders</a:t>
+            </a:r>
+          </a:p>
+          <a:p>
+            <a:pPr lvl="1">
+              <a:spcBef>
+                <a:spcPts val="300"/>
+              </a:spcBef>
+            </a:pPr>
+            <a:r>
+              <a:rPr sz="1600" b="0">
+                <a:solidFill>
+                  <a:srgbClr val="1A1A1A"/>
+                </a:solidFill>
+                <a:latin typeface="Calibri"/>
+              </a:rPr>
+              <a:t>       ◦  de novo binders to SARS-CoV-2 spike RBD (Cao et al., Science 2020)</a:t>
+            </a:r>
+          </a:p>
+          <a:p>
+            <a:pPr lvl="1">
+              <a:spcBef>
+                <a:spcPts val="300"/>
+              </a:spcBef>
+            </a:pPr>
+            <a:r>
+              <a:rPr sz="1600" b="0">
+                <a:solidFill>
+                  <a:srgbClr val="1A1A1A"/>
+                </a:solidFill>
+                <a:latin typeface="Calibri"/>
+              </a:rPr>
+              <a:t>       ◦  Computationally designed influenza inhibitors</a:t>
+            </a:r>
+          </a:p>
+          <a:p>
+            <a:pPr>
+              <a:spcBef>
+                <a:spcPts val="500"/>
+              </a:spcBef>
+            </a:pPr>
+            <a:r>
+              <a:rPr sz="1900" b="1">
+                <a:solidFill>
+                  <a:srgbClr val="1A1A1A"/>
+                </a:solidFill>
+                <a:latin typeface="Georgia"/>
+              </a:rPr>
+              <a:t>▸  Antibody engineering</a:t>
+            </a:r>
+          </a:p>
+          <a:p>
+            <a:pPr lvl="1">
+              <a:spcBef>
+                <a:spcPts val="300"/>
+              </a:spcBef>
+            </a:pPr>
+            <a:r>
+              <a:rPr sz="1600" b="0">
+                <a:solidFill>
+                  <a:srgbClr val="1A1A1A"/>
+                </a:solidFill>
+                <a:latin typeface="Calibri"/>
+              </a:rPr>
+              <a:t>       ◦  Stability engineering of clinical antibodies via Rosetta</a:t>
+            </a:r>
+          </a:p>
+          <a:p>
+            <a:pPr lvl="1">
+              <a:spcBef>
+                <a:spcPts val="300"/>
+              </a:spcBef>
+            </a:pPr>
+            <a:r>
+              <a:rPr sz="1600" b="0">
+                <a:solidFill>
+                  <a:srgbClr val="1A1A1A"/>
+                </a:solidFill>
+                <a:latin typeface="Calibri"/>
+              </a:rPr>
+              <a:t>       ◦  Bispecific antibodies with redesigned interfaces</a:t>
+            </a:r>
+          </a:p>
+          <a:p>
+            <a:pPr>
+              <a:spcBef>
+                <a:spcPts val="500"/>
+              </a:spcBef>
+            </a:pPr>
+            <a:r>
+              <a:rPr sz="1900" b="1">
+                <a:solidFill>
+                  <a:srgbClr val="1A1A1A"/>
+                </a:solidFill>
+                <a:latin typeface="Georgia"/>
+              </a:rPr>
+              <a:t>▸  Protein-based vaccines</a:t>
+            </a:r>
+          </a:p>
+          <a:p>
+            <a:pPr lvl="1">
+              <a:spcBef>
+                <a:spcPts val="300"/>
+              </a:spcBef>
+            </a:pPr>
+            <a:r>
+              <a:rPr sz="1600" b="0">
+                <a:solidFill>
+                  <a:srgbClr val="1A1A1A"/>
+                </a:solidFill>
+                <a:latin typeface="Calibri"/>
+              </a:rPr>
+              <a:t>       ◦  Self-assembling nanoparticle immunogens displaying multiple antigens</a:t>
+            </a:r>
+          </a:p>
+          <a:p>
+            <a:pPr>
+              <a:spcBef>
+                <a:spcPts val="500"/>
+              </a:spcBef>
+            </a:pPr>
+            <a:r>
+              <a:rPr sz="1900" b="1">
+                <a:solidFill>
+                  <a:srgbClr val="1A1A1A"/>
+                </a:solidFill>
+                <a:latin typeface="Georgia"/>
+              </a:rPr>
+              <a:t>▸  Therapeutic enzymes</a:t>
+            </a:r>
+          </a:p>
+          <a:p>
+            <a:pPr lvl="1">
+              <a:spcBef>
+                <a:spcPts val="300"/>
+              </a:spcBef>
+            </a:pPr>
+            <a:r>
+              <a:rPr sz="1600" b="0">
+                <a:solidFill>
+                  <a:srgbClr val="1A1A1A"/>
+                </a:solidFill>
+                <a:latin typeface="Calibri"/>
+              </a:rPr>
+              <a:t>       ◦  PEGylated asparaginase for ALL; redesigned for reduced immunogenicity</a:t>
+            </a:r>
+          </a:p>
+          <a:p>
+            <a:pPr>
+              <a:spcBef>
+                <a:spcPts val="500"/>
+              </a:spcBef>
+            </a:pPr>
+            <a:r>
+              <a:rPr sz="1900" b="1">
+                <a:solidFill>
+                  <a:srgbClr val="1A1A1A"/>
+                </a:solidFill>
+                <a:latin typeface="Georgia"/>
+              </a:rPr>
+              <a:t>▸  Cell-penetrating proteins</a:t>
+            </a:r>
+          </a:p>
+          <a:p>
+            <a:pPr lvl="1">
+              <a:spcBef>
+                <a:spcPts val="300"/>
+              </a:spcBef>
+            </a:pPr>
+            <a:r>
+              <a:rPr sz="1600" b="0">
+                <a:solidFill>
+                  <a:srgbClr val="1A1A1A"/>
+                </a:solidFill>
+                <a:latin typeface="Calibri"/>
+              </a:rPr>
+              <a:t>       ◦  Designed to cross membranes for intracellular delivery</a:t>
+            </a:r>
+          </a:p>
+        </p:txBody>
+      </p:sp>
+    </p:spTree>
+  </p:cSld>
+  <p:clrMapOvr>
+    <a:masterClrMapping/>
+  </p:clrMapOvr>
+</p:sld>
+</file>
+
+<file path=ppt/slides/slide13.xml><?xml version="1.0" encoding="utf-8"?>
+<p:sld xmlns:a="http://schemas.openxmlformats.org/drawingml/2006/main" xmlns:p="http://schemas.openxmlformats.org/presentationml/2006/main" xmlns:r="http://schemas.openxmlformats.org/officeDocument/2006/relationships">
+  <p:cSld>
+    <p:spTree>
+      <p:nvGrpSpPr>
+        <p:cNvPr id="1" name=""/>
+        <p:cNvGrpSpPr/>
+        <p:nvPr/>
+      </p:nvGrpSpPr>
+      <p:grpSpPr/>
+      <p:sp>
+        <p:nvSpPr>
+          <p:cNvPr id="2" name="Rectangle 1"/>
+          <p:cNvSpPr/>
+          <p:nvPr/>
+        </p:nvSpPr>
+        <p:spPr>
+          <a:xfrm>
+            <a:off x="0" y="0"/>
+            <a:ext cx="12188952" cy="6858000"/>
+          </a:xfrm>
+          <a:prstGeom prst="rect">
+            <a:avLst/>
+          </a:prstGeom>
+          <a:solidFill>
+            <a:srgbClr val="041E42"/>
+          </a:solidFill>
+          <a:ln>
+            <a:noFill/>
+          </a:ln>
+        </p:spPr>
+        <p:style>
+          <a:lnRef idx="1">
+            <a:schemeClr val="accent1"/>
+          </a:lnRef>
+          <a:fillRef idx="3">
+            <a:schemeClr val="accent1"/>
+          </a:fillRef>
+          <a:effectRef idx="2">
+            <a:schemeClr val="accent1"/>
+          </a:effectRef>
+          <a:fontRef idx="minor">
+            <a:schemeClr val="lt1"/>
+          </a:fontRef>
+        </p:style>
+        <p:txBody>
+          <a:bodyPr rtlCol="0" anchor="ctr"/>
+          <a:lstStyle/>
+          <a:p>
+            <a:pPr algn="ctr"/>
+          </a:p>
+        </p:txBody>
+      </p:sp>
+      <p:sp>
+        <p:nvSpPr>
+          <p:cNvPr id="3" name="Rectangle 2"/>
+          <p:cNvSpPr/>
+          <p:nvPr/>
+        </p:nvSpPr>
+        <p:spPr>
+          <a:xfrm>
+            <a:off x="0" y="6629400"/>
+            <a:ext cx="12188952" cy="228600"/>
+          </a:xfrm>
+          <a:prstGeom prst="rect">
+            <a:avLst/>
+          </a:prstGeom>
+          <a:solidFill>
+            <a:srgbClr val="C8A951"/>
+          </a:solidFill>
+          <a:ln>
+            <a:noFill/>
+          </a:ln>
+        </p:spPr>
+        <p:style>
+          <a:lnRef idx="1">
+            <a:schemeClr val="accent1"/>
+          </a:lnRef>
+          <a:fillRef idx="3">
+            <a:schemeClr val="accent1"/>
+          </a:fillRef>
+          <a:effectRef idx="2">
+            <a:schemeClr val="accent1"/>
+          </a:effectRef>
+          <a:fontRef idx="minor">
+            <a:schemeClr val="lt1"/>
+          </a:fontRef>
+        </p:style>
+        <p:txBody>
+          <a:bodyPr rtlCol="0" anchor="ctr"/>
+          <a:lstStyle/>
+          <a:p>
+            <a:pPr algn="ctr"/>
+          </a:p>
+        </p:txBody>
+      </p:sp>
+      <p:sp>
+        <p:nvSpPr>
+          <p:cNvPr id="4" name="TextBox 3"/>
+          <p:cNvSpPr txBox="1"/>
+          <p:nvPr/>
+        </p:nvSpPr>
+        <p:spPr>
+          <a:xfrm>
+            <a:off x="320040" y="137160"/>
+            <a:ext cx="11430000" cy="914400"/>
+          </a:xfrm>
+          <a:prstGeom prst="rect">
+            <a:avLst/>
+          </a:prstGeom>
+          <a:noFill/>
+        </p:spPr>
+        <p:txBody>
+          <a:bodyPr wrap="square">
+            <a:spAutoFit/>
+          </a:bodyPr>
+          <a:lstStyle/>
+          <a:p>
+            <a:pPr algn="l"/>
+            <a:r>
+              <a:rPr sz="3000" b="1">
+                <a:solidFill>
+                  <a:srgbClr val="FFFFFF"/>
+                </a:solidFill>
+                <a:latin typeface="Georgia"/>
+              </a:rPr>
+              <a:t>Applications — Enzymes &amp; Biocatalysis</a:t>
+            </a:r>
+          </a:p>
+        </p:txBody>
+      </p:sp>
+      <p:sp>
+        <p:nvSpPr>
+          <p:cNvPr id="5" name="TextBox 4"/>
+          <p:cNvSpPr txBox="1"/>
+          <p:nvPr/>
+        </p:nvSpPr>
+        <p:spPr>
+          <a:xfrm>
+            <a:off x="11704320" y="6492240"/>
+            <a:ext cx="365760" cy="274320"/>
+          </a:xfrm>
+          <a:prstGeom prst="rect">
+            <a:avLst/>
+          </a:prstGeom>
+          <a:noFill/>
+        </p:spPr>
+        <p:txBody>
+          <a:bodyPr wrap="square">
+            <a:spAutoFit/>
+          </a:bodyPr>
+          <a:lstStyle/>
+          <a:p>
+            <a:pPr algn="r"/>
+            <a:r>
+              <a:rPr sz="1100" b="0">
+                <a:solidFill>
+                  <a:srgbClr val="53565A"/>
+                </a:solidFill>
+                <a:latin typeface="Calibri"/>
+              </a:rPr>
+              <a:t>13</a:t>
+            </a:r>
+          </a:p>
+        </p:txBody>
+      </p:sp>
+      <p:sp>
+        <p:nvSpPr>
+          <p:cNvPr id="6" name="TextBox 5"/>
+          <p:cNvSpPr txBox="1"/>
+          <p:nvPr/>
+        </p:nvSpPr>
+        <p:spPr>
+          <a:xfrm>
+            <a:off x="411480" y="1325880"/>
+            <a:ext cx="11338560" cy="5166360"/>
+          </a:xfrm>
+          <a:prstGeom prst="rect">
+            <a:avLst/>
+          </a:prstGeom>
+          <a:noFill/>
+        </p:spPr>
+        <p:txBody>
+          <a:bodyPr wrap="square">
+            <a:spAutoFit/>
+          </a:bodyPr>
+          <a:lstStyle/>
+          <a:p>
+            <a:pPr>
+              <a:spcBef>
+                <a:spcPts val="500"/>
+              </a:spcBef>
+            </a:pPr>
+            <a:r>
+              <a:rPr sz="1900" b="1">
+                <a:solidFill>
+                  <a:srgbClr val="FFFFFF"/>
+                </a:solidFill>
+                <a:latin typeface="Calibri"/>
+              </a:rPr>
+              <a:t>▸  De novo enzyme design</a:t>
+            </a:r>
+          </a:p>
+          <a:p>
+            <a:pPr lvl="1">
+              <a:spcBef>
+                <a:spcPts val="300"/>
+              </a:spcBef>
+            </a:pPr>
+            <a:r>
+              <a:rPr sz="1600" b="0">
+                <a:solidFill>
+                  <a:srgbClr val="FFFFFF"/>
+                </a:solidFill>
+                <a:latin typeface="Calibri"/>
+              </a:rPr>
+              <a:t>       ◦  Retro-aldolase: computationally designed active site on TIM-barrel scaffold</a:t>
+            </a:r>
+          </a:p>
+          <a:p>
+            <a:pPr lvl="1">
+              <a:spcBef>
+                <a:spcPts val="300"/>
+              </a:spcBef>
+            </a:pPr>
+            <a:r>
+              <a:rPr sz="1600" b="0">
+                <a:solidFill>
+                  <a:srgbClr val="FFFFFF"/>
+                </a:solidFill>
+                <a:latin typeface="Calibri"/>
+              </a:rPr>
+              <a:t>       ◦  Kemp eliminase: model C–H acid chemistry not found in natural enzymes</a:t>
+            </a:r>
+          </a:p>
+          <a:p>
+            <a:pPr>
+              <a:spcBef>
+                <a:spcPts val="500"/>
+              </a:spcBef>
+            </a:pPr>
+            <a:r>
+              <a:rPr sz="1900" b="1">
+                <a:solidFill>
+                  <a:srgbClr val="FFFFFF"/>
+                </a:solidFill>
+                <a:latin typeface="Calibri"/>
+              </a:rPr>
+              <a:t>▸  Industrial biocatalysis</a:t>
+            </a:r>
+          </a:p>
+          <a:p>
+            <a:pPr lvl="1">
+              <a:spcBef>
+                <a:spcPts val="300"/>
+              </a:spcBef>
+            </a:pPr>
+            <a:r>
+              <a:rPr sz="1600" b="0">
+                <a:solidFill>
+                  <a:srgbClr val="FFFFFF"/>
+                </a:solidFill>
+                <a:latin typeface="Calibri"/>
+              </a:rPr>
+              <a:t>       ◦  Directed evolution of P450 enzymes for pharmaceutical synthesis</a:t>
+            </a:r>
+          </a:p>
+          <a:p>
+            <a:pPr lvl="1">
+              <a:spcBef>
+                <a:spcPts val="300"/>
+              </a:spcBef>
+            </a:pPr>
+            <a:r>
+              <a:rPr sz="1600" b="0">
+                <a:solidFill>
+                  <a:srgbClr val="FFFFFF"/>
+                </a:solidFill>
+                <a:latin typeface="Calibri"/>
+              </a:rPr>
+              <a:t>       ◦  Thermostable cellulases for biomass degradation</a:t>
+            </a:r>
+          </a:p>
+          <a:p>
+            <a:pPr>
+              <a:spcBef>
+                <a:spcPts val="500"/>
+              </a:spcBef>
+            </a:pPr>
+            <a:r>
+              <a:rPr sz="1900" b="1">
+                <a:solidFill>
+                  <a:srgbClr val="FFFFFF"/>
+                </a:solidFill>
+                <a:latin typeface="Calibri"/>
+              </a:rPr>
+              <a:t>▸  Computational enzyme redesign</a:t>
+            </a:r>
+          </a:p>
+          <a:p>
+            <a:pPr lvl="1">
+              <a:spcBef>
+                <a:spcPts val="300"/>
+              </a:spcBef>
+            </a:pPr>
+            <a:r>
+              <a:rPr sz="1600" b="0">
+                <a:solidFill>
+                  <a:srgbClr val="FFFFFF"/>
+                </a:solidFill>
+                <a:latin typeface="Calibri"/>
+              </a:rPr>
+              <a:t>       ◦  Switch substrate specificity or stereoselectivity via active-site mutations</a:t>
+            </a:r>
+          </a:p>
+          <a:p>
+            <a:pPr>
+              <a:spcBef>
+                <a:spcPts val="500"/>
+              </a:spcBef>
+            </a:pPr>
+            <a:r>
+              <a:rPr sz="1900" b="1">
+                <a:solidFill>
+                  <a:srgbClr val="FFFFFF"/>
+                </a:solidFill>
+                <a:latin typeface="Calibri"/>
+              </a:rPr>
+              <a:t>▸  Metalloenzyme design</a:t>
+            </a:r>
+          </a:p>
+          <a:p>
+            <a:pPr lvl="1">
+              <a:spcBef>
+                <a:spcPts val="300"/>
+              </a:spcBef>
+            </a:pPr>
+            <a:r>
+              <a:rPr sz="1600" b="0">
+                <a:solidFill>
+                  <a:srgbClr val="FFFFFF"/>
+                </a:solidFill>
+                <a:latin typeface="Calibri"/>
+              </a:rPr>
+              <a:t>       ◦  Introduce non-native metal cofactors (Mn, Fe, Cu) for new reactions</a:t>
+            </a:r>
+          </a:p>
+        </p:txBody>
+      </p:sp>
+    </p:spTree>
+  </p:cSld>
+  <p:clrMapOvr>
+    <a:masterClrMapping/>
+  </p:clrMapOvr>
+</p:sld>
+</file>
+
+<file path=ppt/slides/slide14.xml><?xml version="1.0" encoding="utf-8"?>
+<p:sld xmlns:a="http://schemas.openxmlformats.org/drawingml/2006/main" xmlns:p="http://schemas.openxmlformats.org/presentationml/2006/main" xmlns:r="http://schemas.openxmlformats.org/officeDocument/2006/relationships">
+  <p:cSld>
+    <p:spTree>
+      <p:nvGrpSpPr>
+        <p:cNvPr id="1" name=""/>
+        <p:cNvGrpSpPr/>
+        <p:nvPr/>
+      </p:nvGrpSpPr>
+      <p:grpSpPr/>
+      <p:sp>
+        <p:nvSpPr>
+          <p:cNvPr id="2" name="Rectangle 1"/>
+          <p:cNvSpPr/>
+          <p:nvPr/>
+        </p:nvSpPr>
+        <p:spPr>
+          <a:xfrm>
+            <a:off x="0" y="0"/>
+            <a:ext cx="12188952" cy="6858000"/>
+          </a:xfrm>
+          <a:prstGeom prst="rect">
+            <a:avLst/>
+          </a:prstGeom>
+          <a:solidFill>
+            <a:srgbClr val="F2F2F2"/>
+          </a:solidFill>
+          <a:ln>
+            <a:noFill/>
+          </a:ln>
+        </p:spPr>
+        <p:style>
+          <a:lnRef idx="1">
+            <a:schemeClr val="accent1"/>
+          </a:lnRef>
+          <a:fillRef idx="3">
+            <a:schemeClr val="accent1"/>
+          </a:fillRef>
+          <a:effectRef idx="2">
+            <a:schemeClr val="accent1"/>
+          </a:effectRef>
+          <a:fontRef idx="minor">
+            <a:schemeClr val="lt1"/>
+          </a:fontRef>
+        </p:style>
+        <p:txBody>
+          <a:bodyPr rtlCol="0" anchor="ctr"/>
+          <a:lstStyle/>
+          <a:p>
+            <a:pPr algn="ctr"/>
+          </a:p>
+        </p:txBody>
+      </p:sp>
+      <p:sp>
+        <p:nvSpPr>
+          <p:cNvPr id="3" name="Rectangle 2"/>
+          <p:cNvSpPr/>
+          <p:nvPr/>
+        </p:nvSpPr>
+        <p:spPr>
+          <a:xfrm>
+            <a:off x="0" y="0"/>
+            <a:ext cx="12188952" cy="1143000"/>
+          </a:xfrm>
+          <a:prstGeom prst="rect">
+            <a:avLst/>
+          </a:prstGeom>
+          <a:solidFill>
+            <a:srgbClr val="041E42"/>
+          </a:solidFill>
+          <a:ln>
+            <a:noFill/>
+          </a:ln>
+        </p:spPr>
+        <p:style>
+          <a:lnRef idx="1">
+            <a:schemeClr val="accent1"/>
+          </a:lnRef>
+          <a:fillRef idx="3">
+            <a:schemeClr val="accent1"/>
+          </a:fillRef>
+          <a:effectRef idx="2">
+            <a:schemeClr val="accent1"/>
+          </a:effectRef>
+          <a:fontRef idx="minor">
+            <a:schemeClr val="lt1"/>
+          </a:fontRef>
+        </p:style>
+        <p:txBody>
+          <a:bodyPr rtlCol="0" anchor="ctr"/>
+          <a:lstStyle/>
+          <a:p>
+            <a:pPr algn="ctr"/>
+          </a:p>
+        </p:txBody>
+      </p:sp>
+      <p:sp>
+        <p:nvSpPr>
+          <p:cNvPr id="4" name="Rectangle 3"/>
+          <p:cNvSpPr/>
+          <p:nvPr/>
+        </p:nvSpPr>
+        <p:spPr>
+          <a:xfrm>
+            <a:off x="0" y="6629400"/>
+            <a:ext cx="12188952" cy="228600"/>
+          </a:xfrm>
+          <a:prstGeom prst="rect">
+            <a:avLst/>
+          </a:prstGeom>
+          <a:solidFill>
+            <a:srgbClr val="C8A951"/>
+          </a:solidFill>
+          <a:ln>
+            <a:noFill/>
+          </a:ln>
+        </p:spPr>
+        <p:style>
+          <a:lnRef idx="1">
+            <a:schemeClr val="accent1"/>
+          </a:lnRef>
+          <a:fillRef idx="3">
+            <a:schemeClr val="accent1"/>
+          </a:fillRef>
+          <a:effectRef idx="2">
+            <a:schemeClr val="accent1"/>
+          </a:effectRef>
+          <a:fontRef idx="minor">
+            <a:schemeClr val="lt1"/>
+          </a:fontRef>
+        </p:style>
+        <p:txBody>
+          <a:bodyPr rtlCol="0" anchor="ctr"/>
+          <a:lstStyle/>
+          <a:p>
+            <a:pPr algn="ctr"/>
+          </a:p>
+        </p:txBody>
+      </p:sp>
+      <p:sp>
+        <p:nvSpPr>
+          <p:cNvPr id="5" name="TextBox 4"/>
+          <p:cNvSpPr txBox="1"/>
+          <p:nvPr/>
+        </p:nvSpPr>
+        <p:spPr>
+          <a:xfrm>
+            <a:off x="320040" y="137160"/>
+            <a:ext cx="11430000" cy="914400"/>
+          </a:xfrm>
+          <a:prstGeom prst="rect">
+            <a:avLst/>
+          </a:prstGeom>
+          <a:noFill/>
+        </p:spPr>
+        <p:txBody>
+          <a:bodyPr wrap="square">
+            <a:spAutoFit/>
+          </a:bodyPr>
+          <a:lstStyle/>
+          <a:p>
+            <a:pPr algn="l"/>
+            <a:r>
+              <a:rPr sz="3000" b="1">
+                <a:solidFill>
+                  <a:srgbClr val="FFFFFF"/>
+                </a:solidFill>
+                <a:latin typeface="Georgia"/>
+              </a:rPr>
+              <a:t>Applications — Biosensors, Biomaterials &amp; Synbio</a:t>
+            </a:r>
+          </a:p>
+        </p:txBody>
+      </p:sp>
+      <p:sp>
+        <p:nvSpPr>
+          <p:cNvPr id="6" name="TextBox 5"/>
+          <p:cNvSpPr txBox="1"/>
+          <p:nvPr/>
+        </p:nvSpPr>
+        <p:spPr>
+          <a:xfrm>
+            <a:off x="11704320" y="6492240"/>
+            <a:ext cx="365760" cy="274320"/>
+          </a:xfrm>
+          <a:prstGeom prst="rect">
+            <a:avLst/>
+          </a:prstGeom>
+          <a:noFill/>
+        </p:spPr>
+        <p:txBody>
+          <a:bodyPr wrap="square">
+            <a:spAutoFit/>
+          </a:bodyPr>
+          <a:lstStyle/>
+          <a:p>
+            <a:pPr algn="r"/>
+            <a:r>
+              <a:rPr sz="1100" b="0">
+                <a:solidFill>
+                  <a:srgbClr val="53565A"/>
+                </a:solidFill>
+                <a:latin typeface="Calibri"/>
+              </a:rPr>
+              <a:t>14</a:t>
+            </a:r>
+          </a:p>
+        </p:txBody>
+      </p:sp>
+      <p:sp>
+        <p:nvSpPr>
+          <p:cNvPr id="7" name="TextBox 6"/>
+          <p:cNvSpPr txBox="1"/>
+          <p:nvPr/>
+        </p:nvSpPr>
+        <p:spPr>
+          <a:xfrm>
+            <a:off x="411480" y="1325880"/>
+            <a:ext cx="11338560" cy="5166360"/>
+          </a:xfrm>
+          <a:prstGeom prst="rect">
+            <a:avLst/>
+          </a:prstGeom>
+          <a:noFill/>
+        </p:spPr>
+        <p:txBody>
+          <a:bodyPr wrap="square">
+            <a:spAutoFit/>
+          </a:bodyPr>
+          <a:lstStyle/>
+          <a:p>
+            <a:pPr>
+              <a:spcBef>
+                <a:spcPts val="500"/>
+              </a:spcBef>
+            </a:pPr>
+            <a:r>
+              <a:rPr sz="1900" b="1">
+                <a:solidFill>
+                  <a:srgbClr val="1A1A1A"/>
+                </a:solidFill>
+                <a:latin typeface="Georgia"/>
+              </a:rPr>
+              <a:t>▸  Fluorescent biosensors</a:t>
+            </a:r>
+          </a:p>
+          <a:p>
+            <a:pPr lvl="1">
+              <a:spcBef>
+                <a:spcPts val="300"/>
+              </a:spcBef>
+            </a:pPr>
+            <a:r>
+              <a:rPr sz="1600" b="0">
+                <a:solidFill>
+                  <a:srgbClr val="1A1A1A"/>
+                </a:solidFill>
+                <a:latin typeface="Calibri"/>
+              </a:rPr>
+              <a:t>       ◦  Designed binding pockets that shift chromophore fluorescence on ligand binding</a:t>
+            </a:r>
+          </a:p>
+          <a:p>
+            <a:pPr lvl="1">
+              <a:spcBef>
+                <a:spcPts val="300"/>
+              </a:spcBef>
+            </a:pPr>
+            <a:r>
+              <a:rPr sz="1600" b="0">
+                <a:solidFill>
+                  <a:srgbClr val="1A1A1A"/>
+                </a:solidFill>
+                <a:latin typeface="Calibri"/>
+              </a:rPr>
+              <a:t>       ◦  dLight, GRAB sensors for in vivo neurotransmitter imaging</a:t>
+            </a:r>
+          </a:p>
+          <a:p>
+            <a:pPr>
+              <a:spcBef>
+                <a:spcPts val="500"/>
+              </a:spcBef>
+            </a:pPr>
+            <a:r>
+              <a:rPr sz="1900" b="1">
+                <a:solidFill>
+                  <a:srgbClr val="1A1A1A"/>
+                </a:solidFill>
+                <a:latin typeface="Georgia"/>
+              </a:rPr>
+              <a:t>▸  Self-assembling biomaterials</a:t>
+            </a:r>
+          </a:p>
+          <a:p>
+            <a:pPr lvl="1">
+              <a:spcBef>
+                <a:spcPts val="300"/>
+              </a:spcBef>
+            </a:pPr>
+            <a:r>
+              <a:rPr sz="1600" b="0">
+                <a:solidFill>
+                  <a:srgbClr val="1A1A1A"/>
+                </a:solidFill>
+                <a:latin typeface="Calibri"/>
+              </a:rPr>
+              <a:t>       ◦  Symmetric protein cages (T33-09) for drug delivery</a:t>
+            </a:r>
+          </a:p>
+          <a:p>
+            <a:pPr lvl="1">
+              <a:spcBef>
+                <a:spcPts val="300"/>
+              </a:spcBef>
+            </a:pPr>
+            <a:r>
+              <a:rPr sz="1600" b="0">
+                <a:solidFill>
+                  <a:srgbClr val="1A1A1A"/>
+                </a:solidFill>
+                <a:latin typeface="Calibri"/>
+              </a:rPr>
+              <a:t>       ◦  Hydrogels, fibres, and lattices from designed coiled-coil proteins</a:t>
+            </a:r>
+          </a:p>
+          <a:p>
+            <a:pPr>
+              <a:spcBef>
+                <a:spcPts val="500"/>
+              </a:spcBef>
+            </a:pPr>
+            <a:r>
+              <a:rPr sz="1900" b="1">
+                <a:solidFill>
+                  <a:srgbClr val="1A1A1A"/>
+                </a:solidFill>
+                <a:latin typeface="Georgia"/>
+              </a:rPr>
+              <a:t>▸  Synthetic biology</a:t>
+            </a:r>
+          </a:p>
+          <a:p>
+            <a:pPr lvl="1">
+              <a:spcBef>
+                <a:spcPts val="300"/>
+              </a:spcBef>
+            </a:pPr>
+            <a:r>
+              <a:rPr sz="1600" b="0">
+                <a:solidFill>
+                  <a:srgbClr val="1A1A1A"/>
+                </a:solidFill>
+                <a:latin typeface="Calibri"/>
+              </a:rPr>
+              <a:t>       ◦  Orthogonal translation systems with non-canonical amino acids</a:t>
+            </a:r>
+          </a:p>
+          <a:p>
+            <a:pPr lvl="1">
+              <a:spcBef>
+                <a:spcPts val="300"/>
+              </a:spcBef>
+            </a:pPr>
+            <a:r>
+              <a:rPr sz="1600" b="0">
+                <a:solidFill>
+                  <a:srgbClr val="1A1A1A"/>
+                </a:solidFill>
+                <a:latin typeface="Calibri"/>
+              </a:rPr>
+              <a:t>       ◦  Logic-gate proteins that respond to multiple input signals</a:t>
+            </a:r>
+          </a:p>
+          <a:p>
+            <a:pPr lvl="1">
+              <a:spcBef>
+                <a:spcPts val="300"/>
+              </a:spcBef>
+            </a:pPr>
+            <a:r>
+              <a:rPr sz="1600" b="0">
+                <a:solidFill>
+                  <a:srgbClr val="1A1A1A"/>
+                </a:solidFill>
+                <a:latin typeface="Calibri"/>
+              </a:rPr>
+              <a:t>       ◦  Designed protein–protein interaction networks as synthetic circuits</a:t>
+            </a:r>
+          </a:p>
+        </p:txBody>
+      </p:sp>
+    </p:spTree>
+  </p:cSld>
+  <p:clrMapOvr>
+    <a:masterClrMapping/>
+  </p:clrMapOvr>
+</p:sld>
+</file>
+
+<file path=ppt/slides/slide15.xml><?xml version="1.0" encoding="utf-8"?>
+<p:sld xmlns:a="http://schemas.openxmlformats.org/drawingml/2006/main" xmlns:p="http://schemas.openxmlformats.org/presentationml/2006/main" xmlns:r="http://schemas.openxmlformats.org/officeDocument/2006/relationships">
+  <p:cSld>
+    <p:spTree>
+      <p:nvGrpSpPr>
+        <p:cNvPr id="1" name=""/>
+        <p:cNvGrpSpPr/>
+        <p:nvPr/>
+      </p:nvGrpSpPr>
+      <p:grpSpPr/>
+      <p:sp>
+        <p:nvSpPr>
+          <p:cNvPr id="2" name="Rectangle 1"/>
+          <p:cNvSpPr/>
+          <p:nvPr/>
+        </p:nvSpPr>
+        <p:spPr>
+          <a:xfrm>
+            <a:off x="0" y="0"/>
+            <a:ext cx="12188952" cy="6858000"/>
+          </a:xfrm>
+          <a:prstGeom prst="rect">
+            <a:avLst/>
+          </a:prstGeom>
+          <a:solidFill>
+            <a:srgbClr val="041E42"/>
+          </a:solidFill>
+          <a:ln>
+            <a:noFill/>
+          </a:ln>
+        </p:spPr>
+        <p:style>
+          <a:lnRef idx="1">
+            <a:schemeClr val="accent1"/>
+          </a:lnRef>
+          <a:fillRef idx="3">
+            <a:schemeClr val="accent1"/>
+          </a:fillRef>
+          <a:effectRef idx="2">
+            <a:schemeClr val="accent1"/>
+          </a:effectRef>
+          <a:fontRef idx="minor">
+            <a:schemeClr val="lt1"/>
+          </a:fontRef>
+        </p:style>
+        <p:txBody>
+          <a:bodyPr rtlCol="0" anchor="ctr"/>
+          <a:lstStyle/>
+          <a:p>
+            <a:pPr algn="ctr"/>
+          </a:p>
+        </p:txBody>
+      </p:sp>
+      <p:sp>
+        <p:nvSpPr>
+          <p:cNvPr id="3" name="Rectangle 2"/>
+          <p:cNvSpPr/>
+          <p:nvPr/>
+        </p:nvSpPr>
+        <p:spPr>
+          <a:xfrm>
+            <a:off x="0" y="6629400"/>
+            <a:ext cx="12188952" cy="228600"/>
+          </a:xfrm>
+          <a:prstGeom prst="rect">
+            <a:avLst/>
+          </a:prstGeom>
+          <a:solidFill>
+            <a:srgbClr val="C8A951"/>
+          </a:solidFill>
+          <a:ln>
+            <a:noFill/>
+          </a:ln>
+        </p:spPr>
+        <p:style>
+          <a:lnRef idx="1">
+            <a:schemeClr val="accent1"/>
+          </a:lnRef>
+          <a:fillRef idx="3">
+            <a:schemeClr val="accent1"/>
+          </a:fillRef>
+          <a:effectRef idx="2">
+            <a:schemeClr val="accent1"/>
+          </a:effectRef>
+          <a:fontRef idx="minor">
+            <a:schemeClr val="lt1"/>
+          </a:fontRef>
+        </p:style>
+        <p:txBody>
+          <a:bodyPr rtlCol="0" anchor="ctr"/>
+          <a:lstStyle/>
+          <a:p>
+            <a:pPr algn="ctr"/>
+          </a:p>
+        </p:txBody>
+      </p:sp>
+      <p:sp>
+        <p:nvSpPr>
+          <p:cNvPr id="4" name="TextBox 3"/>
+          <p:cNvSpPr txBox="1"/>
+          <p:nvPr/>
+        </p:nvSpPr>
+        <p:spPr>
+          <a:xfrm>
+            <a:off x="320040" y="137160"/>
+            <a:ext cx="11430000" cy="914400"/>
+          </a:xfrm>
+          <a:prstGeom prst="rect">
+            <a:avLst/>
+          </a:prstGeom>
+          <a:noFill/>
+        </p:spPr>
+        <p:txBody>
+          <a:bodyPr wrap="square">
+            <a:spAutoFit/>
+          </a:bodyPr>
+          <a:lstStyle/>
+          <a:p>
+            <a:pPr algn="l"/>
+            <a:r>
+              <a:rPr sz="3000" b="1">
+                <a:solidFill>
+                  <a:srgbClr val="FFFFFF"/>
+                </a:solidFill>
+                <a:latin typeface="Georgia"/>
+              </a:rPr>
+              <a:t>Challenges</a:t>
+            </a:r>
+          </a:p>
+        </p:txBody>
+      </p:sp>
+      <p:sp>
+        <p:nvSpPr>
+          <p:cNvPr id="5" name="TextBox 4"/>
+          <p:cNvSpPr txBox="1"/>
+          <p:nvPr/>
+        </p:nvSpPr>
+        <p:spPr>
+          <a:xfrm>
+            <a:off x="11704320" y="6492240"/>
+            <a:ext cx="365760" cy="274320"/>
+          </a:xfrm>
+          <a:prstGeom prst="rect">
+            <a:avLst/>
+          </a:prstGeom>
+          <a:noFill/>
+        </p:spPr>
+        <p:txBody>
+          <a:bodyPr wrap="square">
+            <a:spAutoFit/>
+          </a:bodyPr>
+          <a:lstStyle/>
+          <a:p>
+            <a:pPr algn="r"/>
+            <a:r>
+              <a:rPr sz="1100" b="0">
+                <a:solidFill>
+                  <a:srgbClr val="53565A"/>
+                </a:solidFill>
+                <a:latin typeface="Calibri"/>
+              </a:rPr>
+              <a:t>15</a:t>
+            </a:r>
+          </a:p>
+        </p:txBody>
+      </p:sp>
+      <p:sp>
+        <p:nvSpPr>
+          <p:cNvPr id="6" name="TextBox 5"/>
+          <p:cNvSpPr txBox="1"/>
+          <p:nvPr/>
+        </p:nvSpPr>
+        <p:spPr>
+          <a:xfrm>
+            <a:off x="411480" y="1325880"/>
+            <a:ext cx="11338560" cy="5166360"/>
+          </a:xfrm>
+          <a:prstGeom prst="rect">
+            <a:avLst/>
+          </a:prstGeom>
+          <a:noFill/>
+        </p:spPr>
+        <p:txBody>
+          <a:bodyPr wrap="square">
+            <a:spAutoFit/>
+          </a:bodyPr>
+          <a:lstStyle/>
+          <a:p>
+            <a:pPr>
+              <a:spcBef>
+                <a:spcPts val="500"/>
+              </a:spcBef>
+            </a:pPr>
+            <a:r>
+              <a:rPr sz="1900" b="1">
+                <a:solidFill>
+                  <a:srgbClr val="FFFFFF"/>
+                </a:solidFill>
+                <a:latin typeface="Calibri"/>
+              </a:rPr>
+              <a:t>▸  Experimental validation remains the bottleneck</a:t>
+            </a:r>
+          </a:p>
+          <a:p>
+            <a:pPr lvl="1">
+              <a:spcBef>
+                <a:spcPts val="300"/>
+              </a:spcBef>
+            </a:pPr>
+            <a:r>
+              <a:rPr sz="1600" b="0">
+                <a:solidFill>
+                  <a:srgbClr val="FFFFFF"/>
+                </a:solidFill>
+                <a:latin typeface="Calibri"/>
+              </a:rPr>
+              <a:t>       ◦  Synthesis, expression, purification, and biophysical characterisation are slow</a:t>
+            </a:r>
+          </a:p>
+          <a:p>
+            <a:pPr lvl="1">
+              <a:spcBef>
+                <a:spcPts val="300"/>
+              </a:spcBef>
+            </a:pPr>
+            <a:r>
+              <a:rPr sz="1600" b="0">
+                <a:solidFill>
+                  <a:srgbClr val="FFFFFF"/>
+                </a:solidFill>
+                <a:latin typeface="Calibri"/>
+              </a:rPr>
+              <a:t>       ◦  High-throughput display methods (yeast, phage, PACE) are improving throughput</a:t>
+            </a:r>
+          </a:p>
+          <a:p>
+            <a:pPr>
+              <a:spcBef>
+                <a:spcPts val="500"/>
+              </a:spcBef>
+            </a:pPr>
+            <a:r>
+              <a:rPr sz="1900" b="1">
+                <a:solidFill>
+                  <a:srgbClr val="FFFFFF"/>
+                </a:solidFill>
+                <a:latin typeface="Calibri"/>
+              </a:rPr>
+              <a:t>▸  Designing protein dynamics and allostery</a:t>
+            </a:r>
+          </a:p>
+          <a:p>
+            <a:pPr lvl="1">
+              <a:spcBef>
+                <a:spcPts val="300"/>
+              </a:spcBef>
+            </a:pPr>
+            <a:r>
+              <a:rPr sz="1600" b="0">
+                <a:solidFill>
+                  <a:srgbClr val="FFFFFF"/>
+                </a:solidFill>
+                <a:latin typeface="Calibri"/>
+              </a:rPr>
+              <a:t>       ◦  Most methods optimise the ground-state structure, not conformational change</a:t>
+            </a:r>
+          </a:p>
+          <a:p>
+            <a:pPr>
+              <a:spcBef>
+                <a:spcPts val="500"/>
+              </a:spcBef>
+            </a:pPr>
+            <a:r>
+              <a:rPr sz="1900" b="1">
+                <a:solidFill>
+                  <a:srgbClr val="FFFFFF"/>
+                </a:solidFill>
+                <a:latin typeface="Calibri"/>
+              </a:rPr>
+              <a:t>▸  Non-standard amino acids and post-translational modifications</a:t>
+            </a:r>
+          </a:p>
+          <a:p>
+            <a:pPr lvl="1">
+              <a:spcBef>
+                <a:spcPts val="300"/>
+              </a:spcBef>
+            </a:pPr>
+            <a:r>
+              <a:rPr sz="1600" b="0">
+                <a:solidFill>
+                  <a:srgbClr val="FFFFFF"/>
+                </a:solidFill>
+                <a:latin typeface="Calibri"/>
+              </a:rPr>
+              <a:t>       ◦  Expanding chemical space beyond the canonical 20 AAs</a:t>
+            </a:r>
+          </a:p>
+          <a:p>
+            <a:pPr>
+              <a:spcBef>
+                <a:spcPts val="500"/>
+              </a:spcBef>
+            </a:pPr>
+            <a:r>
+              <a:rPr sz="1900" b="1">
+                <a:solidFill>
+                  <a:srgbClr val="FFFFFF"/>
+                </a:solidFill>
+                <a:latin typeface="Calibri"/>
+              </a:rPr>
+              <a:t>▸  Model interpretability</a:t>
+            </a:r>
+          </a:p>
+          <a:p>
+            <a:pPr lvl="1">
+              <a:spcBef>
+                <a:spcPts val="300"/>
+              </a:spcBef>
+            </a:pPr>
+            <a:r>
+              <a:rPr sz="1600" b="0">
+                <a:solidFill>
+                  <a:srgbClr val="FFFFFF"/>
+                </a:solidFill>
+                <a:latin typeface="Calibri"/>
+              </a:rPr>
+              <a:t>       ◦  Deep-learning models are largely black boxes — hard to extract design rules</a:t>
+            </a:r>
+          </a:p>
+          <a:p>
+            <a:pPr>
+              <a:spcBef>
+                <a:spcPts val="500"/>
+              </a:spcBef>
+            </a:pPr>
+            <a:r>
+              <a:rPr sz="1900" b="1">
+                <a:solidFill>
+                  <a:srgbClr val="FFFFFF"/>
+                </a:solidFill>
+                <a:latin typeface="Calibri"/>
+              </a:rPr>
+              <a:t>▸  Off-target and immunogenicity risks</a:t>
+            </a:r>
+          </a:p>
+          <a:p>
+            <a:pPr lvl="1">
+              <a:spcBef>
+                <a:spcPts val="300"/>
+              </a:spcBef>
+            </a:pPr>
+            <a:r>
+              <a:rPr sz="1600" b="0">
+                <a:solidFill>
+                  <a:srgbClr val="FFFFFF"/>
+                </a:solidFill>
+                <a:latin typeface="Calibri"/>
+              </a:rPr>
+              <a:t>       ◦  Designed sequences may trigger immune responses in therapeutic contexts</a:t>
+            </a:r>
+          </a:p>
+        </p:txBody>
+      </p:sp>
+    </p:spTree>
+  </p:cSld>
+  <p:clrMapOvr>
+    <a:masterClrMapping/>
+  </p:clrMapOvr>
+</p:sld>
+</file>
+
+<file path=ppt/slides/slide16.xml><?xml version="1.0" encoding="utf-8"?>
+<p:sld xmlns:a="http://schemas.openxmlformats.org/drawingml/2006/main" xmlns:p="http://schemas.openxmlformats.org/presentationml/2006/main" xmlns:r="http://schemas.openxmlformats.org/officeDocument/2006/relationships">
+  <p:cSld>
+    <p:spTree>
+      <p:nvGrpSpPr>
+        <p:cNvPr id="1" name=""/>
+        <p:cNvGrpSpPr/>
+        <p:nvPr/>
+      </p:nvGrpSpPr>
+      <p:grpSpPr/>
+      <p:sp>
+        <p:nvSpPr>
+          <p:cNvPr id="2" name="Rectangle 1"/>
+          <p:cNvSpPr/>
+          <p:nvPr/>
+        </p:nvSpPr>
+        <p:spPr>
+          <a:xfrm>
+            <a:off x="0" y="0"/>
+            <a:ext cx="12188952" cy="6858000"/>
+          </a:xfrm>
+          <a:prstGeom prst="rect">
+            <a:avLst/>
+          </a:prstGeom>
+          <a:solidFill>
+            <a:srgbClr val="F2F2F2"/>
+          </a:solidFill>
+          <a:ln>
+            <a:noFill/>
+          </a:ln>
+        </p:spPr>
+        <p:style>
+          <a:lnRef idx="1">
+            <a:schemeClr val="accent1"/>
+          </a:lnRef>
+          <a:fillRef idx="3">
+            <a:schemeClr val="accent1"/>
+          </a:fillRef>
+          <a:effectRef idx="2">
+            <a:schemeClr val="accent1"/>
+          </a:effectRef>
+          <a:fontRef idx="minor">
+            <a:schemeClr val="lt1"/>
+          </a:fontRef>
+        </p:style>
+        <p:txBody>
+          <a:bodyPr rtlCol="0" anchor="ctr"/>
+          <a:lstStyle/>
+          <a:p>
+            <a:pPr algn="ctr"/>
+          </a:p>
+        </p:txBody>
+      </p:sp>
+      <p:sp>
+        <p:nvSpPr>
+          <p:cNvPr id="3" name="Rectangle 2"/>
+          <p:cNvSpPr/>
+          <p:nvPr/>
+        </p:nvSpPr>
+        <p:spPr>
+          <a:xfrm>
+            <a:off x="0" y="0"/>
+            <a:ext cx="12188952" cy="1143000"/>
+          </a:xfrm>
+          <a:prstGeom prst="rect">
+            <a:avLst/>
+          </a:prstGeom>
+          <a:solidFill>
+            <a:srgbClr val="041E42"/>
+          </a:solidFill>
+          <a:ln>
+            <a:noFill/>
+          </a:ln>
+        </p:spPr>
+        <p:style>
+          <a:lnRef idx="1">
+            <a:schemeClr val="accent1"/>
+          </a:lnRef>
+          <a:fillRef idx="3">
+            <a:schemeClr val="accent1"/>
+          </a:fillRef>
+          <a:effectRef idx="2">
+            <a:schemeClr val="accent1"/>
+          </a:effectRef>
+          <a:fontRef idx="minor">
+            <a:schemeClr val="lt1"/>
+          </a:fontRef>
+        </p:style>
+        <p:txBody>
+          <a:bodyPr rtlCol="0" anchor="ctr"/>
+          <a:lstStyle/>
+          <a:p>
+            <a:pPr algn="ctr"/>
+          </a:p>
+        </p:txBody>
+      </p:sp>
+      <p:sp>
+        <p:nvSpPr>
+          <p:cNvPr id="4" name="Rectangle 3"/>
+          <p:cNvSpPr/>
+          <p:nvPr/>
+        </p:nvSpPr>
+        <p:spPr>
+          <a:xfrm>
+            <a:off x="0" y="6629400"/>
+            <a:ext cx="12188952" cy="228600"/>
+          </a:xfrm>
+          <a:prstGeom prst="rect">
+            <a:avLst/>
+          </a:prstGeom>
+          <a:solidFill>
+            <a:srgbClr val="C8A951"/>
+          </a:solidFill>
+          <a:ln>
+            <a:noFill/>
+          </a:ln>
+        </p:spPr>
+        <p:style>
+          <a:lnRef idx="1">
+            <a:schemeClr val="accent1"/>
+          </a:lnRef>
+          <a:fillRef idx="3">
+            <a:schemeClr val="accent1"/>
+          </a:fillRef>
+          <a:effectRef idx="2">
+            <a:schemeClr val="accent1"/>
+          </a:effectRef>
+          <a:fontRef idx="minor">
+            <a:schemeClr val="lt1"/>
+          </a:fontRef>
+        </p:style>
+        <p:txBody>
+          <a:bodyPr rtlCol="0" anchor="ctr"/>
+          <a:lstStyle/>
+          <a:p>
+            <a:pPr algn="ctr"/>
+          </a:p>
+        </p:txBody>
+      </p:sp>
+      <p:sp>
+        <p:nvSpPr>
+          <p:cNvPr id="5" name="TextBox 4"/>
+          <p:cNvSpPr txBox="1"/>
+          <p:nvPr/>
+        </p:nvSpPr>
+        <p:spPr>
+          <a:xfrm>
+            <a:off x="320040" y="137160"/>
+            <a:ext cx="11430000" cy="914400"/>
+          </a:xfrm>
+          <a:prstGeom prst="rect">
+            <a:avLst/>
+          </a:prstGeom>
+          <a:noFill/>
+        </p:spPr>
+        <p:txBody>
+          <a:bodyPr wrap="square">
+            <a:spAutoFit/>
+          </a:bodyPr>
+          <a:lstStyle/>
+          <a:p>
+            <a:pPr algn="l"/>
+            <a:r>
+              <a:rPr sz="3000" b="1">
+                <a:solidFill>
+                  <a:srgbClr val="FFFFFF"/>
+                </a:solidFill>
+                <a:latin typeface="Georgia"/>
+              </a:rPr>
+              <a:t>Future Directions</a:t>
+            </a:r>
+          </a:p>
+        </p:txBody>
+      </p:sp>
+      <p:sp>
+        <p:nvSpPr>
+          <p:cNvPr id="6" name="TextBox 5"/>
+          <p:cNvSpPr txBox="1"/>
+          <p:nvPr/>
+        </p:nvSpPr>
+        <p:spPr>
+          <a:xfrm>
+            <a:off x="11704320" y="6492240"/>
+            <a:ext cx="365760" cy="274320"/>
+          </a:xfrm>
+          <a:prstGeom prst="rect">
+            <a:avLst/>
+          </a:prstGeom>
+          <a:noFill/>
+        </p:spPr>
+        <p:txBody>
+          <a:bodyPr wrap="square">
+            <a:spAutoFit/>
+          </a:bodyPr>
+          <a:lstStyle/>
+          <a:p>
+            <a:pPr algn="r"/>
+            <a:r>
+              <a:rPr sz="1100" b="0">
+                <a:solidFill>
+                  <a:srgbClr val="53565A"/>
+                </a:solidFill>
+                <a:latin typeface="Calibri"/>
+              </a:rPr>
+              <a:t>16</a:t>
+            </a:r>
+          </a:p>
+        </p:txBody>
+      </p:sp>
+      <p:sp>
+        <p:nvSpPr>
+          <p:cNvPr id="7" name="TextBox 6"/>
+          <p:cNvSpPr txBox="1"/>
+          <p:nvPr/>
+        </p:nvSpPr>
+        <p:spPr>
+          <a:xfrm>
+            <a:off x="411480" y="1325880"/>
+            <a:ext cx="11338560" cy="5166360"/>
+          </a:xfrm>
+          <a:prstGeom prst="rect">
+            <a:avLst/>
+          </a:prstGeom>
+          <a:noFill/>
+        </p:spPr>
+        <p:txBody>
+          <a:bodyPr wrap="square">
+            <a:spAutoFit/>
+          </a:bodyPr>
+          <a:lstStyle/>
+          <a:p>
+            <a:pPr>
+              <a:spcBef>
+                <a:spcPts val="500"/>
+              </a:spcBef>
+            </a:pPr>
+            <a:r>
+              <a:rPr sz="1900" b="1">
+                <a:solidFill>
+                  <a:srgbClr val="1A1A1A"/>
+                </a:solidFill>
+                <a:latin typeface="Georgia"/>
+              </a:rPr>
+              <a:t>▸  Fully automated design–build–test (DBT) cycles</a:t>
+            </a:r>
+          </a:p>
+          <a:p>
+            <a:pPr lvl="1">
+              <a:spcBef>
+                <a:spcPts val="300"/>
+              </a:spcBef>
+            </a:pPr>
+            <a:r>
+              <a:rPr sz="1600" b="0">
+                <a:solidFill>
+                  <a:srgbClr val="1A1A1A"/>
+                </a:solidFill>
+                <a:latin typeface="Calibri"/>
+              </a:rPr>
+              <a:t>       ◦  Robotic labs + ML feedback loops to iterate in days, not months</a:t>
+            </a:r>
+          </a:p>
+          <a:p>
+            <a:pPr>
+              <a:spcBef>
+                <a:spcPts val="500"/>
+              </a:spcBef>
+            </a:pPr>
+            <a:r>
+              <a:rPr sz="1900" b="1">
+                <a:solidFill>
+                  <a:srgbClr val="1A1A1A"/>
+                </a:solidFill>
+                <a:latin typeface="Georgia"/>
+              </a:rPr>
+              <a:t>▸  Foundation models for proteins</a:t>
+            </a:r>
+          </a:p>
+          <a:p>
+            <a:pPr lvl="1">
+              <a:spcBef>
+                <a:spcPts val="300"/>
+              </a:spcBef>
+            </a:pPr>
+            <a:r>
+              <a:rPr sz="1600" b="0">
+                <a:solidFill>
+                  <a:srgbClr val="1A1A1A"/>
+                </a:solidFill>
+                <a:latin typeface="Calibri"/>
+              </a:rPr>
+              <a:t>       ◦  Large-scale pre-training on sequence, structure, and function data</a:t>
+            </a:r>
+          </a:p>
+          <a:p>
+            <a:pPr lvl="1">
+              <a:spcBef>
+                <a:spcPts val="300"/>
+              </a:spcBef>
+            </a:pPr>
+            <a:r>
+              <a:rPr sz="1600" b="0">
+                <a:solidFill>
+                  <a:srgbClr val="1A1A1A"/>
+                </a:solidFill>
+                <a:latin typeface="Calibri"/>
+              </a:rPr>
+              <a:t>       ◦  Fine-tuning on wet-lab readouts (affinity, stability, activity)</a:t>
+            </a:r>
+          </a:p>
+          <a:p>
+            <a:pPr>
+              <a:spcBef>
+                <a:spcPts val="500"/>
+              </a:spcBef>
+            </a:pPr>
+            <a:r>
+              <a:rPr sz="1900" b="1">
+                <a:solidFill>
+                  <a:srgbClr val="1A1A1A"/>
+                </a:solidFill>
+                <a:latin typeface="Georgia"/>
+              </a:rPr>
+              <a:t>▸  Multi-state and dynamic design</a:t>
+            </a:r>
+          </a:p>
+          <a:p>
+            <a:pPr lvl="1">
+              <a:spcBef>
+                <a:spcPts val="300"/>
+              </a:spcBef>
+            </a:pPr>
+            <a:r>
+              <a:rPr sz="1600" b="0">
+                <a:solidFill>
+                  <a:srgbClr val="1A1A1A"/>
+                </a:solidFill>
+                <a:latin typeface="Calibri"/>
+              </a:rPr>
+              <a:t>       ◦  Explicitly optimise ensembles of conformations, not a single structure</a:t>
+            </a:r>
+          </a:p>
+          <a:p>
+            <a:pPr>
+              <a:spcBef>
+                <a:spcPts val="500"/>
+              </a:spcBef>
+            </a:pPr>
+            <a:r>
+              <a:rPr sz="1900" b="1">
+                <a:solidFill>
+                  <a:srgbClr val="1A1A1A"/>
+                </a:solidFill>
+                <a:latin typeface="Georgia"/>
+              </a:rPr>
+              <a:t>▸  Multi-modal design</a:t>
+            </a:r>
+          </a:p>
+          <a:p>
+            <a:pPr lvl="1">
+              <a:spcBef>
+                <a:spcPts val="300"/>
+              </a:spcBef>
+            </a:pPr>
+            <a:r>
+              <a:rPr sz="1600" b="0">
+                <a:solidFill>
+                  <a:srgbClr val="1A1A1A"/>
+                </a:solidFill>
+                <a:latin typeface="Calibri"/>
+              </a:rPr>
+              <a:t>       ◦  Co-design of protein–small molecule, protein–RNA, protein–lipid systems</a:t>
+            </a:r>
+          </a:p>
+          <a:p>
+            <a:pPr>
+              <a:spcBef>
+                <a:spcPts val="500"/>
+              </a:spcBef>
+            </a:pPr>
+            <a:r>
+              <a:rPr sz="1900" b="1">
+                <a:solidFill>
+                  <a:srgbClr val="1A1A1A"/>
+                </a:solidFill>
+                <a:latin typeface="Georgia"/>
+              </a:rPr>
+              <a:t>▸  Expanding the genetic code</a:t>
+            </a:r>
+          </a:p>
+          <a:p>
+            <a:pPr lvl="1">
+              <a:spcBef>
+                <a:spcPts val="300"/>
+              </a:spcBef>
+            </a:pPr>
+            <a:r>
+              <a:rPr sz="1600" b="0">
+                <a:solidFill>
+                  <a:srgbClr val="1A1A1A"/>
+                </a:solidFill>
+                <a:latin typeface="Calibri"/>
+              </a:rPr>
+              <a:t>       ◦  200+ non-canonical AAs available via amber suppression and genetic code expansion</a:t>
+            </a:r>
+          </a:p>
+          <a:p>
+            <a:pPr>
+              <a:spcBef>
+                <a:spcPts val="500"/>
+              </a:spcBef>
+            </a:pPr>
+            <a:r>
+              <a:rPr sz="1900" b="1">
+                <a:solidFill>
+                  <a:srgbClr val="1A1A1A"/>
+                </a:solidFill>
+                <a:latin typeface="Georgia"/>
+              </a:rPr>
+              <a:t>▸  Democratisation</a:t>
+            </a:r>
+          </a:p>
+          <a:p>
+            <a:pPr lvl="1">
+              <a:spcBef>
+                <a:spcPts val="300"/>
+              </a:spcBef>
+            </a:pPr>
+            <a:r>
+              <a:rPr sz="1600" b="0">
+                <a:solidFill>
+                  <a:srgbClr val="1A1A1A"/>
+                </a:solidFill>
+                <a:latin typeface="Calibri"/>
+              </a:rPr>
+              <a:t>       ◦  Cloud-based tools (ColabDesign, EvolutionaryScale API) lower barriers</a:t>
+            </a:r>
+          </a:p>
+        </p:txBody>
+      </p:sp>
+    </p:spTree>
+  </p:cSld>
+  <p:clrMapOvr>
+    <a:masterClrMapping/>
+  </p:clrMapOvr>
+</p:sld>
+</file>
+
+<file path=ppt/slides/slide17.xml><?xml version="1.0" encoding="utf-8"?>
+<p:sld xmlns:a="http://schemas.openxmlformats.org/drawingml/2006/main" xmlns:p="http://schemas.openxmlformats.org/presentationml/2006/main" xmlns:r="http://schemas.openxmlformats.org/officeDocument/2006/relationships">
+  <p:cSld>
+    <p:spTree>
+      <p:nvGrpSpPr>
+        <p:cNvPr id="1" name=""/>
+        <p:cNvGrpSpPr/>
+        <p:nvPr/>
+      </p:nvGrpSpPr>
+      <p:grpSpPr/>
+      <p:sp>
+        <p:nvSpPr>
+          <p:cNvPr id="2" name="Rectangle 1"/>
+          <p:cNvSpPr/>
+          <p:nvPr/>
+        </p:nvSpPr>
+        <p:spPr>
+          <a:xfrm>
+            <a:off x="0" y="0"/>
+            <a:ext cx="12188952" cy="6858000"/>
+          </a:xfrm>
+          <a:prstGeom prst="rect">
+            <a:avLst/>
+          </a:prstGeom>
+          <a:solidFill>
+            <a:srgbClr val="F2F2F2"/>
+          </a:solidFill>
+          <a:ln>
+            <a:noFill/>
+          </a:ln>
+        </p:spPr>
+        <p:style>
+          <a:lnRef idx="1">
+            <a:schemeClr val="accent1"/>
+          </a:lnRef>
+          <a:fillRef idx="3">
+            <a:schemeClr val="accent1"/>
+          </a:fillRef>
+          <a:effectRef idx="2">
+            <a:schemeClr val="accent1"/>
+          </a:effectRef>
+          <a:fontRef idx="minor">
+            <a:schemeClr val="lt1"/>
+          </a:fontRef>
+        </p:style>
+        <p:txBody>
+          <a:bodyPr rtlCol="0" anchor="ctr"/>
+          <a:lstStyle/>
+          <a:p>
+            <a:pPr algn="ctr"/>
+          </a:p>
+        </p:txBody>
+      </p:sp>
+      <p:sp>
+        <p:nvSpPr>
+          <p:cNvPr id="3" name="Rectangle 2"/>
+          <p:cNvSpPr/>
+          <p:nvPr/>
+        </p:nvSpPr>
+        <p:spPr>
+          <a:xfrm>
+            <a:off x="0" y="0"/>
+            <a:ext cx="12188952" cy="1143000"/>
+          </a:xfrm>
+          <a:prstGeom prst="rect">
+            <a:avLst/>
+          </a:prstGeom>
+          <a:solidFill>
+            <a:srgbClr val="041E42"/>
+          </a:solidFill>
+          <a:ln>
+            <a:noFill/>
+          </a:ln>
+        </p:spPr>
+        <p:style>
+          <a:lnRef idx="1">
+            <a:schemeClr val="accent1"/>
+          </a:lnRef>
+          <a:fillRef idx="3">
+            <a:schemeClr val="accent1"/>
+          </a:fillRef>
+          <a:effectRef idx="2">
+            <a:schemeClr val="accent1"/>
+          </a:effectRef>
+          <a:fontRef idx="minor">
+            <a:schemeClr val="lt1"/>
+          </a:fontRef>
+        </p:style>
+        <p:txBody>
+          <a:bodyPr rtlCol="0" anchor="ctr"/>
+          <a:lstStyle/>
+          <a:p>
+            <a:pPr algn="ctr"/>
+          </a:p>
+        </p:txBody>
+      </p:sp>
+      <p:sp>
+        <p:nvSpPr>
+          <p:cNvPr id="4" name="Rectangle 3"/>
+          <p:cNvSpPr/>
+          <p:nvPr/>
+        </p:nvSpPr>
+        <p:spPr>
+          <a:xfrm>
+            <a:off x="0" y="6629400"/>
+            <a:ext cx="12188952" cy="228600"/>
+          </a:xfrm>
+          <a:prstGeom prst="rect">
+            <a:avLst/>
+          </a:prstGeom>
+          <a:solidFill>
+            <a:srgbClr val="C8A951"/>
+          </a:solidFill>
+          <a:ln>
+            <a:noFill/>
+          </a:ln>
+        </p:spPr>
+        <p:style>
+          <a:lnRef idx="1">
+            <a:schemeClr val="accent1"/>
+          </a:lnRef>
+          <a:fillRef idx="3">
+            <a:schemeClr val="accent1"/>
+          </a:fillRef>
+          <a:effectRef idx="2">
+            <a:schemeClr val="accent1"/>
+          </a:effectRef>
+          <a:fontRef idx="minor">
+            <a:schemeClr val="lt1"/>
+          </a:fontRef>
+        </p:style>
+        <p:txBody>
+          <a:bodyPr rtlCol="0" anchor="ctr"/>
+          <a:lstStyle/>
+          <a:p>
+            <a:pPr algn="ctr"/>
+          </a:p>
+        </p:txBody>
+      </p:sp>
+      <p:sp>
+        <p:nvSpPr>
+          <p:cNvPr id="5" name="TextBox 4"/>
+          <p:cNvSpPr txBox="1"/>
+          <p:nvPr/>
+        </p:nvSpPr>
+        <p:spPr>
+          <a:xfrm>
+            <a:off x="320040" y="137160"/>
+            <a:ext cx="11430000" cy="914400"/>
+          </a:xfrm>
+          <a:prstGeom prst="rect">
+            <a:avLst/>
+          </a:prstGeom>
+          <a:noFill/>
+        </p:spPr>
+        <p:txBody>
+          <a:bodyPr wrap="square">
+            <a:spAutoFit/>
+          </a:bodyPr>
+          <a:lstStyle/>
+          <a:p>
+            <a:pPr algn="l"/>
+            <a:r>
+              <a:rPr sz="3000" b="1">
+                <a:solidFill>
+                  <a:srgbClr val="FFFFFF"/>
+                </a:solidFill>
+                <a:latin typeface="Georgia"/>
+              </a:rPr>
+              <a:t>Sources</a:t>
+            </a:r>
+          </a:p>
+        </p:txBody>
+      </p:sp>
+      <p:sp>
+        <p:nvSpPr>
+          <p:cNvPr id="6" name="TextBox 5"/>
+          <p:cNvSpPr txBox="1"/>
+          <p:nvPr/>
+        </p:nvSpPr>
+        <p:spPr>
+          <a:xfrm>
+            <a:off x="11704320" y="6492240"/>
+            <a:ext cx="365760" cy="274320"/>
+          </a:xfrm>
+          <a:prstGeom prst="rect">
+            <a:avLst/>
+          </a:prstGeom>
+          <a:noFill/>
+        </p:spPr>
+        <p:txBody>
+          <a:bodyPr wrap="square">
+            <a:spAutoFit/>
+          </a:bodyPr>
+          <a:lstStyle/>
+          <a:p>
+            <a:pPr algn="r"/>
+            <a:r>
+              <a:rPr sz="1100" b="0">
+                <a:solidFill>
+                  <a:srgbClr val="53565A"/>
+                </a:solidFill>
+                <a:latin typeface="Calibri"/>
+              </a:rPr>
+              <a:t>17</a:t>
+            </a:r>
+          </a:p>
+        </p:txBody>
+      </p:sp>
+      <p:sp>
+        <p:nvSpPr>
+          <p:cNvPr id="7" name="TextBox 6"/>
+          <p:cNvSpPr txBox="1"/>
+          <p:nvPr/>
+        </p:nvSpPr>
+        <p:spPr>
+          <a:xfrm>
+            <a:off x="411480" y="1325880"/>
+            <a:ext cx="11338560" cy="5303520"/>
+          </a:xfrm>
+          <a:prstGeom prst="rect">
+            <a:avLst/>
+          </a:prstGeom>
+          <a:noFill/>
+        </p:spPr>
+        <p:txBody>
+          <a:bodyPr wrap="square">
+            <a:spAutoFit/>
+          </a:bodyPr>
+          <a:lstStyle/>
+          <a:p>
+            <a:pPr>
+              <a:spcBef>
+                <a:spcPts val="400"/>
+              </a:spcBef>
+            </a:pPr>
+            <a:r>
+              <a:rPr sz="1300" b="0">
+                <a:solidFill>
+                  <a:srgbClr val="1A1A1A"/>
+                </a:solidFill>
+                <a:latin typeface="Calibri"/>
+              </a:rPr>
+              <a:t>1.  Anfinsen, C.B. (1973). Principles that govern the folding of protein chains. Science, 181(4096), 223–230.</a:t>
+            </a:r>
+          </a:p>
+          <a:p>
+            <a:pPr>
+              <a:spcBef>
+                <a:spcPts val="400"/>
+              </a:spcBef>
+            </a:pPr>
+            <a:r>
+              <a:rPr sz="1300" b="0">
+                <a:solidFill>
+                  <a:srgbClr val="1A1A1A"/>
+                </a:solidFill>
+                <a:latin typeface="Calibri"/>
+              </a:rPr>
+              <a:t>2.  Jumper, J. et al. (2021). Highly accurate protein structure prediction with AlphaFold. Nature, 596, 583–589.</a:t>
+            </a:r>
+          </a:p>
+          <a:p>
+            <a:pPr>
+              <a:spcBef>
+                <a:spcPts val="400"/>
+              </a:spcBef>
+            </a:pPr>
+            <a:r>
+              <a:rPr sz="1300" b="0">
+                <a:solidFill>
+                  <a:srgbClr val="1A1A1A"/>
+                </a:solidFill>
+                <a:latin typeface="Calibri"/>
+              </a:rPr>
+              <a:t>3.  Dauparas, J. et al. (2022). Robust deep learning-based protein sequence design using ProteinMPNN. Science, 378(6615), 49–56.</a:t>
+            </a:r>
+          </a:p>
+          <a:p>
+            <a:pPr>
+              <a:spcBef>
+                <a:spcPts val="400"/>
+              </a:spcBef>
+            </a:pPr>
+            <a:r>
+              <a:rPr sz="1300" b="0">
+                <a:solidFill>
+                  <a:srgbClr val="1A1A1A"/>
+                </a:solidFill>
+                <a:latin typeface="Calibri"/>
+              </a:rPr>
+              <a:t>4.  Watson, J.L. et al. (2023). De novo design of protein structure and function with RFdiffusion. Nature, 620, 1089–1100.</a:t>
+            </a:r>
+          </a:p>
+          <a:p>
+            <a:pPr>
+              <a:spcBef>
+                <a:spcPts val="400"/>
+              </a:spcBef>
+            </a:pPr>
+            <a:r>
+              <a:rPr sz="1300" b="0">
+                <a:solidFill>
+                  <a:srgbClr val="1A1A1A"/>
+                </a:solidFill>
+                <a:latin typeface="Calibri"/>
+              </a:rPr>
+              <a:t>5.  Lin, Z. et al. (2023). Evolutionary-scale prediction of atomic-level protein structure with a language model. Science, 379(6637), 1123–1130.</a:t>
+            </a:r>
+          </a:p>
+          <a:p>
+            <a:pPr>
+              <a:spcBef>
+                <a:spcPts val="400"/>
+              </a:spcBef>
+            </a:pPr>
+            <a:r>
+              <a:rPr sz="1300" b="0">
+                <a:solidFill>
+                  <a:srgbClr val="1A1A1A"/>
+                </a:solidFill>
+                <a:latin typeface="Calibri"/>
+              </a:rPr>
+              <a:t>6.  Dauparas, J. et al. (2024). Atomic context-conditioned protein sequence design using LigandMPNN. Nature Methods, 21, 1121–1131.</a:t>
+            </a:r>
+          </a:p>
+          <a:p>
+            <a:pPr>
+              <a:spcBef>
+                <a:spcPts val="400"/>
+              </a:spcBef>
+            </a:pPr>
+            <a:r>
+              <a:rPr sz="1300" b="0">
+                <a:solidFill>
+                  <a:srgbClr val="1A1A1A"/>
+                </a:solidFill>
+                <a:latin typeface="Calibri"/>
+              </a:rPr>
+              <a:t>7.  Cao, L. et al. (2020). De novo design of picomolar SARS-CoV-2 miniprotein inhibitors. Science, 370(6515), 426–431.</a:t>
+            </a:r>
+          </a:p>
+          <a:p>
+            <a:pPr>
+              <a:spcBef>
+                <a:spcPts val="400"/>
+              </a:spcBef>
+            </a:pPr>
+            <a:r>
+              <a:rPr sz="1300" b="0">
+                <a:solidFill>
+                  <a:srgbClr val="1A1A1A"/>
+                </a:solidFill>
+                <a:latin typeface="Calibri"/>
+              </a:rPr>
+              <a:t>8.  Arnold, F.H. (2018). Directed Evolution: Bringing New Chemistry to Life. Nobel Lecture. Angew. Chem. Int. Ed., 58, 14420–14426.</a:t>
+            </a:r>
+          </a:p>
+          <a:p>
+            <a:pPr>
+              <a:spcBef>
+                <a:spcPts val="400"/>
+              </a:spcBef>
+            </a:pPr>
+            <a:r>
+              <a:rPr sz="1300" b="0">
+                <a:solidFill>
+                  <a:srgbClr val="1A1A1A"/>
+                </a:solidFill>
+                <a:latin typeface="Calibri"/>
+              </a:rPr>
+              <a:t>9.  Jiang, L. et al. (2008). De novo computational design of retro-aldol enzymes. Science, 319(5868), 1387–1391.</a:t>
+            </a:r>
+          </a:p>
+          <a:p>
+            <a:pPr>
+              <a:spcBef>
+                <a:spcPts val="400"/>
+              </a:spcBef>
+            </a:pPr>
+            <a:r>
+              <a:rPr sz="1300" b="0">
+                <a:solidFill>
+                  <a:srgbClr val="1A1A1A"/>
+                </a:solidFill>
+                <a:latin typeface="Calibri"/>
+              </a:rPr>
+              <a:t>10. Röthlisberger, D. et al. (2008). Kemp elimination catalysts by computational enzyme design. Nature, 453, 190–195.</a:t>
             </a:r>
           </a:p>
         </p:txBody>
@@ -3363,7 +6573,7 @@
             <a:avLst/>
           </a:prstGeom>
           <a:solidFill>
-            <a:srgbClr val="1A375E"/>
+            <a:srgbClr val="041E42"/>
           </a:solidFill>
           <a:ln>
             <a:noFill/>
@@ -3399,14 +6609,14 @@
         </p:nvSpPr>
         <p:spPr>
           <a:xfrm>
-            <a:off x="0" y="0"/>
-            <a:ext cx="164592" cy="6858000"/>
+            <a:off x="0" y="6629400"/>
+            <a:ext cx="12188952" cy="228600"/>
           </a:xfrm>
           <a:prstGeom prst="rect">
             <a:avLst/>
           </a:prstGeom>
           <a:solidFill>
-            <a:srgbClr val="00B0A0"/>
+            <a:srgbClr val="C8A951"/>
           </a:solidFill>
           <a:ln>
             <a:noFill/>
@@ -3436,44 +6646,36 @@
       </p:sp>
       <p:sp>
         <p:nvSpPr>
-          <p:cNvPr id="4" name="Rectangle 3"/>
-          <p:cNvSpPr/>
+          <p:cNvPr id="4" name="TextBox 3"/>
+          <p:cNvSpPr txBox="1"/>
           <p:nvPr/>
         </p:nvSpPr>
         <p:spPr>
           <a:xfrm>
-            <a:off x="164592" y="0"/>
-            <a:ext cx="12024360" cy="1188720"/>
-          </a:xfrm>
-          <a:prstGeom prst="rect">
-            <a:avLst/>
-          </a:prstGeom>
-          <a:solidFill>
-            <a:srgbClr val="1A375E"/>
-          </a:solidFill>
-          <a:ln>
-            <a:noFill/>
-          </a:ln>
-        </p:spPr>
-        <p:style>
-          <a:lnRef idx="1">
-            <a:schemeClr val="accent1"/>
-          </a:lnRef>
-          <a:fillRef idx="3">
-            <a:schemeClr val="accent1"/>
-          </a:fillRef>
-          <a:effectRef idx="2">
-            <a:schemeClr val="accent1"/>
-          </a:effectRef>
-          <a:fontRef idx="minor">
-            <a:schemeClr val="lt1"/>
-          </a:fontRef>
-        </p:style>
-        <p:txBody>
-          <a:bodyPr rtlCol="0" anchor="ctr"/>
-          <a:lstStyle/>
-          <a:p>
-            <a:pPr algn="ctr"/>
+            <a:off x="320040" y="137160"/>
+            <a:ext cx="11430000" cy="914400"/>
+          </a:xfrm>
+          <a:prstGeom prst="rect">
+            <a:avLst/>
+          </a:prstGeom>
+          <a:noFill/>
+        </p:spPr>
+        <p:txBody>
+          <a:bodyPr wrap="square">
+            <a:spAutoFit/>
+          </a:bodyPr>
+          <a:lstStyle/>
+          <a:p>
+            <a:pPr algn="l"/>
+            <a:r>
+              <a:rPr sz="3000" b="1">
+                <a:solidFill>
+                  <a:srgbClr val="FFFFFF"/>
+                </a:solidFill>
+                <a:latin typeface="Georgia"/>
+              </a:rPr>
+              <a:t>Agenda</a:t>
+            </a:r>
           </a:p>
         </p:txBody>
       </p:sp>
@@ -3485,8 +6687,8 @@
         </p:nvSpPr>
         <p:spPr>
           <a:xfrm>
-            <a:off x="365760" y="137160"/>
-            <a:ext cx="11430000" cy="914400"/>
+            <a:off x="11704320" y="6492240"/>
+            <a:ext cx="365760" cy="274320"/>
           </a:xfrm>
           <a:prstGeom prst="rect">
             <a:avLst/>
@@ -3499,15 +6701,15 @@
           </a:bodyPr>
           <a:lstStyle/>
           <a:p>
-            <a:pPr algn="l"/>
-            <a:r>
-              <a:rPr sz="3200" b="1">
-                <a:solidFill>
-                  <a:srgbClr val="FFFFFF"/>
-                </a:solidFill>
-                <a:latin typeface="Calibri"/>
-              </a:rPr>
-              <a:t>Outline</a:t>
+            <a:pPr algn="r"/>
+            <a:r>
+              <a:rPr sz="1100" b="0">
+                <a:solidFill>
+                  <a:srgbClr val="53565A"/>
+                </a:solidFill>
+                <a:latin typeface="Calibri"/>
+              </a:rPr>
+              <a:t>2</a:t>
             </a:r>
           </a:p>
         </p:txBody>
@@ -3520,8 +6722,8 @@
         </p:nvSpPr>
         <p:spPr>
           <a:xfrm>
-            <a:off x="502920" y="1417320"/>
-            <a:ext cx="11247120" cy="5120640"/>
+            <a:off x="411480" y="1325880"/>
+            <a:ext cx="11338560" cy="5166360"/>
           </a:xfrm>
           <a:prstGeom prst="rect">
             <a:avLst/>
@@ -3536,97 +6738,241 @@
           <a:p>
             <a:pPr>
               <a:spcBef>
-                <a:spcPts val="400"/>
-              </a:spcBef>
-            </a:pPr>
-            <a:r>
-              <a:rPr sz="2000" b="1">
+                <a:spcPts val="500"/>
+              </a:spcBef>
+            </a:pPr>
+            <a:r>
+              <a:rPr sz="1900" b="1">
                 <a:solidFill>
                   <a:srgbClr val="FFFFFF"/>
                 </a:solidFill>
                 <a:latin typeface="Calibri"/>
               </a:rPr>
-              <a:t>▸ What is Protein Design?</a:t>
+              <a:t>▸  What is Protein Design?</a:t>
             </a:r>
           </a:p>
           <a:p>
             <a:pPr>
               <a:spcBef>
-                <a:spcPts val="400"/>
-              </a:spcBef>
-            </a:pPr>
-            <a:r>
-              <a:rPr sz="2000" b="1">
+                <a:spcPts val="500"/>
+              </a:spcBef>
+            </a:pPr>
+            <a:r>
+              <a:rPr sz="1900" b="1">
                 <a:solidFill>
                   <a:srgbClr val="FFFFFF"/>
                 </a:solidFill>
                 <a:latin typeface="Calibri"/>
               </a:rPr>
-              <a:t>▸ Key Approaches</a:t>
+              <a:t>▸  The Protein Folding Problem</a:t>
             </a:r>
           </a:p>
           <a:p>
             <a:pPr>
               <a:spcBef>
-                <a:spcPts val="400"/>
-              </a:spcBef>
-            </a:pPr>
-            <a:r>
-              <a:rPr sz="2000" b="1">
+                <a:spcPts val="500"/>
+              </a:spcBef>
+            </a:pPr>
+            <a:r>
+              <a:rPr sz="1900" b="1">
                 <a:solidFill>
                   <a:srgbClr val="FFFFFF"/>
                 </a:solidFill>
                 <a:latin typeface="Calibri"/>
               </a:rPr>
-              <a:t>▸ Computational Tools</a:t>
+              <a:t>▸  Key Approaches — Overview</a:t>
             </a:r>
           </a:p>
           <a:p>
             <a:pPr>
               <a:spcBef>
-                <a:spcPts val="400"/>
-              </a:spcBef>
-            </a:pPr>
-            <a:r>
-              <a:rPr sz="2000" b="1">
+                <a:spcPts val="500"/>
+              </a:spcBef>
+            </a:pPr>
+            <a:r>
+              <a:rPr sz="1900" b="1">
                 <a:solidFill>
                   <a:srgbClr val="FFFFFF"/>
                 </a:solidFill>
                 <a:latin typeface="Calibri"/>
               </a:rPr>
-              <a:t>▸ Deep-Learning Methods</a:t>
+              <a:t>▸  Physics-Based Energy Minimisation</a:t>
             </a:r>
           </a:p>
           <a:p>
             <a:pPr>
               <a:spcBef>
-                <a:spcPts val="400"/>
-              </a:spcBef>
-            </a:pPr>
-            <a:r>
-              <a:rPr sz="2000" b="1">
+                <a:spcPts val="500"/>
+              </a:spcBef>
+            </a:pPr>
+            <a:r>
+              <a:rPr sz="1900" b="1">
                 <a:solidFill>
                   <a:srgbClr val="FFFFFF"/>
                 </a:solidFill>
                 <a:latin typeface="Calibri"/>
               </a:rPr>
-              <a:t>▸ Applications</a:t>
+              <a:t>▸  Fragment-Based Assembly &amp; Directed Evolution</a:t>
             </a:r>
           </a:p>
           <a:p>
             <a:pPr>
               <a:spcBef>
-                <a:spcPts val="400"/>
-              </a:spcBef>
-            </a:pPr>
-            <a:r>
-              <a:rPr sz="2000" b="1">
+                <a:spcPts val="500"/>
+              </a:spcBef>
+            </a:pPr>
+            <a:r>
+              <a:rPr sz="1900" b="1">
                 <a:solidFill>
                   <a:srgbClr val="FFFFFF"/>
                 </a:solidFill>
                 <a:latin typeface="Calibri"/>
               </a:rPr>
-              <a:t>▸ Challenges &amp; Future Directions</a:t>
+              <a:t>▸  Computational Tools</a:t>
+            </a:r>
+          </a:p>
+          <a:p>
+            <a:pPr>
+              <a:spcBef>
+                <a:spcPts val="500"/>
+              </a:spcBef>
+            </a:pPr>
+            <a:r>
+              <a:rPr sz="1900" b="1">
+                <a:solidFill>
+                  <a:srgbClr val="FFFFFF"/>
+                </a:solidFill>
+                <a:latin typeface="Calibri"/>
+              </a:rPr>
+              <a:t>▸  Deep-Learning Methods Overview</a:t>
+            </a:r>
+          </a:p>
+          <a:p>
+            <a:pPr>
+              <a:spcBef>
+                <a:spcPts val="500"/>
+              </a:spcBef>
+            </a:pPr>
+            <a:r>
+              <a:rPr sz="1900" b="1">
+                <a:solidFill>
+                  <a:srgbClr val="FFFFFF"/>
+                </a:solidFill>
+                <a:latin typeface="Calibri"/>
+              </a:rPr>
+              <a:t>▸  ProteinMPNN &amp; RFdiffusion</a:t>
+            </a:r>
+          </a:p>
+          <a:p>
+            <a:pPr>
+              <a:spcBef>
+                <a:spcPts val="500"/>
+              </a:spcBef>
+            </a:pPr>
+            <a:r>
+              <a:rPr sz="1900" b="1">
+                <a:solidFill>
+                  <a:srgbClr val="FFFFFF"/>
+                </a:solidFill>
+                <a:latin typeface="Calibri"/>
+              </a:rPr>
+              <a:t>▸  AlphaFold2, ESMFold &amp; LigandMPNN</a:t>
+            </a:r>
+          </a:p>
+          <a:p>
+            <a:pPr>
+              <a:spcBef>
+                <a:spcPts val="500"/>
+              </a:spcBef>
+            </a:pPr>
+            <a:r>
+              <a:rPr sz="1900" b="1">
+                <a:solidFill>
+                  <a:srgbClr val="FFFFFF"/>
+                </a:solidFill>
+                <a:latin typeface="Calibri"/>
+              </a:rPr>
+              <a:t>▸  Applications — Therapeutics</a:t>
+            </a:r>
+          </a:p>
+          <a:p>
+            <a:pPr>
+              <a:spcBef>
+                <a:spcPts val="500"/>
+              </a:spcBef>
+            </a:pPr>
+            <a:r>
+              <a:rPr sz="1900" b="1">
+                <a:solidFill>
+                  <a:srgbClr val="FFFFFF"/>
+                </a:solidFill>
+                <a:latin typeface="Calibri"/>
+              </a:rPr>
+              <a:t>▸  Applications — Enzymes &amp; Biocatalysis</a:t>
+            </a:r>
+          </a:p>
+          <a:p>
+            <a:pPr>
+              <a:spcBef>
+                <a:spcPts val="500"/>
+              </a:spcBef>
+            </a:pPr>
+            <a:r>
+              <a:rPr sz="1900" b="1">
+                <a:solidFill>
+                  <a:srgbClr val="FFFFFF"/>
+                </a:solidFill>
+                <a:latin typeface="Calibri"/>
+              </a:rPr>
+              <a:t>▸  Applications — Biosensors, Biomaterials &amp; Synbio</a:t>
+            </a:r>
+          </a:p>
+          <a:p>
+            <a:pPr>
+              <a:spcBef>
+                <a:spcPts val="500"/>
+              </a:spcBef>
+            </a:pPr>
+            <a:r>
+              <a:rPr sz="1900" b="1">
+                <a:solidFill>
+                  <a:srgbClr val="FFFFFF"/>
+                </a:solidFill>
+                <a:latin typeface="Calibri"/>
+              </a:rPr>
+              <a:t>▸  Challenges</a:t>
+            </a:r>
+          </a:p>
+          <a:p>
+            <a:pPr>
+              <a:spcBef>
+                <a:spcPts val="500"/>
+              </a:spcBef>
+            </a:pPr>
+            <a:r>
+              <a:rPr sz="1900" b="1">
+                <a:solidFill>
+                  <a:srgbClr val="FFFFFF"/>
+                </a:solidFill>
+                <a:latin typeface="Calibri"/>
+              </a:rPr>
+              <a:t>▸  Future Directions</a:t>
+            </a:r>
+          </a:p>
+          <a:p>
+            <a:pPr>
+              <a:spcBef>
+                <a:spcPts val="500"/>
+              </a:spcBef>
+            </a:pPr>
+            <a:r>
+              <a:rPr sz="1900" b="1">
+                <a:solidFill>
+                  <a:srgbClr val="FFFFFF"/>
+                </a:solidFill>
+                <a:latin typeface="Calibri"/>
+              </a:rPr>
+              <a:t>▸  Sources</a:t>
             </a:r>
           </a:p>
         </p:txBody>
@@ -3664,7 +7010,7 @@
             <a:avLst/>
           </a:prstGeom>
           <a:solidFill>
-            <a:srgbClr val="F4F6F9"/>
+            <a:srgbClr val="F2F2F2"/>
           </a:solidFill>
           <a:ln>
             <a:noFill/>
@@ -3701,13 +7047,13 @@
         <p:spPr>
           <a:xfrm>
             <a:off x="0" y="0"/>
-            <a:ext cx="164592" cy="6858000"/>
+            <a:ext cx="12188952" cy="1143000"/>
           </a:xfrm>
           <a:prstGeom prst="rect">
             <a:avLst/>
           </a:prstGeom>
           <a:solidFill>
-            <a:srgbClr val="00B0A0"/>
+            <a:srgbClr val="041E42"/>
           </a:solidFill>
           <a:ln>
             <a:noFill/>
@@ -3743,14 +7089,14 @@
         </p:nvSpPr>
         <p:spPr>
           <a:xfrm>
-            <a:off x="164592" y="0"/>
-            <a:ext cx="12024360" cy="1188720"/>
+            <a:off x="0" y="6629400"/>
+            <a:ext cx="12188952" cy="228600"/>
           </a:xfrm>
           <a:prstGeom prst="rect">
             <a:avLst/>
           </a:prstGeom>
           <a:solidFill>
-            <a:srgbClr val="1A375E"/>
+            <a:srgbClr val="C8A951"/>
           </a:solidFill>
           <a:ln>
             <a:noFill/>
@@ -3786,7 +7132,7 @@
         </p:nvSpPr>
         <p:spPr>
           <a:xfrm>
-            <a:off x="365760" y="137160"/>
+            <a:off x="320040" y="137160"/>
             <a:ext cx="11430000" cy="914400"/>
           </a:xfrm>
           <a:prstGeom prst="rect">
@@ -3802,11 +7148,11 @@
           <a:p>
             <a:pPr algn="l"/>
             <a:r>
-              <a:rPr sz="3200" b="1">
+              <a:rPr sz="3000" b="1">
                 <a:solidFill>
                   <a:srgbClr val="FFFFFF"/>
                 </a:solidFill>
-                <a:latin typeface="Calibri"/>
+                <a:latin typeface="Georgia"/>
               </a:rPr>
               <a:t>What is Protein Design?</a:t>
             </a:r>
@@ -3821,8 +7167,8 @@
         </p:nvSpPr>
         <p:spPr>
           <a:xfrm>
-            <a:off x="502920" y="1417320"/>
-            <a:ext cx="11247120" cy="5120640"/>
+            <a:off x="11704320" y="6492240"/>
+            <a:ext cx="365760" cy="274320"/>
           </a:xfrm>
           <a:prstGeom prst="rect">
             <a:avLst/>
@@ -3835,147 +7181,182 @@
           </a:bodyPr>
           <a:lstStyle/>
           <a:p>
+            <a:pPr algn="r"/>
+            <a:r>
+              <a:rPr sz="1100" b="0">
+                <a:solidFill>
+                  <a:srgbClr val="53565A"/>
+                </a:solidFill>
+                <a:latin typeface="Calibri"/>
+              </a:rPr>
+              <a:t>3</a:t>
+            </a:r>
+          </a:p>
+        </p:txBody>
+      </p:sp>
+      <p:sp>
+        <p:nvSpPr>
+          <p:cNvPr id="7" name="TextBox 6"/>
+          <p:cNvSpPr txBox="1"/>
+          <p:nvPr/>
+        </p:nvSpPr>
+        <p:spPr>
+          <a:xfrm>
+            <a:off x="411480" y="1325880"/>
+            <a:ext cx="11338560" cy="5166360"/>
+          </a:xfrm>
+          <a:prstGeom prst="rect">
+            <a:avLst/>
+          </a:prstGeom>
+          <a:noFill/>
+        </p:spPr>
+        <p:txBody>
+          <a:bodyPr wrap="square">
+            <a:spAutoFit/>
+          </a:bodyPr>
+          <a:lstStyle/>
+          <a:p>
             <a:pPr>
               <a:spcBef>
-                <a:spcPts val="400"/>
-              </a:spcBef>
-            </a:pPr>
-            <a:r>
-              <a:rPr sz="2000" b="1">
-                <a:solidFill>
-                  <a:srgbClr val="333333"/>
-                </a:solidFill>
-                <a:latin typeface="Calibri"/>
-              </a:rPr>
-              <a:t>▸ Goal: engineer proteins with desired structure, stability, or activity</a:t>
+                <a:spcPts val="500"/>
+              </a:spcBef>
+            </a:pPr>
+            <a:r>
+              <a:rPr sz="1900" b="1">
+                <a:solidFill>
+                  <a:srgbClr val="1A1A1A"/>
+                </a:solidFill>
+                <a:latin typeface="Georgia"/>
+              </a:rPr>
+              <a:t>▸  Goal: engineer proteins with a desired structure, stability, or activity</a:t>
             </a:r>
           </a:p>
           <a:p>
             <a:pPr lvl="1">
               <a:spcBef>
-                <a:spcPts val="400"/>
-              </a:spcBef>
-            </a:pPr>
-            <a:r>
-              <a:rPr sz="1700" b="0">
-                <a:solidFill>
-                  <a:srgbClr val="333333"/>
-                </a:solidFill>
-                <a:latin typeface="Calibri"/>
-              </a:rPr>
-              <a:t>    ◦ Inverse of the protein-folding problem</a:t>
+                <a:spcPts val="300"/>
+              </a:spcBef>
+            </a:pPr>
+            <a:r>
+              <a:rPr sz="1600" b="0">
+                <a:solidFill>
+                  <a:srgbClr val="1A1A1A"/>
+                </a:solidFill>
+                <a:latin typeface="Calibri"/>
+              </a:rPr>
+              <a:t>       ◦  Inverse of the protein-folding problem</a:t>
             </a:r>
           </a:p>
           <a:p>
             <a:pPr lvl="1">
               <a:spcBef>
-                <a:spcPts val="400"/>
-              </a:spcBef>
-            </a:pPr>
-            <a:r>
-              <a:rPr sz="1700" b="0">
-                <a:solidFill>
-                  <a:srgbClr val="333333"/>
-                </a:solidFill>
-                <a:latin typeface="Calibri"/>
-              </a:rPr>
-              <a:t>    ◦ Find a sequence that folds into a target 3-D shape</a:t>
+                <a:spcPts val="300"/>
+              </a:spcBef>
+            </a:pPr>
+            <a:r>
+              <a:rPr sz="1600" b="0">
+                <a:solidFill>
+                  <a:srgbClr val="1A1A1A"/>
+                </a:solidFill>
+                <a:latin typeface="Calibri"/>
+              </a:rPr>
+              <a:t>       ◦  Find a sequence that folds reliably into a target 3-D shape</a:t>
             </a:r>
           </a:p>
           <a:p>
             <a:pPr>
               <a:spcBef>
-                <a:spcPts val="400"/>
-              </a:spcBef>
-            </a:pPr>
-            <a:r>
-              <a:rPr sz="2000" b="1">
-                <a:solidFill>
-                  <a:srgbClr val="333333"/>
-                </a:solidFill>
-                <a:latin typeface="Calibri"/>
-              </a:rPr>
-              <a:t>▸ Two broad paradigms</a:t>
+                <a:spcPts val="500"/>
+              </a:spcBef>
+            </a:pPr>
+            <a:r>
+              <a:rPr sz="1900" b="1">
+                <a:solidFill>
+                  <a:srgbClr val="1A1A1A"/>
+                </a:solidFill>
+                <a:latin typeface="Georgia"/>
+              </a:rPr>
+              <a:t>▸  Two broad paradigms</a:t>
             </a:r>
           </a:p>
           <a:p>
             <a:pPr lvl="1">
               <a:spcBef>
-                <a:spcPts val="400"/>
-              </a:spcBef>
-            </a:pPr>
-            <a:r>
-              <a:rPr sz="1700" b="0">
-                <a:solidFill>
-                  <a:srgbClr val="333333"/>
-                </a:solidFill>
-                <a:latin typeface="Calibri"/>
-              </a:rPr>
-              <a:t>    ◦ De novo design  –  create entirely new folds not found in nature</a:t>
+                <a:spcPts val="300"/>
+              </a:spcBef>
+            </a:pPr>
+            <a:r>
+              <a:rPr sz="1600" b="0">
+                <a:solidFill>
+                  <a:srgbClr val="1A1A1A"/>
+                </a:solidFill>
+                <a:latin typeface="Calibri"/>
+              </a:rPr>
+              <a:t>       ◦  De novo design — create entirely new folds not found in nature</a:t>
             </a:r>
           </a:p>
           <a:p>
             <a:pPr lvl="1">
               <a:spcBef>
-                <a:spcPts val="400"/>
-              </a:spcBef>
-            </a:pPr>
-            <a:r>
-              <a:rPr sz="1700" b="0">
-                <a:solidFill>
-                  <a:srgbClr val="333333"/>
-                </a:solidFill>
-                <a:latin typeface="Calibri"/>
-              </a:rPr>
-              <a:t>    ◦ Redesign  –  modify existing proteins to alter function or stability</a:t>
+                <a:spcPts val="300"/>
+              </a:spcBef>
+            </a:pPr>
+            <a:r>
+              <a:rPr sz="1600" b="0">
+                <a:solidFill>
+                  <a:srgbClr val="1A1A1A"/>
+                </a:solidFill>
+                <a:latin typeface="Calibri"/>
+              </a:rPr>
+              <a:t>       ◦  Redesign — modify existing proteins to alter function or stability</a:t>
             </a:r>
           </a:p>
           <a:p>
             <a:pPr>
               <a:spcBef>
-                <a:spcPts val="400"/>
-              </a:spcBef>
-            </a:pPr>
-            <a:r>
-              <a:rPr sz="2000" b="1">
-                <a:solidFill>
-                  <a:srgbClr val="333333"/>
-                </a:solidFill>
-                <a:latin typeface="Calibri"/>
-              </a:rPr>
-              <a:t>▸ Why it matters</a:t>
+                <a:spcPts val="500"/>
+              </a:spcBef>
+            </a:pPr>
+            <a:r>
+              <a:rPr sz="1900" b="1">
+                <a:solidFill>
+                  <a:srgbClr val="1A1A1A"/>
+                </a:solidFill>
+                <a:latin typeface="Georgia"/>
+              </a:rPr>
+              <a:t>▸  Why it matters</a:t>
             </a:r>
           </a:p>
           <a:p>
             <a:pPr lvl="1">
               <a:spcBef>
-                <a:spcPts val="400"/>
-              </a:spcBef>
-            </a:pPr>
-            <a:r>
-              <a:rPr sz="1700" b="0">
-                <a:solidFill>
-                  <a:srgbClr val="333333"/>
-                </a:solidFill>
-                <a:latin typeface="Calibri"/>
-              </a:rPr>
-              <a:t>    ◦ Therapeutic proteins, enzymes, biosensors, biomaterials</a:t>
+                <a:spcPts val="300"/>
+              </a:spcBef>
+            </a:pPr>
+            <a:r>
+              <a:rPr sz="1600" b="0">
+                <a:solidFill>
+                  <a:srgbClr val="1A1A1A"/>
+                </a:solidFill>
+                <a:latin typeface="Calibri"/>
+              </a:rPr>
+              <a:t>       ◦  Therapeutic proteins, industrial enzymes, biosensors, biomaterials</a:t>
             </a:r>
           </a:p>
           <a:p>
             <a:pPr lvl="1">
               <a:spcBef>
-                <a:spcPts val="400"/>
-              </a:spcBef>
-            </a:pPr>
-            <a:r>
-              <a:rPr sz="1700" b="0">
-                <a:solidFill>
-                  <a:srgbClr val="333333"/>
-                </a:solidFill>
-                <a:latin typeface="Calibri"/>
-              </a:rPr>
-              <a:t>    ◦ Accelerates drug discovery and synthetic biology</a:t>
+                <a:spcPts val="300"/>
+              </a:spcBef>
+            </a:pPr>
+            <a:r>
+              <a:rPr sz="1600" b="0">
+                <a:solidFill>
+                  <a:srgbClr val="1A1A1A"/>
+                </a:solidFill>
+                <a:latin typeface="Calibri"/>
+              </a:rPr>
+              <a:t>       ◦  Accelerates drug discovery and synthetic biology pipelines</a:t>
             </a:r>
           </a:p>
         </p:txBody>
@@ -4013,7 +7394,7 @@
             <a:avLst/>
           </a:prstGeom>
           <a:solidFill>
-            <a:srgbClr val="F4F6F9"/>
+            <a:srgbClr val="F2F2F2"/>
           </a:solidFill>
           <a:ln>
             <a:noFill/>
@@ -4050,13 +7431,13 @@
         <p:spPr>
           <a:xfrm>
             <a:off x="0" y="0"/>
-            <a:ext cx="164592" cy="6858000"/>
+            <a:ext cx="12188952" cy="1143000"/>
           </a:xfrm>
           <a:prstGeom prst="rect">
             <a:avLst/>
           </a:prstGeom>
           <a:solidFill>
-            <a:srgbClr val="00B0A0"/>
+            <a:srgbClr val="041E42"/>
           </a:solidFill>
           <a:ln>
             <a:noFill/>
@@ -4092,14 +7473,14 @@
         </p:nvSpPr>
         <p:spPr>
           <a:xfrm>
-            <a:off x="164592" y="0"/>
-            <a:ext cx="12024360" cy="1188720"/>
+            <a:off x="0" y="6629400"/>
+            <a:ext cx="12188952" cy="228600"/>
           </a:xfrm>
           <a:prstGeom prst="rect">
             <a:avLst/>
           </a:prstGeom>
           <a:solidFill>
-            <a:srgbClr val="1A375E"/>
+            <a:srgbClr val="C8A951"/>
           </a:solidFill>
           <a:ln>
             <a:noFill/>
@@ -4135,7 +7516,7 @@
         </p:nvSpPr>
         <p:spPr>
           <a:xfrm>
-            <a:off x="365760" y="137160"/>
+            <a:off x="320040" y="137160"/>
             <a:ext cx="11430000" cy="914400"/>
           </a:xfrm>
           <a:prstGeom prst="rect">
@@ -4151,13 +7532,13 @@
           <a:p>
             <a:pPr algn="l"/>
             <a:r>
-              <a:rPr sz="3200" b="1">
+              <a:rPr sz="3000" b="1">
                 <a:solidFill>
                   <a:srgbClr val="FFFFFF"/>
                 </a:solidFill>
-                <a:latin typeface="Calibri"/>
-              </a:rPr>
-              <a:t>Key Approaches</a:t>
+                <a:latin typeface="Georgia"/>
+              </a:rPr>
+              <a:t>The Protein Folding Problem</a:t>
             </a:r>
           </a:p>
         </p:txBody>
@@ -4170,8 +7551,8 @@
         </p:nvSpPr>
         <p:spPr>
           <a:xfrm>
-            <a:off x="502920" y="1417320"/>
-            <a:ext cx="11247120" cy="5120640"/>
+            <a:off x="11704320" y="6492240"/>
+            <a:ext cx="365760" cy="274320"/>
           </a:xfrm>
           <a:prstGeom prst="rect">
             <a:avLst/>
@@ -4184,131 +7565,166 @@
           </a:bodyPr>
           <a:lstStyle/>
           <a:p>
+            <a:pPr algn="r"/>
+            <a:r>
+              <a:rPr sz="1100" b="0">
+                <a:solidFill>
+                  <a:srgbClr val="53565A"/>
+                </a:solidFill>
+                <a:latin typeface="Calibri"/>
+              </a:rPr>
+              <a:t>4</a:t>
+            </a:r>
+          </a:p>
+        </p:txBody>
+      </p:sp>
+      <p:sp>
+        <p:nvSpPr>
+          <p:cNvPr id="7" name="TextBox 6"/>
+          <p:cNvSpPr txBox="1"/>
+          <p:nvPr/>
+        </p:nvSpPr>
+        <p:spPr>
+          <a:xfrm>
+            <a:off x="411480" y="1325880"/>
+            <a:ext cx="11338560" cy="5166360"/>
+          </a:xfrm>
+          <a:prstGeom prst="rect">
+            <a:avLst/>
+          </a:prstGeom>
+          <a:noFill/>
+        </p:spPr>
+        <p:txBody>
+          <a:bodyPr wrap="square">
+            <a:spAutoFit/>
+          </a:bodyPr>
+          <a:lstStyle/>
+          <a:p>
             <a:pPr>
               <a:spcBef>
-                <a:spcPts val="400"/>
-              </a:spcBef>
-            </a:pPr>
-            <a:r>
-              <a:rPr sz="2000" b="1">
-                <a:solidFill>
-                  <a:srgbClr val="333333"/>
-                </a:solidFill>
-                <a:latin typeface="Calibri"/>
-              </a:rPr>
-              <a:t>▸ Physics-based energy minimisation</a:t>
+                <a:spcPts val="500"/>
+              </a:spcBef>
+            </a:pPr>
+            <a:r>
+              <a:rPr sz="1900" b="1">
+                <a:solidFill>
+                  <a:srgbClr val="1A1A1A"/>
+                </a:solidFill>
+                <a:latin typeface="Georgia"/>
+              </a:rPr>
+              <a:t>▸  Anfinsen's dogma (1973): sequence determines structure</a:t>
             </a:r>
           </a:p>
           <a:p>
             <a:pPr lvl="1">
               <a:spcBef>
-                <a:spcPts val="400"/>
-              </a:spcBef>
-            </a:pPr>
-            <a:r>
-              <a:rPr sz="1700" b="0">
-                <a:solidFill>
-                  <a:srgbClr val="333333"/>
-                </a:solidFill>
-                <a:latin typeface="Calibri"/>
-              </a:rPr>
-              <a:t>    ◦ Rosetta, FoldX  –  model van-der-Waals, H-bonds, electrostatics</a:t>
+                <a:spcPts val="300"/>
+              </a:spcBef>
+            </a:pPr>
+            <a:r>
+              <a:rPr sz="1600" b="0">
+                <a:solidFill>
+                  <a:srgbClr val="1A1A1A"/>
+                </a:solidFill>
+                <a:latin typeface="Calibri"/>
+              </a:rPr>
+              <a:t>       ◦  Nobel Prize in Chemistry 1972 for establishing this principle</a:t>
             </a:r>
           </a:p>
           <a:p>
             <a:pPr>
               <a:spcBef>
-                <a:spcPts val="400"/>
-              </a:spcBef>
-            </a:pPr>
-            <a:r>
-              <a:rPr sz="2000" b="1">
-                <a:solidFill>
-                  <a:srgbClr val="333333"/>
-                </a:solidFill>
-                <a:latin typeface="Calibri"/>
-              </a:rPr>
-              <a:t>▸ Fragment-based assembly</a:t>
+                <a:spcPts val="500"/>
+              </a:spcBef>
+            </a:pPr>
+            <a:r>
+              <a:rPr sz="1900" b="1">
+                <a:solidFill>
+                  <a:srgbClr val="1A1A1A"/>
+                </a:solidFill>
+                <a:latin typeface="Georgia"/>
+              </a:rPr>
+              <a:t>▸  Levinthal's paradox: random search of conformational space is impossible</a:t>
             </a:r>
           </a:p>
           <a:p>
             <a:pPr lvl="1">
               <a:spcBef>
-                <a:spcPts val="400"/>
-              </a:spcBef>
-            </a:pPr>
-            <a:r>
-              <a:rPr sz="1700" b="0">
-                <a:solidFill>
-                  <a:srgbClr val="333333"/>
-                </a:solidFill>
-                <a:latin typeface="Calibri"/>
-              </a:rPr>
-              <a:t>    ◦ Combine structural fragments from the PDB to build new backbones</a:t>
+                <a:spcPts val="300"/>
+              </a:spcBef>
+            </a:pPr>
+            <a:r>
+              <a:rPr sz="1600" b="0">
+                <a:solidFill>
+                  <a:srgbClr val="1A1A1A"/>
+                </a:solidFill>
+                <a:latin typeface="Calibri"/>
+              </a:rPr>
+              <a:t>       ◦  A 100-aa protein would take longer than the age of the universe to fold randomly</a:t>
+            </a:r>
+          </a:p>
+          <a:p>
+            <a:pPr lvl="1">
+              <a:spcBef>
+                <a:spcPts val="300"/>
+              </a:spcBef>
+            </a:pPr>
+            <a:r>
+              <a:rPr sz="1600" b="0">
+                <a:solidFill>
+                  <a:srgbClr val="1A1A1A"/>
+                </a:solidFill>
+                <a:latin typeface="Calibri"/>
+              </a:rPr>
+              <a:t>       ◦  Proteins must follow guided folding pathways</a:t>
             </a:r>
           </a:p>
           <a:p>
             <a:pPr>
               <a:spcBef>
-                <a:spcPts val="400"/>
-              </a:spcBef>
-            </a:pPr>
-            <a:r>
-              <a:rPr sz="2000" b="1">
-                <a:solidFill>
-                  <a:srgbClr val="333333"/>
-                </a:solidFill>
-                <a:latin typeface="Calibri"/>
-              </a:rPr>
-              <a:t>▸ Directed evolution (in-lab)</a:t>
+                <a:spcPts val="500"/>
+              </a:spcBef>
+            </a:pPr>
+            <a:r>
+              <a:rPr sz="1900" b="1">
+                <a:solidFill>
+                  <a:srgbClr val="1A1A1A"/>
+                </a:solidFill>
+                <a:latin typeface="Georgia"/>
+              </a:rPr>
+              <a:t>▸  Structure → Function relationship</a:t>
             </a:r>
           </a:p>
           <a:p>
             <a:pPr lvl="1">
               <a:spcBef>
-                <a:spcPts val="400"/>
-              </a:spcBef>
-            </a:pPr>
-            <a:r>
-              <a:rPr sz="1700" b="0">
-                <a:solidFill>
-                  <a:srgbClr val="333333"/>
-                </a:solidFill>
-                <a:latin typeface="Calibri"/>
-              </a:rPr>
-              <a:t>    ◦ Iterative mutagenesis + selection to improve function</a:t>
+                <a:spcPts val="300"/>
+              </a:spcBef>
+            </a:pPr>
+            <a:r>
+              <a:rPr sz="1600" b="0">
+                <a:solidFill>
+                  <a:srgbClr val="1A1A1A"/>
+                </a:solidFill>
+                <a:latin typeface="Calibri"/>
+              </a:rPr>
+              <a:t>       ◦  α-helices, β-sheets, and loops create binding pockets, active sites</a:t>
             </a:r>
           </a:p>
           <a:p>
             <a:pPr>
               <a:spcBef>
-                <a:spcPts val="400"/>
-              </a:spcBef>
-            </a:pPr>
-            <a:r>
-              <a:rPr sz="2000" b="1">
-                <a:solidFill>
-                  <a:srgbClr val="333333"/>
-                </a:solidFill>
-                <a:latin typeface="Calibri"/>
-              </a:rPr>
-              <a:t>▸ Machine-learning sequence design</a:t>
-            </a:r>
-          </a:p>
-          <a:p>
-            <a:pPr lvl="1">
-              <a:spcBef>
-                <a:spcPts val="400"/>
-              </a:spcBef>
-            </a:pPr>
-            <a:r>
-              <a:rPr sz="1700" b="0">
-                <a:solidFill>
-                  <a:srgbClr val="333333"/>
-                </a:solidFill>
-                <a:latin typeface="Calibri"/>
-              </a:rPr>
-              <a:t>    ◦ Train on known structure–sequence pairs; sample new sequences</a:t>
+                <a:spcPts val="500"/>
+              </a:spcBef>
+            </a:pPr>
+            <a:r>
+              <a:rPr sz="1900" b="1">
+                <a:solidFill>
+                  <a:srgbClr val="1A1A1A"/>
+                </a:solidFill>
+                <a:latin typeface="Georgia"/>
+              </a:rPr>
+              <a:t>▸  Design inverts this: target function → desired structure → sequence</a:t>
             </a:r>
           </a:p>
         </p:txBody>
@@ -4346,7 +7762,7 @@
             <a:avLst/>
           </a:prstGeom>
           <a:solidFill>
-            <a:srgbClr val="1A375E"/>
+            <a:srgbClr val="041E42"/>
           </a:solidFill>
           <a:ln>
             <a:noFill/>
@@ -4382,14 +7798,14 @@
         </p:nvSpPr>
         <p:spPr>
           <a:xfrm>
-            <a:off x="0" y="0"/>
-            <a:ext cx="164592" cy="6858000"/>
+            <a:off x="0" y="6629400"/>
+            <a:ext cx="12188952" cy="228600"/>
           </a:xfrm>
           <a:prstGeom prst="rect">
             <a:avLst/>
           </a:prstGeom>
           <a:solidFill>
-            <a:srgbClr val="00B0A0"/>
+            <a:srgbClr val="C8A951"/>
           </a:solidFill>
           <a:ln>
             <a:noFill/>
@@ -4419,44 +7835,36 @@
       </p:sp>
       <p:sp>
         <p:nvSpPr>
-          <p:cNvPr id="4" name="Rectangle 3"/>
-          <p:cNvSpPr/>
+          <p:cNvPr id="4" name="TextBox 3"/>
+          <p:cNvSpPr txBox="1"/>
           <p:nvPr/>
         </p:nvSpPr>
         <p:spPr>
           <a:xfrm>
-            <a:off x="164592" y="0"/>
-            <a:ext cx="12024360" cy="1188720"/>
-          </a:xfrm>
-          <a:prstGeom prst="rect">
-            <a:avLst/>
-          </a:prstGeom>
-          <a:solidFill>
-            <a:srgbClr val="1A375E"/>
-          </a:solidFill>
-          <a:ln>
-            <a:noFill/>
-          </a:ln>
-        </p:spPr>
-        <p:style>
-          <a:lnRef idx="1">
-            <a:schemeClr val="accent1"/>
-          </a:lnRef>
-          <a:fillRef idx="3">
-            <a:schemeClr val="accent1"/>
-          </a:fillRef>
-          <a:effectRef idx="2">
-            <a:schemeClr val="accent1"/>
-          </a:effectRef>
-          <a:fontRef idx="minor">
-            <a:schemeClr val="lt1"/>
-          </a:fontRef>
-        </p:style>
-        <p:txBody>
-          <a:bodyPr rtlCol="0" anchor="ctr"/>
-          <a:lstStyle/>
-          <a:p>
-            <a:pPr algn="ctr"/>
+            <a:off x="320040" y="137160"/>
+            <a:ext cx="11430000" cy="914400"/>
+          </a:xfrm>
+          <a:prstGeom prst="rect">
+            <a:avLst/>
+          </a:prstGeom>
+          <a:noFill/>
+        </p:spPr>
+        <p:txBody>
+          <a:bodyPr wrap="square">
+            <a:spAutoFit/>
+          </a:bodyPr>
+          <a:lstStyle/>
+          <a:p>
+            <a:pPr algn="l"/>
+            <a:r>
+              <a:rPr sz="3000" b="1">
+                <a:solidFill>
+                  <a:srgbClr val="FFFFFF"/>
+                </a:solidFill>
+                <a:latin typeface="Georgia"/>
+              </a:rPr>
+              <a:t>Key Approaches — Overview</a:t>
+            </a:r>
           </a:p>
         </p:txBody>
       </p:sp>
@@ -4468,8 +7876,8 @@
         </p:nvSpPr>
         <p:spPr>
           <a:xfrm>
-            <a:off x="365760" y="137160"/>
-            <a:ext cx="11430000" cy="914400"/>
+            <a:off x="11704320" y="6492240"/>
+            <a:ext cx="365760" cy="274320"/>
           </a:xfrm>
           <a:prstGeom prst="rect">
             <a:avLst/>
@@ -4482,15 +7890,15 @@
           </a:bodyPr>
           <a:lstStyle/>
           <a:p>
-            <a:pPr algn="l"/>
-            <a:r>
-              <a:rPr sz="3200" b="1">
-                <a:solidFill>
-                  <a:srgbClr val="FFFFFF"/>
-                </a:solidFill>
-                <a:latin typeface="Calibri"/>
-              </a:rPr>
-              <a:t>Computational Tools</a:t>
+            <a:pPr algn="r"/>
+            <a:r>
+              <a:rPr sz="1100" b="0">
+                <a:solidFill>
+                  <a:srgbClr val="53565A"/>
+                </a:solidFill>
+                <a:latin typeface="Calibri"/>
+              </a:rPr>
+              <a:t>5</a:t>
             </a:r>
           </a:p>
         </p:txBody>
@@ -4503,8 +7911,8 @@
         </p:nvSpPr>
         <p:spPr>
           <a:xfrm>
-            <a:off x="502920" y="1417320"/>
-            <a:ext cx="11247120" cy="5120640"/>
+            <a:off x="411480" y="1325880"/>
+            <a:ext cx="11338560" cy="5166360"/>
           </a:xfrm>
           <a:prstGeom prst="rect">
             <a:avLst/>
@@ -4519,129 +7927,161 @@
           <a:p>
             <a:pPr>
               <a:spcBef>
-                <a:spcPts val="400"/>
-              </a:spcBef>
-            </a:pPr>
-            <a:r>
-              <a:rPr sz="2000" b="1">
+                <a:spcPts val="500"/>
+              </a:spcBef>
+            </a:pPr>
+            <a:r>
+              <a:rPr sz="1900" b="1">
                 <a:solidFill>
                   <a:srgbClr val="FFFFFF"/>
                 </a:solidFill>
                 <a:latin typeface="Calibri"/>
               </a:rPr>
-              <a:t>▸ Rosetta Suite</a:t>
+              <a:t>▸  Physics-based methods</a:t>
             </a:r>
           </a:p>
           <a:p>
             <a:pPr lvl="1">
               <a:spcBef>
-                <a:spcPts val="400"/>
-              </a:spcBef>
-            </a:pPr>
-            <a:r>
-              <a:rPr sz="1700" b="0">
+                <a:spcPts val="300"/>
+              </a:spcBef>
+            </a:pPr>
+            <a:r>
+              <a:rPr sz="1600" b="0">
                 <a:solidFill>
                   <a:srgbClr val="FFFFFF"/>
                 </a:solidFill>
                 <a:latin typeface="Calibri"/>
               </a:rPr>
-              <a:t>    ◦ RosettaDesign, RosettaFold, FastRelax, Enzyme Design</a:t>
+              <a:t>       ◦  Model atomic interactions via energy functions to score/design sequences</a:t>
             </a:r>
           </a:p>
           <a:p>
             <a:pPr>
               <a:spcBef>
-                <a:spcPts val="400"/>
-              </a:spcBef>
-            </a:pPr>
-            <a:r>
-              <a:rPr sz="2000" b="1">
+                <a:spcPts val="500"/>
+              </a:spcBef>
+            </a:pPr>
+            <a:r>
+              <a:rPr sz="1900" b="1">
                 <a:solidFill>
                   <a:srgbClr val="FFFFFF"/>
                 </a:solidFill>
                 <a:latin typeface="Calibri"/>
               </a:rPr>
-              <a:t>▸ AlphaFold2 / ColabFold</a:t>
+              <a:t>▸  Fragment-based assembly</a:t>
             </a:r>
           </a:p>
           <a:p>
             <a:pPr lvl="1">
               <a:spcBef>
-                <a:spcPts val="400"/>
-              </a:spcBef>
-            </a:pPr>
-            <a:r>
-              <a:rPr sz="1700" b="0">
+                <a:spcPts val="300"/>
+              </a:spcBef>
+            </a:pPr>
+            <a:r>
+              <a:rPr sz="1600" b="0">
                 <a:solidFill>
                   <a:srgbClr val="FFFFFF"/>
                 </a:solidFill>
                 <a:latin typeface="Calibri"/>
               </a:rPr>
-              <a:t>    ◦ High-accuracy structure prediction used to validate designs</a:t>
+              <a:t>       ◦  Assemble new backbones from experimentally observed structural fragments</a:t>
             </a:r>
           </a:p>
           <a:p>
             <a:pPr>
               <a:spcBef>
-                <a:spcPts val="400"/>
-              </a:spcBef>
-            </a:pPr>
-            <a:r>
-              <a:rPr sz="2000" b="1">
+                <a:spcPts val="500"/>
+              </a:spcBef>
+            </a:pPr>
+            <a:r>
+              <a:rPr sz="1900" b="1">
                 <a:solidFill>
                   <a:srgbClr val="FFFFFF"/>
                 </a:solidFill>
                 <a:latin typeface="Calibri"/>
               </a:rPr>
-              <a:t>▸ PyMOL / ChimeraX</a:t>
+              <a:t>▸  Directed evolution</a:t>
             </a:r>
           </a:p>
           <a:p>
             <a:pPr lvl="1">
               <a:spcBef>
-                <a:spcPts val="400"/>
-              </a:spcBef>
-            </a:pPr>
-            <a:r>
-              <a:rPr sz="1700" b="0">
+                <a:spcPts val="300"/>
+              </a:spcBef>
+            </a:pPr>
+            <a:r>
+              <a:rPr sz="1600" b="0">
                 <a:solidFill>
                   <a:srgbClr val="FFFFFF"/>
                 </a:solidFill>
                 <a:latin typeface="Calibri"/>
               </a:rPr>
-              <a:t>    ◦ Visualisation and manual editing of protein structures</a:t>
+              <a:t>       ◦  Iterative in-lab mutagenesis and selection — no structural model needed</a:t>
             </a:r>
           </a:p>
           <a:p>
             <a:pPr>
               <a:spcBef>
-                <a:spcPts val="400"/>
-              </a:spcBef>
-            </a:pPr>
-            <a:r>
-              <a:rPr sz="2000" b="1">
+                <a:spcPts val="500"/>
+              </a:spcBef>
+            </a:pPr>
+            <a:r>
+              <a:rPr sz="1900" b="1">
                 <a:solidFill>
                   <a:srgbClr val="FFFFFF"/>
                 </a:solidFill>
                 <a:latin typeface="Calibri"/>
               </a:rPr>
-              <a:t>▸ Modeller, GROMACS, OpenMM</a:t>
+              <a:t>▸  Machine-learning / deep-learning methods</a:t>
             </a:r>
           </a:p>
           <a:p>
             <a:pPr lvl="1">
               <a:spcBef>
-                <a:spcPts val="400"/>
-              </a:spcBef>
-            </a:pPr>
-            <a:r>
-              <a:rPr sz="1700" b="0">
+                <a:spcPts val="300"/>
+              </a:spcBef>
+            </a:pPr>
+            <a:r>
+              <a:rPr sz="1600" b="0">
                 <a:solidFill>
                   <a:srgbClr val="FFFFFF"/>
                 </a:solidFill>
                 <a:latin typeface="Calibri"/>
               </a:rPr>
-              <a:t>    ◦ Homology modelling and molecular-dynamics refinement</a:t>
+              <a:t>       ◦  Train on structure–sequence pairs from the PDB; sample new sequences</a:t>
+            </a:r>
+          </a:p>
+          <a:p>
+            <a:pPr>
+              <a:spcBef>
+                <a:spcPts val="500"/>
+              </a:spcBef>
+            </a:pPr>
+            <a:r>
+              <a:rPr sz="1900" b="1">
+                <a:solidFill>
+                  <a:srgbClr val="FFFFFF"/>
+                </a:solidFill>
+                <a:latin typeface="Calibri"/>
+              </a:rPr>
+              <a:t>▸  Hybrid approaches</a:t>
+            </a:r>
+          </a:p>
+          <a:p>
+            <a:pPr lvl="1">
+              <a:spcBef>
+                <a:spcPts val="300"/>
+              </a:spcBef>
+            </a:pPr>
+            <a:r>
+              <a:rPr sz="1600" b="0">
+                <a:solidFill>
+                  <a:srgbClr val="FFFFFF"/>
+                </a:solidFill>
+                <a:latin typeface="Calibri"/>
+              </a:rPr>
+              <a:t>       ◦  Combine energy-based validation with ML-generated candidates</a:t>
             </a:r>
           </a:p>
         </p:txBody>
@@ -4679,7 +8119,7 @@
             <a:avLst/>
           </a:prstGeom>
           <a:solidFill>
-            <a:srgbClr val="F4F6F9"/>
+            <a:srgbClr val="F2F2F2"/>
           </a:solidFill>
           <a:ln>
             <a:noFill/>
@@ -4716,13 +8156,13 @@
         <p:spPr>
           <a:xfrm>
             <a:off x="0" y="0"/>
-            <a:ext cx="164592" cy="6858000"/>
+            <a:ext cx="12188952" cy="1143000"/>
           </a:xfrm>
           <a:prstGeom prst="rect">
             <a:avLst/>
           </a:prstGeom>
           <a:solidFill>
-            <a:srgbClr val="00B0A0"/>
+            <a:srgbClr val="041E42"/>
           </a:solidFill>
           <a:ln>
             <a:noFill/>
@@ -4758,14 +8198,14 @@
         </p:nvSpPr>
         <p:spPr>
           <a:xfrm>
-            <a:off x="164592" y="0"/>
-            <a:ext cx="12024360" cy="1188720"/>
+            <a:off x="0" y="6629400"/>
+            <a:ext cx="12188952" cy="228600"/>
           </a:xfrm>
           <a:prstGeom prst="rect">
             <a:avLst/>
           </a:prstGeom>
           <a:solidFill>
-            <a:srgbClr val="1A375E"/>
+            <a:srgbClr val="C8A951"/>
           </a:solidFill>
           <a:ln>
             <a:noFill/>
@@ -4801,7 +8241,7 @@
         </p:nvSpPr>
         <p:spPr>
           <a:xfrm>
-            <a:off x="365760" y="137160"/>
+            <a:off x="320040" y="137160"/>
             <a:ext cx="11430000" cy="914400"/>
           </a:xfrm>
           <a:prstGeom prst="rect">
@@ -4817,13 +8257,13 @@
           <a:p>
             <a:pPr algn="l"/>
             <a:r>
-              <a:rPr sz="3200" b="1">
+              <a:rPr sz="3000" b="1">
                 <a:solidFill>
                   <a:srgbClr val="FFFFFF"/>
                 </a:solidFill>
-                <a:latin typeface="Calibri"/>
-              </a:rPr>
-              <a:t>Deep-Learning Methods</a:t>
+                <a:latin typeface="Georgia"/>
+              </a:rPr>
+              <a:t>Physics-Based Energy Minimisation</a:t>
             </a:r>
           </a:p>
         </p:txBody>
@@ -4836,8 +8276,8 @@
         </p:nvSpPr>
         <p:spPr>
           <a:xfrm>
-            <a:off x="502920" y="1417320"/>
-            <a:ext cx="11247120" cy="5120640"/>
+            <a:off x="11704320" y="6492240"/>
+            <a:ext cx="365760" cy="274320"/>
           </a:xfrm>
           <a:prstGeom prst="rect">
             <a:avLst/>
@@ -4850,163 +8290,198 @@
           </a:bodyPr>
           <a:lstStyle/>
           <a:p>
+            <a:pPr algn="r"/>
+            <a:r>
+              <a:rPr sz="1100" b="0">
+                <a:solidFill>
+                  <a:srgbClr val="53565A"/>
+                </a:solidFill>
+                <a:latin typeface="Calibri"/>
+              </a:rPr>
+              <a:t>6</a:t>
+            </a:r>
+          </a:p>
+        </p:txBody>
+      </p:sp>
+      <p:sp>
+        <p:nvSpPr>
+          <p:cNvPr id="7" name="TextBox 6"/>
+          <p:cNvSpPr txBox="1"/>
+          <p:nvPr/>
+        </p:nvSpPr>
+        <p:spPr>
+          <a:xfrm>
+            <a:off x="411480" y="1325880"/>
+            <a:ext cx="11338560" cy="5166360"/>
+          </a:xfrm>
+          <a:prstGeom prst="rect">
+            <a:avLst/>
+          </a:prstGeom>
+          <a:noFill/>
+        </p:spPr>
+        <p:txBody>
+          <a:bodyPr wrap="square">
+            <a:spAutoFit/>
+          </a:bodyPr>
+          <a:lstStyle/>
+          <a:p>
             <a:pPr>
               <a:spcBef>
-                <a:spcPts val="400"/>
-              </a:spcBef>
-            </a:pPr>
-            <a:r>
-              <a:rPr sz="2000" b="1">
-                <a:solidFill>
-                  <a:srgbClr val="333333"/>
-                </a:solidFill>
-                <a:latin typeface="Calibri"/>
-              </a:rPr>
-              <a:t>▸ ProteinMPNN</a:t>
+                <a:spcPts val="500"/>
+              </a:spcBef>
+            </a:pPr>
+            <a:r>
+              <a:rPr sz="1900" b="1">
+                <a:solidFill>
+                  <a:srgbClr val="1A1A1A"/>
+                </a:solidFill>
+                <a:latin typeface="Georgia"/>
+              </a:rPr>
+              <a:t>▸  Rosetta energy function (REF15)</a:t>
             </a:r>
           </a:p>
           <a:p>
             <a:pPr lvl="1">
               <a:spcBef>
-                <a:spcPts val="400"/>
-              </a:spcBef>
-            </a:pPr>
-            <a:r>
-              <a:rPr sz="1700" b="0">
-                <a:solidFill>
-                  <a:srgbClr val="333333"/>
-                </a:solidFill>
-                <a:latin typeface="Calibri"/>
-              </a:rPr>
-              <a:t>    ◦ Graph neural network for fixed-backbone sequence design</a:t>
+                <a:spcPts val="300"/>
+              </a:spcBef>
+            </a:pPr>
+            <a:r>
+              <a:rPr sz="1600" b="0">
+                <a:solidFill>
+                  <a:srgbClr val="1A1A1A"/>
+                </a:solidFill>
+                <a:latin typeface="Calibri"/>
+              </a:rPr>
+              <a:t>       ◦  Van der Waals, electrostatics, solvation, H-bonds, torsion terms</a:t>
+            </a:r>
+          </a:p>
+          <a:p>
+            <a:pPr lvl="1">
+              <a:spcBef>
+                <a:spcPts val="300"/>
+              </a:spcBef>
+            </a:pPr>
+            <a:r>
+              <a:rPr sz="1600" b="0">
+                <a:solidFill>
+                  <a:srgbClr val="1A1A1A"/>
+                </a:solidFill>
+                <a:latin typeface="Calibri"/>
+              </a:rPr>
+              <a:t>       ◦  Used in RosettaDesign, FastRelax, Enzyme Design</a:t>
             </a:r>
           </a:p>
           <a:p>
             <a:pPr>
               <a:spcBef>
-                <a:spcPts val="400"/>
-              </a:spcBef>
-            </a:pPr>
-            <a:r>
-              <a:rPr sz="2000" b="1">
-                <a:solidFill>
-                  <a:srgbClr val="333333"/>
-                </a:solidFill>
-                <a:latin typeface="Calibri"/>
-              </a:rPr>
-              <a:t>▸ ESM (Evolutionary Scale Modelling)  –  Meta AI</a:t>
+                <a:spcPts val="500"/>
+              </a:spcBef>
+            </a:pPr>
+            <a:r>
+              <a:rPr sz="1900" b="1">
+                <a:solidFill>
+                  <a:srgbClr val="1A1A1A"/>
+                </a:solidFill>
+                <a:latin typeface="Georgia"/>
+              </a:rPr>
+              <a:t>▸  FoldX</a:t>
             </a:r>
           </a:p>
           <a:p>
             <a:pPr lvl="1">
               <a:spcBef>
-                <a:spcPts val="400"/>
-              </a:spcBef>
-            </a:pPr>
-            <a:r>
-              <a:rPr sz="1700" b="0">
-                <a:solidFill>
-                  <a:srgbClr val="333333"/>
-                </a:solidFill>
-                <a:latin typeface="Calibri"/>
-              </a:rPr>
-              <a:t>    ◦ Protein language model; ESM-IF1 for inverse folding</a:t>
+                <a:spcPts val="300"/>
+              </a:spcBef>
+            </a:pPr>
+            <a:r>
+              <a:rPr sz="1600" b="0">
+                <a:solidFill>
+                  <a:srgbClr val="1A1A1A"/>
+                </a:solidFill>
+                <a:latin typeface="Calibri"/>
+              </a:rPr>
+              <a:t>       ◦  Rapid empirical ΔΔG estimates for point mutations</a:t>
             </a:r>
           </a:p>
           <a:p>
             <a:pPr>
               <a:spcBef>
-                <a:spcPts val="400"/>
-              </a:spcBef>
-            </a:pPr>
-            <a:r>
-              <a:rPr sz="2000" b="1">
-                <a:solidFill>
-                  <a:srgbClr val="333333"/>
-                </a:solidFill>
-                <a:latin typeface="Calibri"/>
-              </a:rPr>
-              <a:t>▸ RFdiffusion</a:t>
+                <a:spcPts val="500"/>
+              </a:spcBef>
+            </a:pPr>
+            <a:r>
+              <a:rPr sz="1900" b="1">
+                <a:solidFill>
+                  <a:srgbClr val="1A1A1A"/>
+                </a:solidFill>
+                <a:latin typeface="Georgia"/>
+              </a:rPr>
+              <a:t>▸  Design workflow</a:t>
             </a:r>
           </a:p>
           <a:p>
             <a:pPr lvl="1">
               <a:spcBef>
-                <a:spcPts val="400"/>
-              </a:spcBef>
-            </a:pPr>
-            <a:r>
-              <a:rPr sz="1700" b="0">
-                <a:solidFill>
-                  <a:srgbClr val="333333"/>
-                </a:solidFill>
-                <a:latin typeface="Calibri"/>
-              </a:rPr>
-              <a:t>    ◦ Diffusion model for de novo backbone generation</a:t>
+                <a:spcPts val="300"/>
+              </a:spcBef>
+            </a:pPr>
+            <a:r>
+              <a:rPr sz="1600" b="0">
+                <a:solidFill>
+                  <a:srgbClr val="1A1A1A"/>
+                </a:solidFill>
+                <a:latin typeface="Calibri"/>
+              </a:rPr>
+              <a:t>       ◦  Fix backbone → optimise side-chain rotamers → minimise energy</a:t>
+            </a:r>
+          </a:p>
+          <a:p>
+            <a:pPr lvl="1">
+              <a:spcBef>
+                <a:spcPts val="300"/>
+              </a:spcBef>
+            </a:pPr>
+            <a:r>
+              <a:rPr sz="1600" b="0">
+                <a:solidFill>
+                  <a:srgbClr val="1A1A1A"/>
+                </a:solidFill>
+                <a:latin typeface="Calibri"/>
+              </a:rPr>
+              <a:t>       ◦  Monte Carlo sampling or gradient-based minimisation</a:t>
             </a:r>
           </a:p>
           <a:p>
             <a:pPr>
               <a:spcBef>
-                <a:spcPts val="400"/>
-              </a:spcBef>
-            </a:pPr>
-            <a:r>
-              <a:rPr sz="2000" b="1">
-                <a:solidFill>
-                  <a:srgbClr val="333333"/>
-                </a:solidFill>
-                <a:latin typeface="Calibri"/>
-              </a:rPr>
-              <a:t>▸ ProteinGenerator / Chroma</a:t>
+                <a:spcPts val="500"/>
+              </a:spcBef>
+            </a:pPr>
+            <a:r>
+              <a:rPr sz="1900" b="1">
+                <a:solidFill>
+                  <a:srgbClr val="1A1A1A"/>
+                </a:solidFill>
+                <a:latin typeface="Georgia"/>
+              </a:rPr>
+              <a:t>▸  Limitations</a:t>
             </a:r>
           </a:p>
           <a:p>
             <a:pPr lvl="1">
               <a:spcBef>
-                <a:spcPts val="400"/>
-              </a:spcBef>
-            </a:pPr>
-            <a:r>
-              <a:rPr sz="1700" b="0">
-                <a:solidFill>
-                  <a:srgbClr val="333333"/>
-                </a:solidFill>
-                <a:latin typeface="Calibri"/>
-              </a:rPr>
-              <a:t>    ◦ End-to-end diffusion over sequence + structure</a:t>
-            </a:r>
-          </a:p>
-          <a:p>
-            <a:pPr>
-              <a:spcBef>
-                <a:spcPts val="400"/>
-              </a:spcBef>
-            </a:pPr>
-            <a:r>
-              <a:rPr sz="2000" b="1">
-                <a:solidFill>
-                  <a:srgbClr val="333333"/>
-                </a:solidFill>
-                <a:latin typeface="Calibri"/>
-              </a:rPr>
-              <a:t>▸ LigandMPNN</a:t>
-            </a:r>
-          </a:p>
-          <a:p>
-            <a:pPr lvl="1">
-              <a:spcBef>
-                <a:spcPts val="400"/>
-              </a:spcBef>
-            </a:pPr>
-            <a:r>
-              <a:rPr sz="1700" b="0">
-                <a:solidFill>
-                  <a:srgbClr val="333333"/>
-                </a:solidFill>
-                <a:latin typeface="Calibri"/>
-              </a:rPr>
-              <a:t>    ◦ Extends ProteinMPNN to account for small-molecule context</a:t>
+                <a:spcPts val="300"/>
+              </a:spcBef>
+            </a:pPr>
+            <a:r>
+              <a:rPr sz="1600" b="0">
+                <a:solidFill>
+                  <a:srgbClr val="1A1A1A"/>
+                </a:solidFill>
+                <a:latin typeface="Calibri"/>
+              </a:rPr>
+              <a:t>       ◦  Computationally expensive; energy function approximations can fail</a:t>
             </a:r>
           </a:p>
         </p:txBody>
@@ -5044,7 +8519,7 @@
             <a:avLst/>
           </a:prstGeom>
           <a:solidFill>
-            <a:srgbClr val="1A375E"/>
+            <a:srgbClr val="041E42"/>
           </a:solidFill>
           <a:ln>
             <a:noFill/>
@@ -5080,14 +8555,14 @@
         </p:nvSpPr>
         <p:spPr>
           <a:xfrm>
-            <a:off x="0" y="0"/>
-            <a:ext cx="164592" cy="6858000"/>
+            <a:off x="0" y="6629400"/>
+            <a:ext cx="12188952" cy="228600"/>
           </a:xfrm>
           <a:prstGeom prst="rect">
             <a:avLst/>
           </a:prstGeom>
           <a:solidFill>
-            <a:srgbClr val="00B0A0"/>
+            <a:srgbClr val="C8A951"/>
           </a:solidFill>
           <a:ln>
             <a:noFill/>
@@ -5117,44 +8592,36 @@
       </p:sp>
       <p:sp>
         <p:nvSpPr>
-          <p:cNvPr id="4" name="Rectangle 3"/>
-          <p:cNvSpPr/>
+          <p:cNvPr id="4" name="TextBox 3"/>
+          <p:cNvSpPr txBox="1"/>
           <p:nvPr/>
         </p:nvSpPr>
         <p:spPr>
           <a:xfrm>
-            <a:off x="164592" y="0"/>
-            <a:ext cx="12024360" cy="1188720"/>
-          </a:xfrm>
-          <a:prstGeom prst="rect">
-            <a:avLst/>
-          </a:prstGeom>
-          <a:solidFill>
-            <a:srgbClr val="1A375E"/>
-          </a:solidFill>
-          <a:ln>
-            <a:noFill/>
-          </a:ln>
-        </p:spPr>
-        <p:style>
-          <a:lnRef idx="1">
-            <a:schemeClr val="accent1"/>
-          </a:lnRef>
-          <a:fillRef idx="3">
-            <a:schemeClr val="accent1"/>
-          </a:fillRef>
-          <a:effectRef idx="2">
-            <a:schemeClr val="accent1"/>
-          </a:effectRef>
-          <a:fontRef idx="minor">
-            <a:schemeClr val="lt1"/>
-          </a:fontRef>
-        </p:style>
-        <p:txBody>
-          <a:bodyPr rtlCol="0" anchor="ctr"/>
-          <a:lstStyle/>
-          <a:p>
-            <a:pPr algn="ctr"/>
+            <a:off x="320040" y="137160"/>
+            <a:ext cx="11430000" cy="914400"/>
+          </a:xfrm>
+          <a:prstGeom prst="rect">
+            <a:avLst/>
+          </a:prstGeom>
+          <a:noFill/>
+        </p:spPr>
+        <p:txBody>
+          <a:bodyPr wrap="square">
+            <a:spAutoFit/>
+          </a:bodyPr>
+          <a:lstStyle/>
+          <a:p>
+            <a:pPr algn="l"/>
+            <a:r>
+              <a:rPr sz="3000" b="1">
+                <a:solidFill>
+                  <a:srgbClr val="FFFFFF"/>
+                </a:solidFill>
+                <a:latin typeface="Georgia"/>
+              </a:rPr>
+              <a:t>Fragment-Based Assembly &amp; Directed Evolution</a:t>
+            </a:r>
           </a:p>
         </p:txBody>
       </p:sp>
@@ -5166,8 +8633,8 @@
         </p:nvSpPr>
         <p:spPr>
           <a:xfrm>
-            <a:off x="365760" y="137160"/>
-            <a:ext cx="11430000" cy="914400"/>
+            <a:off x="11704320" y="6492240"/>
+            <a:ext cx="365760" cy="274320"/>
           </a:xfrm>
           <a:prstGeom prst="rect">
             <a:avLst/>
@@ -5180,15 +8647,15 @@
           </a:bodyPr>
           <a:lstStyle/>
           <a:p>
-            <a:pPr algn="l"/>
-            <a:r>
-              <a:rPr sz="3200" b="1">
-                <a:solidFill>
-                  <a:srgbClr val="FFFFFF"/>
-                </a:solidFill>
-                <a:latin typeface="Calibri"/>
-              </a:rPr>
-              <a:t>Applications</a:t>
+            <a:pPr algn="r"/>
+            <a:r>
+              <a:rPr sz="1100" b="0">
+                <a:solidFill>
+                  <a:srgbClr val="53565A"/>
+                </a:solidFill>
+                <a:latin typeface="Calibri"/>
+              </a:rPr>
+              <a:t>7</a:t>
             </a:r>
           </a:p>
         </p:txBody>
@@ -5201,8 +8668,8 @@
         </p:nvSpPr>
         <p:spPr>
           <a:xfrm>
-            <a:off x="502920" y="1417320"/>
-            <a:ext cx="11247120" cy="5120640"/>
+            <a:off x="411480" y="1325880"/>
+            <a:ext cx="11338560" cy="5166360"/>
           </a:xfrm>
           <a:prstGeom prst="rect">
             <a:avLst/>
@@ -5217,177 +8684,161 @@
           <a:p>
             <a:pPr>
               <a:spcBef>
-                <a:spcPts val="400"/>
-              </a:spcBef>
-            </a:pPr>
-            <a:r>
-              <a:rPr sz="2000" b="1">
+                <a:spcPts val="500"/>
+              </a:spcBef>
+            </a:pPr>
+            <a:r>
+              <a:rPr sz="1900" b="1">
                 <a:solidFill>
                   <a:srgbClr val="FFFFFF"/>
                 </a:solidFill>
                 <a:latin typeface="Calibri"/>
               </a:rPr>
-              <a:t>▸ Therapeutics</a:t>
+              <a:t>▸  Fragment-based assembly</a:t>
             </a:r>
           </a:p>
           <a:p>
             <a:pPr lvl="1">
               <a:spcBef>
-                <a:spcPts val="400"/>
-              </a:spcBef>
-            </a:pPr>
-            <a:r>
-              <a:rPr sz="1700" b="0">
+                <a:spcPts val="300"/>
+              </a:spcBef>
+            </a:pPr>
+            <a:r>
+              <a:rPr sz="1600" b="0">
                 <a:solidFill>
                   <a:srgbClr val="FFFFFF"/>
                 </a:solidFill>
                 <a:latin typeface="Calibri"/>
               </a:rPr>
-              <a:t>    ◦ Designed binders for viral antigens (e.g., SARS-CoV-2 RBD)</a:t>
+              <a:t>       ◦  Mine the PDB for 3-9 residue structural fragments</a:t>
             </a:r>
           </a:p>
           <a:p>
             <a:pPr lvl="1">
               <a:spcBef>
-                <a:spcPts val="400"/>
-              </a:spcBef>
-            </a:pPr>
-            <a:r>
-              <a:rPr sz="1700" b="0">
+                <a:spcPts val="300"/>
+              </a:spcBef>
+            </a:pPr>
+            <a:r>
+              <a:rPr sz="1600" b="0">
                 <a:solidFill>
                   <a:srgbClr val="FFFFFF"/>
                 </a:solidFill>
                 <a:latin typeface="Calibri"/>
               </a:rPr>
-              <a:t>    ◦ Miniproteins as potential antivirals</a:t>
+              <a:t>       ◦  Assemble fragments to build novel topologies (Rosetta ab initio)</a:t>
+            </a:r>
+          </a:p>
+          <a:p>
+            <a:pPr lvl="1">
+              <a:spcBef>
+                <a:spcPts val="300"/>
+              </a:spcBef>
+            </a:pPr>
+            <a:r>
+              <a:rPr sz="1600" b="0">
+                <a:solidFill>
+                  <a:srgbClr val="FFFFFF"/>
+                </a:solidFill>
+                <a:latin typeface="Calibri"/>
+              </a:rPr>
+              <a:t>       ◦  Enabled design of non-natural TIM-barrel and beta-barrel folds</a:t>
             </a:r>
           </a:p>
           <a:p>
             <a:pPr>
               <a:spcBef>
-                <a:spcPts val="400"/>
-              </a:spcBef>
-            </a:pPr>
-            <a:r>
-              <a:rPr sz="2000" b="1">
+                <a:spcPts val="500"/>
+              </a:spcBef>
+            </a:pPr>
+            <a:r>
+              <a:rPr sz="1900" b="1">
                 <a:solidFill>
                   <a:srgbClr val="FFFFFF"/>
                 </a:solidFill>
                 <a:latin typeface="Calibri"/>
               </a:rPr>
-              <a:t>▸ Enzymes &amp; Biocatalysis</a:t>
+              <a:t>▸  Directed evolution</a:t>
             </a:r>
           </a:p>
           <a:p>
             <a:pPr lvl="1">
               <a:spcBef>
-                <a:spcPts val="400"/>
-              </a:spcBef>
-            </a:pPr>
-            <a:r>
-              <a:rPr sz="1700" b="0">
+                <a:spcPts val="300"/>
+              </a:spcBef>
+            </a:pPr>
+            <a:r>
+              <a:rPr sz="1600" b="0">
                 <a:solidFill>
                   <a:srgbClr val="FFFFFF"/>
                 </a:solidFill>
                 <a:latin typeface="Calibri"/>
               </a:rPr>
-              <a:t>    ◦ Retro-aldolase, Kemp eliminase  –  reactions absent in nature</a:t>
+              <a:t>       ◦  Error-prone PCR or DNA shuffling to introduce mutations</a:t>
+            </a:r>
+          </a:p>
+          <a:p>
+            <a:pPr lvl="1">
+              <a:spcBef>
+                <a:spcPts val="300"/>
+              </a:spcBef>
+            </a:pPr>
+            <a:r>
+              <a:rPr sz="1600" b="0">
+                <a:solidFill>
+                  <a:srgbClr val="FFFFFF"/>
+                </a:solidFill>
+                <a:latin typeface="Calibri"/>
+              </a:rPr>
+              <a:t>       ◦  Screen or select for improved activity/stability</a:t>
+            </a:r>
+          </a:p>
+          <a:p>
+            <a:pPr lvl="1">
+              <a:spcBef>
+                <a:spcPts val="300"/>
+              </a:spcBef>
+            </a:pPr>
+            <a:r>
+              <a:rPr sz="1600" b="0">
+                <a:solidFill>
+                  <a:srgbClr val="FFFFFF"/>
+                </a:solidFill>
+                <a:latin typeface="Calibri"/>
+              </a:rPr>
+              <a:t>       ◦  Frances Arnold: Nobel Prize 2018 for directed evolution of enzymes</a:t>
             </a:r>
           </a:p>
           <a:p>
             <a:pPr>
               <a:spcBef>
-                <a:spcPts val="400"/>
-              </a:spcBef>
-            </a:pPr>
-            <a:r>
-              <a:rPr sz="2000" b="1">
+                <a:spcPts val="500"/>
+              </a:spcBef>
+            </a:pPr>
+            <a:r>
+              <a:rPr sz="1900" b="1">
                 <a:solidFill>
                   <a:srgbClr val="FFFFFF"/>
                 </a:solidFill>
                 <a:latin typeface="Calibri"/>
               </a:rPr>
-              <a:t>▸ Biosensors</a:t>
+              <a:t>▸  Combining both</a:t>
             </a:r>
           </a:p>
           <a:p>
             <a:pPr lvl="1">
               <a:spcBef>
-                <a:spcPts val="400"/>
-              </a:spcBef>
-            </a:pPr>
-            <a:r>
-              <a:rPr sz="1700" b="0">
+                <a:spcPts val="300"/>
+              </a:spcBef>
+            </a:pPr>
+            <a:r>
+              <a:rPr sz="1600" b="0">
                 <a:solidFill>
                   <a:srgbClr val="FFFFFF"/>
                 </a:solidFill>
                 <a:latin typeface="Calibri"/>
               </a:rPr>
-              <a:t>    ◦ Fluorescent biosensors by embedding chromophore-binding sites</a:t>
-            </a:r>
-          </a:p>
-          <a:p>
-            <a:pPr>
-              <a:spcBef>
-                <a:spcPts val="400"/>
-              </a:spcBef>
-            </a:pPr>
-            <a:r>
-              <a:rPr sz="2000" b="1">
-                <a:solidFill>
-                  <a:srgbClr val="FFFFFF"/>
-                </a:solidFill>
-                <a:latin typeface="Calibri"/>
-              </a:rPr>
-              <a:t>▸ Biomaterials</a:t>
-            </a:r>
-          </a:p>
-          <a:p>
-            <a:pPr lvl="1">
-              <a:spcBef>
-                <a:spcPts val="400"/>
-              </a:spcBef>
-            </a:pPr>
-            <a:r>
-              <a:rPr sz="1700" b="0">
-                <a:solidFill>
-                  <a:srgbClr val="FFFFFF"/>
-                </a:solidFill>
-                <a:latin typeface="Calibri"/>
-              </a:rPr>
-              <a:t>    ◦ Self-assembling protein cages, hydrogels, scaffolds</a:t>
-            </a:r>
-          </a:p>
-          <a:p>
-            <a:pPr>
-              <a:spcBef>
-                <a:spcPts val="400"/>
-              </a:spcBef>
-            </a:pPr>
-            <a:r>
-              <a:rPr sz="2000" b="1">
-                <a:solidFill>
-                  <a:srgbClr val="FFFFFF"/>
-                </a:solidFill>
-                <a:latin typeface="Calibri"/>
-              </a:rPr>
-              <a:t>▸ Synthetic Biology</a:t>
-            </a:r>
-          </a:p>
-          <a:p>
-            <a:pPr lvl="1">
-              <a:spcBef>
-                <a:spcPts val="400"/>
-              </a:spcBef>
-            </a:pPr>
-            <a:r>
-              <a:rPr sz="1700" b="0">
-                <a:solidFill>
-                  <a:srgbClr val="FFFFFF"/>
-                </a:solidFill>
-                <a:latin typeface="Calibri"/>
-              </a:rPr>
-              <a:t>    ◦ Orthogonal translation systems, logic-gate proteins</a:t>
+              <a:t>       ◦  Computationally propose scaffolds; wet-lab evolution to fine-tune</a:t>
             </a:r>
           </a:p>
         </p:txBody>
@@ -5425,7 +8876,7 @@
             <a:avLst/>
           </a:prstGeom>
           <a:solidFill>
-            <a:srgbClr val="F4F6F9"/>
+            <a:srgbClr val="F2F2F2"/>
           </a:solidFill>
           <a:ln>
             <a:noFill/>
@@ -5462,13 +8913,13 @@
         <p:spPr>
           <a:xfrm>
             <a:off x="0" y="0"/>
-            <a:ext cx="164592" cy="6858000"/>
+            <a:ext cx="12188952" cy="1143000"/>
           </a:xfrm>
           <a:prstGeom prst="rect">
             <a:avLst/>
           </a:prstGeom>
           <a:solidFill>
-            <a:srgbClr val="00B0A0"/>
+            <a:srgbClr val="041E42"/>
           </a:solidFill>
           <a:ln>
             <a:noFill/>
@@ -5504,14 +8955,14 @@
         </p:nvSpPr>
         <p:spPr>
           <a:xfrm>
-            <a:off x="164592" y="0"/>
-            <a:ext cx="12024360" cy="1188720"/>
+            <a:off x="0" y="6629400"/>
+            <a:ext cx="12188952" cy="228600"/>
           </a:xfrm>
           <a:prstGeom prst="rect">
             <a:avLst/>
           </a:prstGeom>
           <a:solidFill>
-            <a:srgbClr val="1A375E"/>
+            <a:srgbClr val="C8A951"/>
           </a:solidFill>
           <a:ln>
             <a:noFill/>
@@ -5547,7 +8998,7 @@
         </p:nvSpPr>
         <p:spPr>
           <a:xfrm>
-            <a:off x="365760" y="137160"/>
+            <a:off x="320040" y="137160"/>
             <a:ext cx="11430000" cy="914400"/>
           </a:xfrm>
           <a:prstGeom prst="rect">
@@ -5563,13 +9014,13 @@
           <a:p>
             <a:pPr algn="l"/>
             <a:r>
-              <a:rPr sz="3200" b="1">
+              <a:rPr sz="3000" b="1">
                 <a:solidFill>
                   <a:srgbClr val="FFFFFF"/>
                 </a:solidFill>
-                <a:latin typeface="Calibri"/>
-              </a:rPr>
-              <a:t>Challenges &amp; Future Directions</a:t>
+                <a:latin typeface="Georgia"/>
+              </a:rPr>
+              <a:t>Computational Tools</a:t>
             </a:r>
           </a:p>
         </p:txBody>
@@ -5582,8 +9033,8 @@
         </p:nvSpPr>
         <p:spPr>
           <a:xfrm>
-            <a:off x="502920" y="1417320"/>
-            <a:ext cx="11247120" cy="5120640"/>
+            <a:off x="11704320" y="6492240"/>
+            <a:ext cx="365760" cy="274320"/>
           </a:xfrm>
           <a:prstGeom prst="rect">
             <a:avLst/>
@@ -5596,179 +9047,230 @@
           </a:bodyPr>
           <a:lstStyle/>
           <a:p>
+            <a:pPr algn="r"/>
+            <a:r>
+              <a:rPr sz="1100" b="0">
+                <a:solidFill>
+                  <a:srgbClr val="53565A"/>
+                </a:solidFill>
+                <a:latin typeface="Calibri"/>
+              </a:rPr>
+              <a:t>8</a:t>
+            </a:r>
+          </a:p>
+        </p:txBody>
+      </p:sp>
+      <p:sp>
+        <p:nvSpPr>
+          <p:cNvPr id="7" name="TextBox 6"/>
+          <p:cNvSpPr txBox="1"/>
+          <p:nvPr/>
+        </p:nvSpPr>
+        <p:spPr>
+          <a:xfrm>
+            <a:off x="411480" y="1325880"/>
+            <a:ext cx="11338560" cy="5166360"/>
+          </a:xfrm>
+          <a:prstGeom prst="rect">
+            <a:avLst/>
+          </a:prstGeom>
+          <a:noFill/>
+        </p:spPr>
+        <p:txBody>
+          <a:bodyPr wrap="square">
+            <a:spAutoFit/>
+          </a:bodyPr>
+          <a:lstStyle/>
+          <a:p>
             <a:pPr>
               <a:spcBef>
-                <a:spcPts val="400"/>
-              </a:spcBef>
-            </a:pPr>
-            <a:r>
-              <a:rPr sz="2000" b="1">
-                <a:solidFill>
-                  <a:srgbClr val="333333"/>
-                </a:solidFill>
-                <a:latin typeface="Calibri"/>
-              </a:rPr>
-              <a:t>▸ Experimental validation remains expensive and slow</a:t>
+                <a:spcPts val="500"/>
+              </a:spcBef>
+            </a:pPr>
+            <a:r>
+              <a:rPr sz="1900" b="1">
+                <a:solidFill>
+                  <a:srgbClr val="1A1A1A"/>
+                </a:solidFill>
+                <a:latin typeface="Georgia"/>
+              </a:rPr>
+              <a:t>▸  Rosetta Suite  (rosettacommons.org)</a:t>
             </a:r>
           </a:p>
           <a:p>
             <a:pPr lvl="1">
               <a:spcBef>
-                <a:spcPts val="400"/>
-              </a:spcBef>
-            </a:pPr>
-            <a:r>
-              <a:rPr sz="1700" b="0">
-                <a:solidFill>
-                  <a:srgbClr val="333333"/>
-                </a:solidFill>
-                <a:latin typeface="Calibri"/>
-              </a:rPr>
-              <a:t>    ◦ High-throughput assays (PACE, cell-surface display) are helping</a:t>
+                <a:spcPts val="300"/>
+              </a:spcBef>
+            </a:pPr>
+            <a:r>
+              <a:rPr sz="1600" b="0">
+                <a:solidFill>
+                  <a:srgbClr val="1A1A1A"/>
+                </a:solidFill>
+                <a:latin typeface="Calibri"/>
+              </a:rPr>
+              <a:t>       ◦  RosettaDesign, RosettaFold2, FastRelax, RosettaScript pipelines</a:t>
             </a:r>
           </a:p>
           <a:p>
             <a:pPr>
               <a:spcBef>
-                <a:spcPts val="400"/>
-              </a:spcBef>
-            </a:pPr>
-            <a:r>
-              <a:rPr sz="2000" b="1">
-                <a:solidFill>
-                  <a:srgbClr val="333333"/>
-                </a:solidFill>
-                <a:latin typeface="Calibri"/>
-              </a:rPr>
-              <a:t>▸ Accurately designing dynamics &amp; allostery</a:t>
+                <a:spcPts val="500"/>
+              </a:spcBef>
+            </a:pPr>
+            <a:r>
+              <a:rPr sz="1900" b="1">
+                <a:solidFill>
+                  <a:srgbClr val="1A1A1A"/>
+                </a:solidFill>
+                <a:latin typeface="Georgia"/>
+              </a:rPr>
+              <a:t>▸  AlphaFold2 / ColabFold</a:t>
             </a:r>
           </a:p>
           <a:p>
             <a:pPr lvl="1">
               <a:spcBef>
-                <a:spcPts val="400"/>
-              </a:spcBef>
-            </a:pPr>
-            <a:r>
-              <a:rPr sz="1700" b="0">
-                <a:solidFill>
-                  <a:srgbClr val="333333"/>
-                </a:solidFill>
-                <a:latin typeface="Calibri"/>
-              </a:rPr>
-              <a:t>    ◦ Most methods optimise static structure, not conformational change</a:t>
+                <a:spcPts val="300"/>
+              </a:spcBef>
+            </a:pPr>
+            <a:r>
+              <a:rPr sz="1600" b="0">
+                <a:solidFill>
+                  <a:srgbClr val="1A1A1A"/>
+                </a:solidFill>
+                <a:latin typeface="Calibri"/>
+              </a:rPr>
+              <a:t>       ◦  High-accuracy structure prediction used to validate designs in silico</a:t>
             </a:r>
           </a:p>
           <a:p>
             <a:pPr>
               <a:spcBef>
-                <a:spcPts val="400"/>
-              </a:spcBef>
-            </a:pPr>
-            <a:r>
-              <a:rPr sz="2000" b="1">
-                <a:solidFill>
-                  <a:srgbClr val="333333"/>
-                </a:solidFill>
-                <a:latin typeface="Calibri"/>
-              </a:rPr>
-              <a:t>▸ Incorporating non-standard amino acids</a:t>
+                <a:spcPts val="500"/>
+              </a:spcBef>
+            </a:pPr>
+            <a:r>
+              <a:rPr sz="1900" b="1">
+                <a:solidFill>
+                  <a:srgbClr val="1A1A1A"/>
+                </a:solidFill>
+                <a:latin typeface="Georgia"/>
+              </a:rPr>
+              <a:t>▸  ESMFold (Meta AI)</a:t>
             </a:r>
           </a:p>
           <a:p>
             <a:pPr lvl="1">
               <a:spcBef>
-                <a:spcPts val="400"/>
-              </a:spcBef>
-            </a:pPr>
-            <a:r>
-              <a:rPr sz="1700" b="0">
-                <a:solidFill>
-                  <a:srgbClr val="333333"/>
-                </a:solidFill>
-                <a:latin typeface="Calibri"/>
-              </a:rPr>
-              <a:t>    ◦ Expanding the chemical alphabet for new function</a:t>
+                <a:spcPts val="300"/>
+              </a:spcBef>
+            </a:pPr>
+            <a:r>
+              <a:rPr sz="1600" b="0">
+                <a:solidFill>
+                  <a:srgbClr val="1A1A1A"/>
+                </a:solidFill>
+                <a:latin typeface="Calibri"/>
+              </a:rPr>
+              <a:t>       ◦  Language-model-based folding; ~1000× faster than AlphaFold2</a:t>
             </a:r>
           </a:p>
           <a:p>
             <a:pPr>
               <a:spcBef>
-                <a:spcPts val="400"/>
-              </a:spcBef>
-            </a:pPr>
-            <a:r>
-              <a:rPr sz="2000" b="1">
-                <a:solidFill>
-                  <a:srgbClr val="333333"/>
-                </a:solidFill>
-                <a:latin typeface="Calibri"/>
-              </a:rPr>
-              <a:t>▸ Interpretability of deep-learning models</a:t>
+                <a:spcPts val="500"/>
+              </a:spcBef>
+            </a:pPr>
+            <a:r>
+              <a:rPr sz="1900" b="1">
+                <a:solidFill>
+                  <a:srgbClr val="1A1A1A"/>
+                </a:solidFill>
+                <a:latin typeface="Georgia"/>
+              </a:rPr>
+              <a:t>▸  PyMOL / UCSF ChimeraX</a:t>
             </a:r>
           </a:p>
           <a:p>
             <a:pPr lvl="1">
               <a:spcBef>
-                <a:spcPts val="400"/>
-              </a:spcBef>
-            </a:pPr>
-            <a:r>
-              <a:rPr sz="1700" b="0">
-                <a:solidFill>
-                  <a:srgbClr val="333333"/>
-                </a:solidFill>
-                <a:latin typeface="Calibri"/>
-              </a:rPr>
-              <a:t>    ◦ Understanding why a sequence folds as predicted</a:t>
+                <a:spcPts val="300"/>
+              </a:spcBef>
+            </a:pPr>
+            <a:r>
+              <a:rPr sz="1600" b="0">
+                <a:solidFill>
+                  <a:srgbClr val="1A1A1A"/>
+                </a:solidFill>
+                <a:latin typeface="Calibri"/>
+              </a:rPr>
+              <a:t>       ◦  Visualisation, manual mutagenesis, figure generation</a:t>
             </a:r>
           </a:p>
           <a:p>
             <a:pPr>
               <a:spcBef>
-                <a:spcPts val="400"/>
-              </a:spcBef>
-            </a:pPr>
-            <a:r>
-              <a:rPr sz="2000" b="1">
-                <a:solidFill>
-                  <a:srgbClr val="333333"/>
-                </a:solidFill>
-                <a:latin typeface="Calibri"/>
-              </a:rPr>
-              <a:t>▸ Future outlook</a:t>
+                <a:spcPts val="500"/>
+              </a:spcBef>
+            </a:pPr>
+            <a:r>
+              <a:rPr sz="1900" b="1">
+                <a:solidFill>
+                  <a:srgbClr val="1A1A1A"/>
+                </a:solidFill>
+                <a:latin typeface="Georgia"/>
+              </a:rPr>
+              <a:t>▸  GROMACS / OpenMM / AMBER</a:t>
             </a:r>
           </a:p>
           <a:p>
             <a:pPr lvl="1">
               <a:spcBef>
-                <a:spcPts val="400"/>
-              </a:spcBef>
-            </a:pPr>
-            <a:r>
-              <a:rPr sz="1700" b="0">
-                <a:solidFill>
-                  <a:srgbClr val="333333"/>
-                </a:solidFill>
-                <a:latin typeface="Calibri"/>
-              </a:rPr>
-              <a:t>    ◦ Fully automated design-build-test cycles</a:t>
+                <a:spcPts val="300"/>
+              </a:spcBef>
+            </a:pPr>
+            <a:r>
+              <a:rPr sz="1600" b="0">
+                <a:solidFill>
+                  <a:srgbClr val="1A1A1A"/>
+                </a:solidFill>
+                <a:latin typeface="Calibri"/>
+              </a:rPr>
+              <a:t>       ◦  Molecular dynamics — assess stability and dynamics of designs</a:t>
+            </a:r>
+          </a:p>
+          <a:p>
+            <a:pPr>
+              <a:spcBef>
+                <a:spcPts val="500"/>
+              </a:spcBef>
+            </a:pPr>
+            <a:r>
+              <a:rPr sz="1900" b="1">
+                <a:solidFill>
+                  <a:srgbClr val="1A1A1A"/>
+                </a:solidFill>
+                <a:latin typeface="Georgia"/>
+              </a:rPr>
+              <a:t>▸  Modeller</a:t>
             </a:r>
           </a:p>
           <a:p>
             <a:pPr lvl="1">
               <a:spcBef>
-                <a:spcPts val="400"/>
-              </a:spcBef>
-            </a:pPr>
-            <a:r>
-              <a:rPr sz="1700" b="0">
-                <a:solidFill>
-                  <a:srgbClr val="333333"/>
-                </a:solidFill>
-                <a:latin typeface="Calibri"/>
-              </a:rPr>
-              <a:t>    ◦ Foundation models fine-tuned on wet-lab feedback loops</a:t>
+                <a:spcPts val="300"/>
+              </a:spcBef>
+            </a:pPr>
+            <a:r>
+              <a:rPr sz="1600" b="0">
+                <a:solidFill>
+                  <a:srgbClr val="1A1A1A"/>
+                </a:solidFill>
+                <a:latin typeface="Calibri"/>
+              </a:rPr>
+              <a:t>       ◦  Homology modelling to build initial structural templates</a:t>
             </a:r>
           </a:p>
         </p:txBody>
@@ -5806,7 +9308,7 @@
             <a:avLst/>
           </a:prstGeom>
           <a:solidFill>
-            <a:srgbClr val="1A375E"/>
+            <a:srgbClr val="041E42"/>
           </a:solidFill>
           <a:ln>
             <a:noFill/>
@@ -5842,14 +9344,14 @@
         </p:nvSpPr>
         <p:spPr>
           <a:xfrm>
-            <a:off x="0" y="0"/>
-            <a:ext cx="365760" cy="6858000"/>
+            <a:off x="0" y="6629400"/>
+            <a:ext cx="12188952" cy="228600"/>
           </a:xfrm>
           <a:prstGeom prst="rect">
             <a:avLst/>
           </a:prstGeom>
           <a:solidFill>
-            <a:srgbClr val="00B0A0"/>
+            <a:srgbClr val="C8A951"/>
           </a:solidFill>
           <a:ln>
             <a:noFill/>
@@ -5879,44 +9381,36 @@
       </p:sp>
       <p:sp>
         <p:nvSpPr>
-          <p:cNvPr id="4" name="Rectangle 3"/>
-          <p:cNvSpPr/>
+          <p:cNvPr id="4" name="TextBox 3"/>
+          <p:cNvSpPr txBox="1"/>
           <p:nvPr/>
         </p:nvSpPr>
         <p:spPr>
           <a:xfrm>
-            <a:off x="0" y="5943600"/>
-            <a:ext cx="12188952" cy="914400"/>
-          </a:xfrm>
-          <a:prstGeom prst="rect">
-            <a:avLst/>
-          </a:prstGeom>
-          <a:solidFill>
-            <a:srgbClr val="275D9C"/>
-          </a:solidFill>
-          <a:ln>
-            <a:noFill/>
-          </a:ln>
-        </p:spPr>
-        <p:style>
-          <a:lnRef idx="1">
-            <a:schemeClr val="accent1"/>
-          </a:lnRef>
-          <a:fillRef idx="3">
-            <a:schemeClr val="accent1"/>
-          </a:fillRef>
-          <a:effectRef idx="2">
-            <a:schemeClr val="accent1"/>
-          </a:effectRef>
-          <a:fontRef idx="minor">
-            <a:schemeClr val="lt1"/>
-          </a:fontRef>
-        </p:style>
-        <p:txBody>
-          <a:bodyPr rtlCol="0" anchor="ctr"/>
-          <a:lstStyle/>
-          <a:p>
-            <a:pPr algn="ctr"/>
+            <a:off x="320040" y="137160"/>
+            <a:ext cx="11430000" cy="914400"/>
+          </a:xfrm>
+          <a:prstGeom prst="rect">
+            <a:avLst/>
+          </a:prstGeom>
+          <a:noFill/>
+        </p:spPr>
+        <p:txBody>
+          <a:bodyPr wrap="square">
+            <a:spAutoFit/>
+          </a:bodyPr>
+          <a:lstStyle/>
+          <a:p>
+            <a:pPr algn="l"/>
+            <a:r>
+              <a:rPr sz="3000" b="1">
+                <a:solidFill>
+                  <a:srgbClr val="FFFFFF"/>
+                </a:solidFill>
+                <a:latin typeface="Georgia"/>
+              </a:rPr>
+              <a:t>Deep-Learning Methods — Overview</a:t>
+            </a:r>
           </a:p>
         </p:txBody>
       </p:sp>
@@ -5928,8 +9422,8 @@
         </p:nvSpPr>
         <p:spPr>
           <a:xfrm>
-            <a:off x="640080" y="731520"/>
-            <a:ext cx="10515600" cy="914400"/>
+            <a:off x="11704320" y="6492240"/>
+            <a:ext cx="365760" cy="274320"/>
           </a:xfrm>
           <a:prstGeom prst="rect">
             <a:avLst/>
@@ -5942,15 +9436,15 @@
           </a:bodyPr>
           <a:lstStyle/>
           <a:p>
-            <a:pPr algn="ctr"/>
-            <a:r>
-              <a:rPr sz="4000" b="1">
-                <a:solidFill>
-                  <a:srgbClr val="FFFFFF"/>
-                </a:solidFill>
-                <a:latin typeface="Calibri"/>
-              </a:rPr>
-              <a:t>Summary</a:t>
+            <a:pPr algn="r"/>
+            <a:r>
+              <a:rPr sz="1100" b="0">
+                <a:solidFill>
+                  <a:srgbClr val="53565A"/>
+                </a:solidFill>
+                <a:latin typeface="Calibri"/>
+              </a:rPr>
+              <a:t>9</a:t>
             </a:r>
           </a:p>
         </p:txBody>
@@ -5963,8 +9457,8 @@
         </p:nvSpPr>
         <p:spPr>
           <a:xfrm>
-            <a:off x="731520" y="1828800"/>
-            <a:ext cx="10515600" cy="822960"/>
+            <a:off x="411480" y="1325880"/>
+            <a:ext cx="11338560" cy="5166360"/>
           </a:xfrm>
           <a:prstGeom prst="rect">
             <a:avLst/>
@@ -5977,147 +9471,75 @@
           </a:bodyPr>
           <a:lstStyle/>
           <a:p>
-            <a:pPr algn="l"/>
-            <a:r>
-              <a:rPr sz="2200" b="0">
+            <a:pPr>
+              <a:spcBef>
+                <a:spcPts val="500"/>
+              </a:spcBef>
+            </a:pPr>
+            <a:r>
+              <a:rPr sz="1900" b="1">
                 <a:solidFill>
                   <a:srgbClr val="FFFFFF"/>
                 </a:solidFill>
                 <a:latin typeface="Calibri"/>
               </a:rPr>
-              <a:t>✔  Protein design bridges sequence, structure, and function</a:t>
-            </a:r>
-          </a:p>
-        </p:txBody>
-      </p:sp>
-      <p:sp>
-        <p:nvSpPr>
-          <p:cNvPr id="7" name="TextBox 6"/>
-          <p:cNvSpPr txBox="1"/>
-          <p:nvPr/>
-        </p:nvSpPr>
-        <p:spPr>
-          <a:xfrm>
-            <a:off x="731520" y="2834640"/>
-            <a:ext cx="10515600" cy="822960"/>
-          </a:xfrm>
-          <a:prstGeom prst="rect">
-            <a:avLst/>
-          </a:prstGeom>
-          <a:noFill/>
-        </p:spPr>
-        <p:txBody>
-          <a:bodyPr wrap="square">
-            <a:spAutoFit/>
-          </a:bodyPr>
-          <a:lstStyle/>
-          <a:p>
-            <a:pPr algn="l"/>
-            <a:r>
-              <a:rPr sz="2200" b="0">
+              <a:t>▸  Why deep learning?</a:t>
+            </a:r>
+          </a:p>
+          <a:p>
+            <a:pPr lvl="1">
+              <a:spcBef>
+                <a:spcPts val="300"/>
+              </a:spcBef>
+            </a:pPr>
+            <a:r>
+              <a:rPr sz="1600" b="0">
                 <a:solidFill>
                   <a:srgbClr val="FFFFFF"/>
                 </a:solidFill>
                 <a:latin typeface="Calibri"/>
               </a:rPr>
-              <a:t>✔  Physics-based and ML approaches are increasingly complementary</a:t>
-            </a:r>
-          </a:p>
-        </p:txBody>
-      </p:sp>
-      <p:sp>
-        <p:nvSpPr>
-          <p:cNvPr id="8" name="TextBox 7"/>
-          <p:cNvSpPr txBox="1"/>
-          <p:nvPr/>
-        </p:nvSpPr>
-        <p:spPr>
-          <a:xfrm>
-            <a:off x="731520" y="3840480"/>
-            <a:ext cx="10515600" cy="822960"/>
-          </a:xfrm>
-          <a:prstGeom prst="rect">
-            <a:avLst/>
-          </a:prstGeom>
-          <a:noFill/>
-        </p:spPr>
-        <p:txBody>
-          <a:bodyPr wrap="square">
-            <a:spAutoFit/>
-          </a:bodyPr>
-          <a:lstStyle/>
-          <a:p>
-            <a:pPr algn="l"/>
-            <a:r>
-              <a:rPr sz="2200" b="0">
+              <a:t>       ◦  PDB contains &gt;220 000 structures — rich training data</a:t>
+            </a:r>
+          </a:p>
+          <a:p>
+            <a:pPr lvl="1">
+              <a:spcBef>
+                <a:spcPts val="300"/>
+              </a:spcBef>
+            </a:pPr>
+            <a:r>
+              <a:rPr sz="1600" b="0">
                 <a:solidFill>
                   <a:srgbClr val="FFFFFF"/>
                 </a:solidFill>
                 <a:latin typeface="Calibri"/>
               </a:rPr>
-              <a:t>✔  Deep-learning tools (RFdiffusion, ProteinMPNN) are transforming the field</a:t>
-            </a:r>
-          </a:p>
-        </p:txBody>
-      </p:sp>
-      <p:sp>
-        <p:nvSpPr>
-          <p:cNvPr id="9" name="TextBox 8"/>
-          <p:cNvSpPr txBox="1"/>
-          <p:nvPr/>
-        </p:nvSpPr>
-        <p:spPr>
-          <a:xfrm>
-            <a:off x="731520" y="4846320"/>
-            <a:ext cx="10515600" cy="822960"/>
-          </a:xfrm>
-          <a:prstGeom prst="rect">
-            <a:avLst/>
-          </a:prstGeom>
-          <a:noFill/>
-        </p:spPr>
-        <p:txBody>
-          <a:bodyPr wrap="square">
-            <a:spAutoFit/>
-          </a:bodyPr>
-          <a:lstStyle/>
-          <a:p>
-            <a:pPr algn="l"/>
-            <a:r>
-              <a:rPr sz="2200" b="0">
+              <a:t>       ◦  Models learn implicit rules of protein stability and interaction</a:t>
+            </a:r>
+          </a:p>
+          <a:p>
+            <a:pPr>
+              <a:spcBef>
+                <a:spcPts val="500"/>
+              </a:spcBef>
+            </a:pPr>
+            <a:r>
+              <a:rPr sz="1900" b="1">
                 <a:solidFill>
                   <a:srgbClr val="FFFFFF"/>
                 </a:solidFill>
                 <a:latin typeface="Calibri"/>
               </a:rPr>
-              <a:t>✔  Experimental validation and interpretability remain open challenges</a:t>
-            </a:r>
-          </a:p>
-        </p:txBody>
-      </p:sp>
-      <p:sp>
-        <p:nvSpPr>
-          <p:cNvPr id="10" name="TextBox 9"/>
-          <p:cNvSpPr txBox="1"/>
-          <p:nvPr/>
-        </p:nvSpPr>
-        <p:spPr>
-          <a:xfrm>
-            <a:off x="640080" y="6035040"/>
-            <a:ext cx="10515600" cy="548640"/>
-          </a:xfrm>
-          <a:prstGeom prst="rect">
-            <a:avLst/>
-          </a:prstGeom>
-          <a:noFill/>
-        </p:spPr>
-        <p:txBody>
-          <a:bodyPr wrap="square">
-            <a:spAutoFit/>
-          </a:bodyPr>
-          <a:lstStyle/>
-          <a:p>
-            <a:pPr algn="ctr"/>
+              <a:t>▸  Protein language models (PLMs)</a:t>
+            </a:r>
+          </a:p>
+          <a:p>
+            <a:pPr lvl="1">
+              <a:spcBef>
+                <a:spcPts val="300"/>
+              </a:spcBef>
+            </a:pPr>
             <a:r>
               <a:rPr sz="1600" b="0">
                 <a:solidFill>
@@ -6125,7 +9547,119 @@
                 </a:solidFill>
                 <a:latin typeface="Calibri"/>
               </a:rPr>
-              <a:t>Thank you  |  github.com/AlejandroCaloca/Protein-Design</a:t>
+              <a:t>       ◦  Trained on millions of sequences; capture evolutionary constraints</a:t>
+            </a:r>
+          </a:p>
+          <a:p>
+            <a:pPr lvl="1">
+              <a:spcBef>
+                <a:spcPts val="300"/>
+              </a:spcBef>
+            </a:pPr>
+            <a:r>
+              <a:rPr sz="1600" b="0">
+                <a:solidFill>
+                  <a:srgbClr val="FFFFFF"/>
+                </a:solidFill>
+                <a:latin typeface="Calibri"/>
+              </a:rPr>
+              <a:t>       ◦  ESM-2, ProtTrans, Ankh</a:t>
+            </a:r>
+          </a:p>
+          <a:p>
+            <a:pPr>
+              <a:spcBef>
+                <a:spcPts val="500"/>
+              </a:spcBef>
+            </a:pPr>
+            <a:r>
+              <a:rPr sz="1900" b="1">
+                <a:solidFill>
+                  <a:srgbClr val="FFFFFF"/>
+                </a:solidFill>
+                <a:latin typeface="Calibri"/>
+              </a:rPr>
+              <a:t>▸  Structure-conditioned models</a:t>
+            </a:r>
+          </a:p>
+          <a:p>
+            <a:pPr lvl="1">
+              <a:spcBef>
+                <a:spcPts val="300"/>
+              </a:spcBef>
+            </a:pPr>
+            <a:r>
+              <a:rPr sz="1600" b="0">
+                <a:solidFill>
+                  <a:srgbClr val="FFFFFF"/>
+                </a:solidFill>
+                <a:latin typeface="Calibri"/>
+              </a:rPr>
+              <a:t>       ◦  Take 3-D coordinates as input; predict optimal sequences</a:t>
+            </a:r>
+          </a:p>
+          <a:p>
+            <a:pPr>
+              <a:spcBef>
+                <a:spcPts val="500"/>
+              </a:spcBef>
+            </a:pPr>
+            <a:r>
+              <a:rPr sz="1900" b="1">
+                <a:solidFill>
+                  <a:srgbClr val="FFFFFF"/>
+                </a:solidFill>
+                <a:latin typeface="Calibri"/>
+              </a:rPr>
+              <a:t>▸  Generative models</a:t>
+            </a:r>
+          </a:p>
+          <a:p>
+            <a:pPr lvl="1">
+              <a:spcBef>
+                <a:spcPts val="300"/>
+              </a:spcBef>
+            </a:pPr>
+            <a:r>
+              <a:rPr sz="1600" b="0">
+                <a:solidFill>
+                  <a:srgbClr val="FFFFFF"/>
+                </a:solidFill>
+                <a:latin typeface="Calibri"/>
+              </a:rPr>
+              <a:t>       ◦  Hallucinate or diffuse entirely new backbones and sequences</a:t>
+            </a:r>
+          </a:p>
+          <a:p>
+            <a:pPr>
+              <a:spcBef>
+                <a:spcPts val="500"/>
+              </a:spcBef>
+            </a:pPr>
+            <a:r>
+              <a:rPr sz="1900" b="1">
+                <a:solidFill>
+                  <a:srgbClr val="FFFFFF"/>
+                </a:solidFill>
+                <a:latin typeface="Calibri"/>
+              </a:rPr>
+              <a:t>▸  Key advantage over physics</a:t>
+            </a:r>
+          </a:p>
+          <a:p>
+            <a:pPr lvl="1">
+              <a:spcBef>
+                <a:spcPts val="300"/>
+              </a:spcBef>
+            </a:pPr>
+            <a:r>
+              <a:rPr sz="1600" b="0">
+                <a:solidFill>
+                  <a:srgbClr val="FFFFFF"/>
+                </a:solidFill>
+                <a:latin typeface="Calibri"/>
+              </a:rPr>
+              <a:t>       ◦  Orders of magnitude faster; capture patterns hard to encode analytically</a:t>
             </a:r>
           </a:p>
         </p:txBody>
